--- a/slides/Capstone_Pitch_Deck.pptx
+++ b/slides/Capstone_Pitch_Deck.pptx
@@ -12,9 +12,12 @@
     <p:sldId id="260" r:id="rId6"/>
     <p:sldId id="261" r:id="rId7"/>
     <p:sldId id="262" r:id="rId8"/>
+    <p:sldId id="263" r:id="rId9"/>
+    <p:sldId id="264" r:id="rId10"/>
+    <p:sldId id="265" r:id="rId11"/>
   </p:sldIdLst>
   <p:notesMasterIdLst>
-    <p:notesMasterId r:id="rId9"/>
+    <p:notesMasterId r:id="rId12"/>
   </p:notesMasterIdLst>
   <p:sldSz cx="9144000" cy="5143500"/>
   <p:notesSz cx="5143500" cy="9144000"/>
@@ -550,6 +553,94 @@
 </p:notes>
 </file>
 
+<file path=ppt/notesSlides/notesSlide10.xml><?xml version="1.0" encoding="utf-8"?>
+<p:notes xmlns:a="http://schemas.openxmlformats.org/drawingml/2006/main" xmlns:r="http://schemas.openxmlformats.org/officeDocument/2006/relationships" xmlns:p="http://schemas.openxmlformats.org/presentationml/2006/main">
+  <p:cSld>
+    <p:spTree>
+      <p:nvGrpSpPr>
+        <p:cNvPr id="1" name=""/>
+        <p:cNvGrpSpPr/>
+        <p:nvPr/>
+      </p:nvGrpSpPr>
+      <p:grpSpPr>
+        <a:xfrm>
+          <a:off x="0" y="0"/>
+          <a:ext cx="0" cy="0"/>
+          <a:chOff x="0" y="0"/>
+          <a:chExt cx="0" cy="0"/>
+        </a:xfrm>
+      </p:grpSpPr>
+      <p:sp>
+        <p:nvSpPr>
+          <p:cNvPr id="2" name="Slide Image Placeholder 1"/>
+          <p:cNvSpPr>
+            <a:spLocks noGrp="1" noRot="1" noChangeAspect="1"/>
+          </p:cNvSpPr>
+          <p:nvPr>
+            <p:ph type="sldImg"/>
+          </p:nvPr>
+        </p:nvSpPr>
+        <p:spPr/>
+      </p:sp>
+      <p:sp>
+        <p:nvSpPr>
+          <p:cNvPr id="3" name="Notes Placeholder 2"/>
+          <p:cNvSpPr>
+            <a:spLocks noGrp="1"/>
+          </p:cNvSpPr>
+          <p:nvPr>
+            <p:ph type="body" idx="1"/>
+          </p:nvPr>
+        </p:nvSpPr>
+        <p:spPr/>
+        <p:txBody>
+          <a:bodyPr/>
+          <a:lstStyle/>
+          <a:p>
+            <a:r>
+              <a:rPr lang="en-US" dirty="0"/>
+              <a:t>Close on the scope so the coach sees this is bounded and shippable, then invite questions.</a:t>
+            </a:r>
+            <a:endParaRPr lang="en-US" dirty="0"/>
+          </a:p>
+        </p:txBody>
+      </p:sp>
+      <p:sp>
+        <p:nvSpPr>
+          <p:cNvPr id="4" name="Slide Number Placeholder 3"/>
+          <p:cNvSpPr>
+            <a:spLocks noGrp="1"/>
+          </p:cNvSpPr>
+          <p:nvPr>
+            <p:ph type="sldNum" sz="quarter" idx="10"/>
+          </p:nvPr>
+        </p:nvSpPr>
+        <p:spPr/>
+        <p:txBody>
+          <a:bodyPr/>
+          <a:lstStyle/>
+          <a:p>
+            <a:fld id="{F7021451-1387-4CA6-816F-3879F97B5CBC}" type="slidenum">
+              <a:rPr lang="en-US"/>
+              <a:t>10</a:t>
+            </a:fld>
+            <a:endParaRPr lang="en-US"/>
+          </a:p>
+        </p:txBody>
+      </p:sp>
+    </p:spTree>
+    <p:extLst>
+      <p:ext uri="{BB962C8B-B14F-4D97-AF65-F5344CB8AC3E}">
+        <p14:creationId xmlns:p14="http://schemas.microsoft.com/office/powerpoint/2010/main" val="1024086991"/>
+      </p:ext>
+    </p:extLst>
+  </p:cSld>
+  <p:clrMapOvr>
+    <a:masterClrMapping/>
+  </p:clrMapOvr>
+</p:notes>
+</file>
+
 <file path=ppt/notesSlides/notesSlide2.xml><?xml version="1.0" encoding="utf-8"?>
 <p:notes xmlns:a="http://schemas.openxmlformats.org/drawingml/2006/main" xmlns:r="http://schemas.openxmlformats.org/officeDocument/2006/relationships" xmlns:p="http://schemas.openxmlformats.org/presentationml/2006/main">
   <p:cSld>
@@ -772,7 +863,7 @@
           <a:p>
             <a:r>
               <a:rPr lang="en-US" dirty="0"/>
-              <a:t>Walk left to right, top to bottom: input triggers the orchestrator, which decides to call up to three tools, then the dashboard shows both the trace and the ticket.</a:t>
+              <a:t>This slide preempts the three questions people always ask: who is this for, why not customers, and is this pre- or post-production. Answer all three before they're asked: professional users (fleet manager primary, OEM engineer secondary), in-service vehicles already on the road (not a factory QA tool), and consumer-facing is an explicit future extension, not something ruled out.</a:t>
             </a:r>
             <a:endParaRPr lang="en-US" dirty="0"/>
           </a:p>
@@ -860,7 +951,7 @@
           <a:p>
             <a:r>
               <a:rPr lang="en-US" dirty="0"/>
-              <a:t>This is the slide that answers 'why is this hard / valuable.' The agent makes a decision at each step instead of following a fixed script.</a:t>
+              <a:t>Walk left to right, top to bottom: input triggers the orchestrator, which decides to call up to three tools, then the dashboard shows both the trace and the ticket.</a:t>
             </a:r>
             <a:endParaRPr lang="en-US" dirty="0"/>
           </a:p>
@@ -948,7 +1039,7 @@
           <a:p>
             <a:r>
               <a:rPr lang="en-US" dirty="0"/>
-              <a:t>Say this out loud to the coach: existing precedent validates the problem is real, not that the idea is unoriginal. Then pivot immediately to the differentiator line.</a:t>
+              <a:t>This slide is the rigor proof point: the dataset that looked good on paper failed a real signal test (AUC 0.4975), and the one we kept had to earn it (AUC 0.9999, semantically sensible feature importances). Full trial log in docs/Dataset_Selection_Log.md.</a:t>
             </a:r>
             <a:endParaRPr lang="en-US" dirty="0"/>
           </a:p>
@@ -1036,7 +1127,7 @@
           <a:p>
             <a:r>
               <a:rPr lang="en-US" dirty="0"/>
-              <a:t>Close on the scope so the coach sees this is bounded and shippable, then invite questions.</a:t>
+              <a:t>This slide exists so accuracy never gets asked about as a gotcha. Lead with why accuracy is the wrong metric here, then the three things reported instead, then the split methodology if asked.</a:t>
             </a:r>
             <a:endParaRPr lang="en-US" dirty="0"/>
           </a:p>
@@ -1060,6 +1151,182 @@
             <a:fld id="{F7021451-1387-4CA6-816F-3879F97B5CBC}" type="slidenum">
               <a:rPr lang="en-US"/>
               <a:t>7</a:t>
+            </a:fld>
+            <a:endParaRPr lang="en-US"/>
+          </a:p>
+        </p:txBody>
+      </p:sp>
+    </p:spTree>
+    <p:extLst>
+      <p:ext uri="{BB962C8B-B14F-4D97-AF65-F5344CB8AC3E}">
+        <p14:creationId xmlns:p14="http://schemas.microsoft.com/office/powerpoint/2010/main" val="1024086991"/>
+      </p:ext>
+    </p:extLst>
+  </p:cSld>
+  <p:clrMapOvr>
+    <a:masterClrMapping/>
+  </p:clrMapOvr>
+</p:notes>
+</file>
+
+<file path=ppt/notesSlides/notesSlide8.xml><?xml version="1.0" encoding="utf-8"?>
+<p:notes xmlns:a="http://schemas.openxmlformats.org/drawingml/2006/main" xmlns:r="http://schemas.openxmlformats.org/officeDocument/2006/relationships" xmlns:p="http://schemas.openxmlformats.org/presentationml/2006/main">
+  <p:cSld>
+    <p:spTree>
+      <p:nvGrpSpPr>
+        <p:cNvPr id="1" name=""/>
+        <p:cNvGrpSpPr/>
+        <p:nvPr/>
+      </p:nvGrpSpPr>
+      <p:grpSpPr>
+        <a:xfrm>
+          <a:off x="0" y="0"/>
+          <a:ext cx="0" cy="0"/>
+          <a:chOff x="0" y="0"/>
+          <a:chExt cx="0" cy="0"/>
+        </a:xfrm>
+      </p:grpSpPr>
+      <p:sp>
+        <p:nvSpPr>
+          <p:cNvPr id="2" name="Slide Image Placeholder 1"/>
+          <p:cNvSpPr>
+            <a:spLocks noGrp="1" noRot="1" noChangeAspect="1"/>
+          </p:cNvSpPr>
+          <p:nvPr>
+            <p:ph type="sldImg"/>
+          </p:nvPr>
+        </p:nvSpPr>
+        <p:spPr/>
+      </p:sp>
+      <p:sp>
+        <p:nvSpPr>
+          <p:cNvPr id="3" name="Notes Placeholder 2"/>
+          <p:cNvSpPr>
+            <a:spLocks noGrp="1"/>
+          </p:cNvSpPr>
+          <p:nvPr>
+            <p:ph type="body" idx="1"/>
+          </p:nvPr>
+        </p:nvSpPr>
+        <p:spPr/>
+        <p:txBody>
+          <a:bodyPr/>
+          <a:lstStyle/>
+          <a:p>
+            <a:r>
+              <a:rPr lang="en-US" dirty="0"/>
+              <a:t>This is the slide that answers 'why is this hard / valuable.' The agent makes a decision at each step instead of following a fixed script.</a:t>
+            </a:r>
+            <a:endParaRPr lang="en-US" dirty="0"/>
+          </a:p>
+        </p:txBody>
+      </p:sp>
+      <p:sp>
+        <p:nvSpPr>
+          <p:cNvPr id="4" name="Slide Number Placeholder 3"/>
+          <p:cNvSpPr>
+            <a:spLocks noGrp="1"/>
+          </p:cNvSpPr>
+          <p:nvPr>
+            <p:ph type="sldNum" sz="quarter" idx="10"/>
+          </p:nvPr>
+        </p:nvSpPr>
+        <p:spPr/>
+        <p:txBody>
+          <a:bodyPr/>
+          <a:lstStyle/>
+          <a:p>
+            <a:fld id="{F7021451-1387-4CA6-816F-3879F97B5CBC}" type="slidenum">
+              <a:rPr lang="en-US"/>
+              <a:t>8</a:t>
+            </a:fld>
+            <a:endParaRPr lang="en-US"/>
+          </a:p>
+        </p:txBody>
+      </p:sp>
+    </p:spTree>
+    <p:extLst>
+      <p:ext uri="{BB962C8B-B14F-4D97-AF65-F5344CB8AC3E}">
+        <p14:creationId xmlns:p14="http://schemas.microsoft.com/office/powerpoint/2010/main" val="1024086991"/>
+      </p:ext>
+    </p:extLst>
+  </p:cSld>
+  <p:clrMapOvr>
+    <a:masterClrMapping/>
+  </p:clrMapOvr>
+</p:notes>
+</file>
+
+<file path=ppt/notesSlides/notesSlide9.xml><?xml version="1.0" encoding="utf-8"?>
+<p:notes xmlns:a="http://schemas.openxmlformats.org/drawingml/2006/main" xmlns:r="http://schemas.openxmlformats.org/officeDocument/2006/relationships" xmlns:p="http://schemas.openxmlformats.org/presentationml/2006/main">
+  <p:cSld>
+    <p:spTree>
+      <p:nvGrpSpPr>
+        <p:cNvPr id="1" name=""/>
+        <p:cNvGrpSpPr/>
+        <p:nvPr/>
+      </p:nvGrpSpPr>
+      <p:grpSpPr>
+        <a:xfrm>
+          <a:off x="0" y="0"/>
+          <a:ext cx="0" cy="0"/>
+          <a:chOff x="0" y="0"/>
+          <a:chExt cx="0" cy="0"/>
+        </a:xfrm>
+      </p:grpSpPr>
+      <p:sp>
+        <p:nvSpPr>
+          <p:cNvPr id="2" name="Slide Image Placeholder 1"/>
+          <p:cNvSpPr>
+            <a:spLocks noGrp="1" noRot="1" noChangeAspect="1"/>
+          </p:cNvSpPr>
+          <p:nvPr>
+            <p:ph type="sldImg"/>
+          </p:nvPr>
+        </p:nvSpPr>
+        <p:spPr/>
+      </p:sp>
+      <p:sp>
+        <p:nvSpPr>
+          <p:cNvPr id="3" name="Notes Placeholder 2"/>
+          <p:cNvSpPr>
+            <a:spLocks noGrp="1"/>
+          </p:cNvSpPr>
+          <p:nvPr>
+            <p:ph type="body" idx="1"/>
+          </p:nvPr>
+        </p:nvSpPr>
+        <p:spPr/>
+        <p:txBody>
+          <a:bodyPr/>
+          <a:lstStyle/>
+          <a:p>
+            <a:r>
+              <a:rPr lang="en-US" dirty="0"/>
+              <a:t>Say this out loud to the coach: existing precedent validates the problem is real, not that the idea is unoriginal. Then pivot immediately to the differentiator line.</a:t>
+            </a:r>
+            <a:endParaRPr lang="en-US" dirty="0"/>
+          </a:p>
+        </p:txBody>
+      </p:sp>
+      <p:sp>
+        <p:nvSpPr>
+          <p:cNvPr id="4" name="Slide Number Placeholder 3"/>
+          <p:cNvSpPr>
+            <a:spLocks noGrp="1"/>
+          </p:cNvSpPr>
+          <p:nvPr>
+            <p:ph type="sldNum" sz="quarter" idx="10"/>
+          </p:nvPr>
+        </p:nvSpPr>
+        <p:spPr/>
+        <p:txBody>
+          <a:bodyPr/>
+          <a:lstStyle/>
+          <a:p>
+            <a:fld id="{F7021451-1387-4CA6-816F-3879F97B5CBC}" type="slidenum">
+              <a:rPr lang="en-US"/>
+              <a:t>9</a:t>
             </a:fld>
             <a:endParaRPr lang="en-US"/>
           </a:p>
@@ -1677,9 +1944,877 @@
                 <a:ea typeface="Calibri" pitchFamily="34" charset="-122"/>
                 <a:cs typeface="Calibri" pitchFamily="34" charset="-120"/>
               </a:rPr>
-              <a:t>CAPSTONE PROJECT  ·  neue fische Data Science &amp; AI Bootcamp  ·  Harsha Vardhan Ratnala</a:t>
+              <a:t>CAPSTONE PROJECT  ·  neue fische Data Science &amp; AI Bootcamp  ·  Harsha, Ghada &amp; Hüseyin</a:t>
             </a:r>
             <a:endParaRPr lang="en-US" sz="1100" dirty="0"/>
+          </a:p>
+        </p:txBody>
+      </p:sp>
+    </p:spTree>
+  </p:cSld>
+  <p:clrMapOvr>
+    <a:masterClrMapping/>
+  </p:clrMapOvr>
+</p:sld>
+</file>
+
+<file path=ppt/slides/slide10.xml><?xml version="1.0" encoding="utf-8"?>
+<p:sld xmlns:a="http://schemas.openxmlformats.org/drawingml/2006/main" xmlns:r="http://schemas.openxmlformats.org/officeDocument/2006/relationships" xmlns:p="http://schemas.openxmlformats.org/presentationml/2006/main">
+  <p:cSld name="Slide 10">
+    <p:bg>
+      <p:bgPr>
+        <a:solidFill>
+          <a:srgbClr val="1E2761"/>
+        </a:solidFill>
+      </p:bgPr>
+    </p:bg>
+    <p:spTree>
+      <p:nvGrpSpPr>
+        <p:cNvPr id="1" name=""/>
+        <p:cNvGrpSpPr/>
+        <p:nvPr/>
+      </p:nvGrpSpPr>
+      <p:grpSpPr>
+        <a:xfrm>
+          <a:off x="0" y="0"/>
+          <a:ext cx="0" cy="0"/>
+          <a:chOff x="0" y="0"/>
+          <a:chExt cx="0" cy="0"/>
+        </a:xfrm>
+      </p:grpSpPr>
+      <p:sp>
+        <p:nvSpPr>
+          <p:cNvPr id="2" name="Text 0"/>
+          <p:cNvSpPr/>
+          <p:nvPr/>
+        </p:nvSpPr>
+        <p:spPr>
+          <a:xfrm>
+            <a:off x="548640" y="365760"/>
+            <a:ext cx="8046720" cy="640080"/>
+          </a:xfrm>
+          <a:prstGeom prst="rect">
+            <a:avLst/>
+          </a:prstGeom>
+          <a:noFill/>
+          <a:ln/>
+        </p:spPr>
+        <p:txBody>
+          <a:bodyPr wrap="square" lIns="0" tIns="0" rIns="0" bIns="0" rtlCol="0" anchor="ctr"/>
+          <a:lstStyle/>
+          <a:p>
+            <a:pPr indent="0" marL="0">
+              <a:buNone/>
+            </a:pPr>
+            <a:r>
+              <a:rPr lang="en-US" sz="3000" b="1" dirty="0">
+                <a:solidFill>
+                  <a:srgbClr val="FFFFFF"/>
+                </a:solidFill>
+                <a:latin typeface="Calibri" pitchFamily="34" charset="0"/>
+                <a:ea typeface="Calibri" pitchFamily="34" charset="-122"/>
+                <a:cs typeface="Calibri" pitchFamily="34" charset="-120"/>
+              </a:rPr>
+              <a:t>4-Week Scope</a:t>
+            </a:r>
+            <a:endParaRPr lang="en-US" sz="3000" dirty="0"/>
+          </a:p>
+        </p:txBody>
+      </p:sp>
+      <p:sp>
+        <p:nvSpPr>
+          <p:cNvPr id="3" name="Shape 1"/>
+          <p:cNvSpPr/>
+          <p:nvPr/>
+        </p:nvSpPr>
+        <p:spPr>
+          <a:xfrm>
+            <a:off x="640080" y="1371600"/>
+            <a:ext cx="457200" cy="457200"/>
+          </a:xfrm>
+          <a:prstGeom prst="ellipse">
+            <a:avLst/>
+          </a:prstGeom>
+          <a:solidFill>
+            <a:srgbClr val="2A3372"/>
+          </a:solidFill>
+          <a:ln/>
+        </p:spPr>
+      </p:sp>
+      <p:pic>
+        <p:nvPicPr>
+          <p:cNvPr id="4" name="Image 0" descr="preencoded.png">    </p:cNvPr>
+          <p:cNvPicPr>
+            <a:picLocks noChangeAspect="1"/>
+          </p:cNvPicPr>
+          <p:nvPr/>
+        </p:nvPicPr>
+        <p:blipFill>
+          <a:blip r:embed="rId1"/>
+          <a:stretch>
+            <a:fillRect/>
+          </a:stretch>
+        </p:blipFill>
+        <p:spPr>
+          <a:xfrm>
+            <a:off x="749808" y="1472184"/>
+            <a:ext cx="256032" cy="256032"/>
+          </a:xfrm>
+          <a:prstGeom prst="rect">
+            <a:avLst/>
+          </a:prstGeom>
+        </p:spPr>
+      </p:pic>
+      <p:sp>
+        <p:nvSpPr>
+          <p:cNvPr id="5" name="Text 2"/>
+          <p:cNvSpPr/>
+          <p:nvPr/>
+        </p:nvSpPr>
+        <p:spPr>
+          <a:xfrm>
+            <a:off x="1280160" y="1344168"/>
+            <a:ext cx="3291840" cy="320040"/>
+          </a:xfrm>
+          <a:prstGeom prst="rect">
+            <a:avLst/>
+          </a:prstGeom>
+          <a:noFill/>
+          <a:ln/>
+        </p:spPr>
+        <p:txBody>
+          <a:bodyPr wrap="square" lIns="0" tIns="0" rIns="0" bIns="0" rtlCol="0" anchor="ctr"/>
+          <a:lstStyle/>
+          <a:p>
+            <a:pPr indent="0" marL="0">
+              <a:buNone/>
+            </a:pPr>
+            <a:r>
+              <a:rPr lang="en-US" sz="1400" b="1" dirty="0">
+                <a:solidFill>
+                  <a:srgbClr val="FFFFFF"/>
+                </a:solidFill>
+                <a:latin typeface="Calibri" pitchFamily="34" charset="0"/>
+                <a:ea typeface="Calibri" pitchFamily="34" charset="-122"/>
+                <a:cs typeface="Calibri" pitchFamily="34" charset="-120"/>
+              </a:rPr>
+              <a:t>Battery/EV subsystem — locked</a:t>
+            </a:r>
+            <a:endParaRPr lang="en-US" sz="1400" dirty="0"/>
+          </a:p>
+        </p:txBody>
+      </p:sp>
+      <p:sp>
+        <p:nvSpPr>
+          <p:cNvPr id="6" name="Text 3"/>
+          <p:cNvSpPr/>
+          <p:nvPr/>
+        </p:nvSpPr>
+        <p:spPr>
+          <a:xfrm>
+            <a:off x="1280160" y="1645920"/>
+            <a:ext cx="3566160" cy="274320"/>
+          </a:xfrm>
+          <a:prstGeom prst="rect">
+            <a:avLst/>
+          </a:prstGeom>
+          <a:noFill/>
+          <a:ln/>
+        </p:spPr>
+        <p:txBody>
+          <a:bodyPr wrap="square" lIns="0" tIns="0" rIns="0" bIns="0" rtlCol="0" anchor="ctr"/>
+          <a:lstStyle/>
+          <a:p>
+            <a:pPr indent="0" marL="0">
+              <a:buNone/>
+            </a:pPr>
+            <a:r>
+              <a:rPr lang="en-US" sz="1050" dirty="0">
+                <a:solidFill>
+                  <a:srgbClr val="CADCFC"/>
+                </a:solidFill>
+                <a:latin typeface="Calibri" pitchFamily="34" charset="0"/>
+                <a:ea typeface="Calibri" pitchFamily="34" charset="-122"/>
+                <a:cs typeface="Calibri" pitchFamily="34" charset="-120"/>
+              </a:rPr>
+              <a:t>real DTC-based dataset, 1.63% fault rate</a:t>
+            </a:r>
+            <a:endParaRPr lang="en-US" sz="1050" dirty="0"/>
+          </a:p>
+        </p:txBody>
+      </p:sp>
+      <p:sp>
+        <p:nvSpPr>
+          <p:cNvPr id="7" name="Shape 4"/>
+          <p:cNvSpPr/>
+          <p:nvPr/>
+        </p:nvSpPr>
+        <p:spPr>
+          <a:xfrm>
+            <a:off x="640080" y="1993392"/>
+            <a:ext cx="457200" cy="457200"/>
+          </a:xfrm>
+          <a:prstGeom prst="ellipse">
+            <a:avLst/>
+          </a:prstGeom>
+          <a:solidFill>
+            <a:srgbClr val="2A3372"/>
+          </a:solidFill>
+          <a:ln/>
+        </p:spPr>
+      </p:sp>
+      <p:pic>
+        <p:nvPicPr>
+          <p:cNvPr id="8" name="Image 1" descr="preencoded.png">    </p:cNvPr>
+          <p:cNvPicPr>
+            <a:picLocks noChangeAspect="1"/>
+          </p:cNvPicPr>
+          <p:nvPr/>
+        </p:nvPicPr>
+        <p:blipFill>
+          <a:blip r:embed="rId2"/>
+          <a:stretch>
+            <a:fillRect/>
+          </a:stretch>
+        </p:blipFill>
+        <p:spPr>
+          <a:xfrm>
+            <a:off x="749808" y="2093976"/>
+            <a:ext cx="256032" cy="256032"/>
+          </a:xfrm>
+          <a:prstGeom prst="rect">
+            <a:avLst/>
+          </a:prstGeom>
+        </p:spPr>
+      </p:pic>
+      <p:sp>
+        <p:nvSpPr>
+          <p:cNvPr id="9" name="Text 5"/>
+          <p:cNvSpPr/>
+          <p:nvPr/>
+        </p:nvSpPr>
+        <p:spPr>
+          <a:xfrm>
+            <a:off x="1280160" y="1965960"/>
+            <a:ext cx="3291840" cy="320040"/>
+          </a:xfrm>
+          <a:prstGeom prst="rect">
+            <a:avLst/>
+          </a:prstGeom>
+          <a:noFill/>
+          <a:ln/>
+        </p:spPr>
+        <p:txBody>
+          <a:bodyPr wrap="square" lIns="0" tIns="0" rIns="0" bIns="0" rtlCol="0" anchor="ctr"/>
+          <a:lstStyle/>
+          <a:p>
+            <a:pPr indent="0" marL="0">
+              <a:buNone/>
+            </a:pPr>
+            <a:r>
+              <a:rPr lang="en-US" sz="1400" b="1" dirty="0">
+                <a:solidFill>
+                  <a:srgbClr val="FFFFFF"/>
+                </a:solidFill>
+                <a:latin typeface="Calibri" pitchFamily="34" charset="0"/>
+                <a:ea typeface="Calibri" pitchFamily="34" charset="-122"/>
+                <a:cs typeface="Calibri" pitchFamily="34" charset="-120"/>
+              </a:rPr>
+              <a:t>Trained fault classifier</a:t>
+            </a:r>
+            <a:endParaRPr lang="en-US" sz="1400" dirty="0"/>
+          </a:p>
+        </p:txBody>
+      </p:sp>
+      <p:sp>
+        <p:nvSpPr>
+          <p:cNvPr id="10" name="Text 6"/>
+          <p:cNvSpPr/>
+          <p:nvPr/>
+        </p:nvSpPr>
+        <p:spPr>
+          <a:xfrm>
+            <a:off x="1280160" y="2267712"/>
+            <a:ext cx="3566160" cy="274320"/>
+          </a:xfrm>
+          <a:prstGeom prst="rect">
+            <a:avLst/>
+          </a:prstGeom>
+          <a:noFill/>
+          <a:ln/>
+        </p:spPr>
+        <p:txBody>
+          <a:bodyPr wrap="square" lIns="0" tIns="0" rIns="0" bIns="0" rtlCol="0" anchor="ctr"/>
+          <a:lstStyle/>
+          <a:p>
+            <a:pPr indent="0" marL="0">
+              <a:buNone/>
+            </a:pPr>
+            <a:r>
+              <a:rPr lang="en-US" sz="1050" dirty="0">
+                <a:solidFill>
+                  <a:srgbClr val="CADCFC"/>
+                </a:solidFill>
+                <a:latin typeface="Calibri" pitchFamily="34" charset="0"/>
+                <a:ea typeface="Calibri" pitchFamily="34" charset="-122"/>
+                <a:cs typeface="Calibri" pitchFamily="34" charset="-120"/>
+              </a:rPr>
+              <a:t>baseline → small neural net</a:t>
+            </a:r>
+            <a:endParaRPr lang="en-US" sz="1050" dirty="0"/>
+          </a:p>
+        </p:txBody>
+      </p:sp>
+      <p:sp>
+        <p:nvSpPr>
+          <p:cNvPr id="11" name="Shape 7"/>
+          <p:cNvSpPr/>
+          <p:nvPr/>
+        </p:nvSpPr>
+        <p:spPr>
+          <a:xfrm>
+            <a:off x="640080" y="2615184"/>
+            <a:ext cx="457200" cy="457200"/>
+          </a:xfrm>
+          <a:prstGeom prst="ellipse">
+            <a:avLst/>
+          </a:prstGeom>
+          <a:solidFill>
+            <a:srgbClr val="2A3372"/>
+          </a:solidFill>
+          <a:ln/>
+        </p:spPr>
+      </p:sp>
+      <p:pic>
+        <p:nvPicPr>
+          <p:cNvPr id="12" name="Image 2" descr="preencoded.png">    </p:cNvPr>
+          <p:cNvPicPr>
+            <a:picLocks noChangeAspect="1"/>
+          </p:cNvPicPr>
+          <p:nvPr/>
+        </p:nvPicPr>
+        <p:blipFill>
+          <a:blip r:embed="rId3"/>
+          <a:stretch>
+            <a:fillRect/>
+          </a:stretch>
+        </p:blipFill>
+        <p:spPr>
+          <a:xfrm>
+            <a:off x="749808" y="2715768"/>
+            <a:ext cx="256032" cy="256032"/>
+          </a:xfrm>
+          <a:prstGeom prst="rect">
+            <a:avLst/>
+          </a:prstGeom>
+        </p:spPr>
+      </p:pic>
+      <p:sp>
+        <p:nvSpPr>
+          <p:cNvPr id="13" name="Text 8"/>
+          <p:cNvSpPr/>
+          <p:nvPr/>
+        </p:nvSpPr>
+        <p:spPr>
+          <a:xfrm>
+            <a:off x="1280160" y="2587752"/>
+            <a:ext cx="3291840" cy="320040"/>
+          </a:xfrm>
+          <a:prstGeom prst="rect">
+            <a:avLst/>
+          </a:prstGeom>
+          <a:noFill/>
+          <a:ln/>
+        </p:spPr>
+        <p:txBody>
+          <a:bodyPr wrap="square" lIns="0" tIns="0" rIns="0" bIns="0" rtlCol="0" anchor="ctr"/>
+          <a:lstStyle/>
+          <a:p>
+            <a:pPr indent="0" marL="0">
+              <a:buNone/>
+            </a:pPr>
+            <a:r>
+              <a:rPr lang="en-US" sz="1400" b="1" dirty="0">
+                <a:solidFill>
+                  <a:srgbClr val="FFFFFF"/>
+                </a:solidFill>
+                <a:latin typeface="Calibri" pitchFamily="34" charset="0"/>
+                <a:ea typeface="Calibri" pitchFamily="34" charset="-122"/>
+                <a:cs typeface="Calibri" pitchFamily="34" charset="-120"/>
+              </a:rPr>
+              <a:t>NHTSA-grounded retrieval</a:t>
+            </a:r>
+            <a:endParaRPr lang="en-US" sz="1400" dirty="0"/>
+          </a:p>
+        </p:txBody>
+      </p:sp>
+      <p:sp>
+        <p:nvSpPr>
+          <p:cNvPr id="14" name="Text 9"/>
+          <p:cNvSpPr/>
+          <p:nvPr/>
+        </p:nvSpPr>
+        <p:spPr>
+          <a:xfrm>
+            <a:off x="1280160" y="2889504"/>
+            <a:ext cx="3566160" cy="274320"/>
+          </a:xfrm>
+          <a:prstGeom prst="rect">
+            <a:avLst/>
+          </a:prstGeom>
+          <a:noFill/>
+          <a:ln/>
+        </p:spPr>
+        <p:txBody>
+          <a:bodyPr wrap="square" lIns="0" tIns="0" rIns="0" bIns="0" rtlCol="0" anchor="ctr"/>
+          <a:lstStyle/>
+          <a:p>
+            <a:pPr indent="0" marL="0">
+              <a:buNone/>
+            </a:pPr>
+            <a:r>
+              <a:rPr lang="en-US" sz="1050" dirty="0">
+                <a:solidFill>
+                  <a:srgbClr val="CADCFC"/>
+                </a:solidFill>
+                <a:latin typeface="Calibri" pitchFamily="34" charset="0"/>
+                <a:ea typeface="Calibri" pitchFamily="34" charset="-122"/>
+                <a:cs typeface="Calibri" pitchFamily="34" charset="-120"/>
+              </a:rPr>
+              <a:t>202 recalls + 3,329 complaints filtered</a:t>
+            </a:r>
+            <a:endParaRPr lang="en-US" sz="1050" dirty="0"/>
+          </a:p>
+        </p:txBody>
+      </p:sp>
+      <p:sp>
+        <p:nvSpPr>
+          <p:cNvPr id="15" name="Shape 10"/>
+          <p:cNvSpPr/>
+          <p:nvPr/>
+        </p:nvSpPr>
+        <p:spPr>
+          <a:xfrm>
+            <a:off x="640080" y="3236976"/>
+            <a:ext cx="457200" cy="457200"/>
+          </a:xfrm>
+          <a:prstGeom prst="ellipse">
+            <a:avLst/>
+          </a:prstGeom>
+          <a:solidFill>
+            <a:srgbClr val="2A3372"/>
+          </a:solidFill>
+          <a:ln/>
+        </p:spPr>
+      </p:sp>
+      <p:pic>
+        <p:nvPicPr>
+          <p:cNvPr id="16" name="Image 3" descr="preencoded.png">    </p:cNvPr>
+          <p:cNvPicPr>
+            <a:picLocks noChangeAspect="1"/>
+          </p:cNvPicPr>
+          <p:nvPr/>
+        </p:nvPicPr>
+        <p:blipFill>
+          <a:blip r:embed="rId4"/>
+          <a:stretch>
+            <a:fillRect/>
+          </a:stretch>
+        </p:blipFill>
+        <p:spPr>
+          <a:xfrm>
+            <a:off x="749808" y="3337560"/>
+            <a:ext cx="256032" cy="256032"/>
+          </a:xfrm>
+          <a:prstGeom prst="rect">
+            <a:avLst/>
+          </a:prstGeom>
+        </p:spPr>
+      </p:pic>
+      <p:sp>
+        <p:nvSpPr>
+          <p:cNvPr id="17" name="Text 11"/>
+          <p:cNvSpPr/>
+          <p:nvPr/>
+        </p:nvSpPr>
+        <p:spPr>
+          <a:xfrm>
+            <a:off x="1280160" y="3209544"/>
+            <a:ext cx="3291840" cy="320040"/>
+          </a:xfrm>
+          <a:prstGeom prst="rect">
+            <a:avLst/>
+          </a:prstGeom>
+          <a:noFill/>
+          <a:ln/>
+        </p:spPr>
+        <p:txBody>
+          <a:bodyPr wrap="square" lIns="0" tIns="0" rIns="0" bIns="0" rtlCol="0" anchor="ctr"/>
+          <a:lstStyle/>
+          <a:p>
+            <a:pPr indent="0" marL="0">
+              <a:buNone/>
+            </a:pPr>
+            <a:r>
+              <a:rPr lang="en-US" sz="1400" b="1" dirty="0">
+                <a:solidFill>
+                  <a:srgbClr val="FFFFFF"/>
+                </a:solidFill>
+                <a:latin typeface="Calibri" pitchFamily="34" charset="0"/>
+                <a:ea typeface="Calibri" pitchFamily="34" charset="-122"/>
+                <a:cs typeface="Calibri" pitchFamily="34" charset="-120"/>
+              </a:rPr>
+              <a:t>Agentic ticket generation</a:t>
+            </a:r>
+            <a:endParaRPr lang="en-US" sz="1400" dirty="0"/>
+          </a:p>
+        </p:txBody>
+      </p:sp>
+      <p:sp>
+        <p:nvSpPr>
+          <p:cNvPr id="18" name="Text 12"/>
+          <p:cNvSpPr/>
+          <p:nvPr/>
+        </p:nvSpPr>
+        <p:spPr>
+          <a:xfrm>
+            <a:off x="1280160" y="3511296"/>
+            <a:ext cx="3566160" cy="274320"/>
+          </a:xfrm>
+          <a:prstGeom prst="rect">
+            <a:avLst/>
+          </a:prstGeom>
+          <a:noFill/>
+          <a:ln/>
+        </p:spPr>
+        <p:txBody>
+          <a:bodyPr wrap="square" lIns="0" tIns="0" rIns="0" bIns="0" rtlCol="0" anchor="ctr"/>
+          <a:lstStyle/>
+          <a:p>
+            <a:pPr indent="0" marL="0">
+              <a:buNone/>
+            </a:pPr>
+            <a:r>
+              <a:rPr lang="en-US" sz="1050" dirty="0">
+                <a:solidFill>
+                  <a:srgbClr val="CADCFC"/>
+                </a:solidFill>
+                <a:latin typeface="Calibri" pitchFamily="34" charset="0"/>
+                <a:ea typeface="Calibri" pitchFamily="34" charset="-122"/>
+                <a:cs typeface="Calibri" pitchFamily="34" charset="-120"/>
+              </a:rPr>
+              <a:t>tool-calling loop + guardrails</a:t>
+            </a:r>
+            <a:endParaRPr lang="en-US" sz="1050" dirty="0"/>
+          </a:p>
+        </p:txBody>
+      </p:sp>
+      <p:sp>
+        <p:nvSpPr>
+          <p:cNvPr id="19" name="Shape 13"/>
+          <p:cNvSpPr/>
+          <p:nvPr/>
+        </p:nvSpPr>
+        <p:spPr>
+          <a:xfrm>
+            <a:off x="640080" y="3858768"/>
+            <a:ext cx="457200" cy="457200"/>
+          </a:xfrm>
+          <a:prstGeom prst="ellipse">
+            <a:avLst/>
+          </a:prstGeom>
+          <a:solidFill>
+            <a:srgbClr val="2A3372"/>
+          </a:solidFill>
+          <a:ln/>
+        </p:spPr>
+      </p:sp>
+      <p:pic>
+        <p:nvPicPr>
+          <p:cNvPr id="20" name="Image 4" descr="preencoded.png">    </p:cNvPr>
+          <p:cNvPicPr>
+            <a:picLocks noChangeAspect="1"/>
+          </p:cNvPicPr>
+          <p:nvPr/>
+        </p:nvPicPr>
+        <p:blipFill>
+          <a:blip r:embed="rId5"/>
+          <a:stretch>
+            <a:fillRect/>
+          </a:stretch>
+        </p:blipFill>
+        <p:spPr>
+          <a:xfrm>
+            <a:off x="749808" y="3959352"/>
+            <a:ext cx="256032" cy="256032"/>
+          </a:xfrm>
+          <a:prstGeom prst="rect">
+            <a:avLst/>
+          </a:prstGeom>
+        </p:spPr>
+      </p:pic>
+      <p:sp>
+        <p:nvSpPr>
+          <p:cNvPr id="21" name="Text 14"/>
+          <p:cNvSpPr/>
+          <p:nvPr/>
+        </p:nvSpPr>
+        <p:spPr>
+          <a:xfrm>
+            <a:off x="1280160" y="3831336"/>
+            <a:ext cx="3291840" cy="320040"/>
+          </a:xfrm>
+          <a:prstGeom prst="rect">
+            <a:avLst/>
+          </a:prstGeom>
+          <a:noFill/>
+          <a:ln/>
+        </p:spPr>
+        <p:txBody>
+          <a:bodyPr wrap="square" lIns="0" tIns="0" rIns="0" bIns="0" rtlCol="0" anchor="ctr"/>
+          <a:lstStyle/>
+          <a:p>
+            <a:pPr indent="0" marL="0">
+              <a:buNone/>
+            </a:pPr>
+            <a:r>
+              <a:rPr lang="en-US" sz="1400" b="1" dirty="0">
+                <a:solidFill>
+                  <a:srgbClr val="FFFFFF"/>
+                </a:solidFill>
+                <a:latin typeface="Calibri" pitchFamily="34" charset="0"/>
+                <a:ea typeface="Calibri" pitchFamily="34" charset="-122"/>
+                <a:cs typeface="Calibri" pitchFamily="34" charset="-120"/>
+              </a:rPr>
+              <a:t>Deployed dashboard</a:t>
+            </a:r>
+            <a:endParaRPr lang="en-US" sz="1400" dirty="0"/>
+          </a:p>
+        </p:txBody>
+      </p:sp>
+      <p:sp>
+        <p:nvSpPr>
+          <p:cNvPr id="22" name="Text 15"/>
+          <p:cNvSpPr/>
+          <p:nvPr/>
+        </p:nvSpPr>
+        <p:spPr>
+          <a:xfrm>
+            <a:off x="1280160" y="4133088"/>
+            <a:ext cx="3566160" cy="274320"/>
+          </a:xfrm>
+          <a:prstGeom prst="rect">
+            <a:avLst/>
+          </a:prstGeom>
+          <a:noFill/>
+          <a:ln/>
+        </p:spPr>
+        <p:txBody>
+          <a:bodyPr wrap="square" lIns="0" tIns="0" rIns="0" bIns="0" rtlCol="0" anchor="ctr"/>
+          <a:lstStyle/>
+          <a:p>
+            <a:pPr indent="0" marL="0">
+              <a:buNone/>
+            </a:pPr>
+            <a:r>
+              <a:rPr lang="en-US" sz="1050" dirty="0">
+                <a:solidFill>
+                  <a:srgbClr val="CADCFC"/>
+                </a:solidFill>
+                <a:latin typeface="Calibri" pitchFamily="34" charset="0"/>
+                <a:ea typeface="Calibri" pitchFamily="34" charset="-122"/>
+                <a:cs typeface="Calibri" pitchFamily="34" charset="-120"/>
+              </a:rPr>
+              <a:t>trace view + ops metrics</a:t>
+            </a:r>
+            <a:endParaRPr lang="en-US" sz="1050" dirty="0"/>
+          </a:p>
+        </p:txBody>
+      </p:sp>
+      <p:sp>
+        <p:nvSpPr>
+          <p:cNvPr id="23" name="Shape 16"/>
+          <p:cNvSpPr/>
+          <p:nvPr/>
+        </p:nvSpPr>
+        <p:spPr>
+          <a:xfrm>
+            <a:off x="5120640" y="1371600"/>
+            <a:ext cx="3474720" cy="3108960"/>
+          </a:xfrm>
+          <a:prstGeom prst="roundRect">
+            <a:avLst>
+              <a:gd name="adj" fmla="val 3529"/>
+            </a:avLst>
+          </a:prstGeom>
+          <a:solidFill>
+            <a:srgbClr val="161C4A"/>
+          </a:solidFill>
+          <a:ln/>
+          <a:effectLst>
+            <a:outerShdw sx="100000" sy="100000" kx="0" ky="0" algn="bl" rotWithShape="0" blurRad="127000" dist="38100" dir="2700000">
+              <a:srgbClr val="0B1030">
+                <a:alpha val="18000"/>
+              </a:srgbClr>
+            </a:outerShdw>
+          </a:effectLst>
+        </p:spPr>
+      </p:sp>
+      <p:sp>
+        <p:nvSpPr>
+          <p:cNvPr id="24" name="Shape 17"/>
+          <p:cNvSpPr/>
+          <p:nvPr/>
+        </p:nvSpPr>
+        <p:spPr>
+          <a:xfrm>
+            <a:off x="6355080" y="1691640"/>
+            <a:ext cx="1005840" cy="1005840"/>
+          </a:xfrm>
+          <a:prstGeom prst="ellipse">
+            <a:avLst/>
+          </a:prstGeom>
+          <a:solidFill>
+            <a:srgbClr val="2A3372"/>
+          </a:solidFill>
+          <a:ln/>
+        </p:spPr>
+      </p:sp>
+      <p:pic>
+        <p:nvPicPr>
+          <p:cNvPr id="25" name="Image 5" descr="preencoded.png">    </p:cNvPr>
+          <p:cNvPicPr>
+            <a:picLocks noChangeAspect="1"/>
+          </p:cNvPicPr>
+          <p:nvPr/>
+        </p:nvPicPr>
+        <p:blipFill>
+          <a:blip r:embed="rId6"/>
+          <a:stretch>
+            <a:fillRect/>
+          </a:stretch>
+        </p:blipFill>
+        <p:spPr>
+          <a:xfrm>
+            <a:off x="6616598" y="1953158"/>
+            <a:ext cx="482803" cy="482803"/>
+          </a:xfrm>
+          <a:prstGeom prst="rect">
+            <a:avLst/>
+          </a:prstGeom>
+        </p:spPr>
+      </p:pic>
+      <p:sp>
+        <p:nvSpPr>
+          <p:cNvPr id="26" name="Text 18"/>
+          <p:cNvSpPr/>
+          <p:nvPr/>
+        </p:nvSpPr>
+        <p:spPr>
+          <a:xfrm>
+            <a:off x="5303520" y="2880360"/>
+            <a:ext cx="3108960" cy="548640"/>
+          </a:xfrm>
+          <a:prstGeom prst="rect">
+            <a:avLst/>
+          </a:prstGeom>
+          <a:noFill/>
+          <a:ln/>
+        </p:spPr>
+        <p:txBody>
+          <a:bodyPr wrap="square" lIns="0" tIns="0" rIns="0" bIns="0" rtlCol="0" anchor="ctr"/>
+          <a:lstStyle/>
+          <a:p>
+            <a:pPr algn="ctr" indent="0" marL="0">
+              <a:buNone/>
+            </a:pPr>
+            <a:r>
+              <a:rPr lang="en-US" sz="1800" b="1" dirty="0">
+                <a:solidFill>
+                  <a:srgbClr val="F2A93B"/>
+                </a:solidFill>
+                <a:latin typeface="Calibri" pitchFamily="34" charset="0"/>
+                <a:ea typeface="Calibri" pitchFamily="34" charset="-122"/>
+                <a:cs typeface="Calibri" pitchFamily="34" charset="-120"/>
+              </a:rPr>
+              <a:t>Let's diagnose smarter.</a:t>
+            </a:r>
+            <a:endParaRPr lang="en-US" sz="1800" dirty="0"/>
+          </a:p>
+        </p:txBody>
+      </p:sp>
+      <p:sp>
+        <p:nvSpPr>
+          <p:cNvPr id="27" name="Text 19"/>
+          <p:cNvSpPr/>
+          <p:nvPr/>
+        </p:nvSpPr>
+        <p:spPr>
+          <a:xfrm>
+            <a:off x="5303520" y="3429000"/>
+            <a:ext cx="3108960" cy="365760"/>
+          </a:xfrm>
+          <a:prstGeom prst="rect">
+            <a:avLst/>
+          </a:prstGeom>
+          <a:noFill/>
+          <a:ln/>
+        </p:spPr>
+        <p:txBody>
+          <a:bodyPr wrap="square" lIns="0" tIns="0" rIns="0" bIns="0" rtlCol="0" anchor="ctr"/>
+          <a:lstStyle/>
+          <a:p>
+            <a:pPr algn="ctr" indent="0" marL="0">
+              <a:buNone/>
+            </a:pPr>
+            <a:r>
+              <a:rPr lang="en-US" sz="1200" i="1" dirty="0">
+                <a:solidFill>
+                  <a:srgbClr val="CADCFC"/>
+                </a:solidFill>
+                <a:latin typeface="Calibri" pitchFamily="34" charset="0"/>
+                <a:ea typeface="Calibri" pitchFamily="34" charset="-122"/>
+                <a:cs typeface="Calibri" pitchFamily="34" charset="-120"/>
+              </a:rPr>
+              <a:t>Feedback &amp; questions welcome</a:t>
+            </a:r>
+            <a:endParaRPr lang="en-US" sz="1200" dirty="0"/>
+          </a:p>
+        </p:txBody>
+      </p:sp>
+      <p:sp>
+        <p:nvSpPr>
+          <p:cNvPr id="28" name="Text 20"/>
+          <p:cNvSpPr/>
+          <p:nvPr/>
+        </p:nvSpPr>
+        <p:spPr>
+          <a:xfrm>
+            <a:off x="8732520" y="4800600"/>
+            <a:ext cx="365760" cy="274320"/>
+          </a:xfrm>
+          <a:prstGeom prst="rect">
+            <a:avLst/>
+          </a:prstGeom>
+          <a:noFill/>
+          <a:ln/>
+        </p:spPr>
+        <p:txBody>
+          <a:bodyPr wrap="square" lIns="0" tIns="0" rIns="0" bIns="0" rtlCol="0" anchor="ctr"/>
+          <a:lstStyle/>
+          <a:p>
+            <a:pPr algn="r" indent="0" marL="0">
+              <a:buNone/>
+            </a:pPr>
+            <a:r>
+              <a:rPr lang="en-US" sz="1000" dirty="0">
+                <a:solidFill>
+                  <a:srgbClr val="CADCFC"/>
+                </a:solidFill>
+              </a:rPr>
+              <a:t>10</a:t>
+            </a:r>
+            <a:endParaRPr lang="en-US" sz="1000" dirty="0"/>
           </a:p>
         </p:txBody>
       </p:sp>
@@ -2678,7 +3813,7 @@
                 <a:ea typeface="Calibri" pitchFamily="34" charset="-122"/>
                 <a:cs typeface="Calibri" pitchFamily="34" charset="-120"/>
               </a:rPr>
-              <a:t>How It Works</a:t>
+              <a:t>Who This Is For — And Why</a:t>
             </a:r>
             <a:endParaRPr lang="en-US" sz="3000" dirty="0"/>
           </a:p>
@@ -2692,16 +3827,16 @@
         </p:nvSpPr>
         <p:spPr>
           <a:xfrm>
-            <a:off x="3200400" y="1051560"/>
-            <a:ext cx="2743200" cy="502920"/>
+            <a:off x="548640" y="1234440"/>
+            <a:ext cx="3840480" cy="3246120"/>
           </a:xfrm>
           <a:prstGeom prst="roundRect">
             <a:avLst>
-              <a:gd name="adj" fmla="val 18182"/>
+              <a:gd name="adj" fmla="val 3380"/>
             </a:avLst>
           </a:prstGeom>
           <a:solidFill>
-            <a:srgbClr val="EEF3FD"/>
+            <a:srgbClr val="FFFFFF"/>
           </a:solidFill>
           <a:ln/>
           <a:effectLst>
@@ -2721,74 +3856,240 @@
         </p:nvSpPr>
         <p:spPr>
           <a:xfrm>
-            <a:off x="3200400" y="1051560"/>
-            <a:ext cx="2743200" cy="502920"/>
-          </a:xfrm>
-          <a:prstGeom prst="rect">
-            <a:avLst/>
-          </a:prstGeom>
-          <a:noFill/>
-          <a:ln/>
-        </p:spPr>
-        <p:txBody>
-          <a:bodyPr wrap="square" lIns="50800" tIns="50800" rIns="50800" bIns="50800" rtlCol="0" anchor="ctr"/>
-          <a:lstStyle/>
-          <a:p>
-            <a:pPr algn="ctr" indent="0" marL="0">
-              <a:buNone/>
-            </a:pPr>
-            <a:r>
-              <a:rPr lang="en-US" sz="1300" b="1" dirty="0">
-                <a:solidFill>
-                  <a:srgbClr val="1E2761"/>
-                </a:solidFill>
-                <a:latin typeface="Calibri" pitchFamily="34" charset="0"/>
-                <a:ea typeface="Calibri" pitchFamily="34" charset="-122"/>
-                <a:cs typeface="Calibri" pitchFamily="34" charset="-120"/>
-              </a:rPr>
-              <a:t>Sensor / DTC Input</a:t>
-            </a:r>
-            <a:endParaRPr lang="en-US" sz="1300" dirty="0"/>
-          </a:p>
-        </p:txBody>
-      </p:sp>
-      <p:sp>
-        <p:nvSpPr>
-          <p:cNvPr id="5" name="Shape 3"/>
-          <p:cNvSpPr/>
-          <p:nvPr/>
-        </p:nvSpPr>
-        <p:spPr>
-          <a:xfrm>
-            <a:off x="4572000" y="1572768"/>
-            <a:ext cx="0" cy="292608"/>
-          </a:xfrm>
-          <a:prstGeom prst="line">
-            <a:avLst/>
-          </a:prstGeom>
-          <a:noFill/>
-          <a:ln w="19050">
-            <a:solidFill>
-              <a:srgbClr val="5B6478"/>
-            </a:solidFill>
-            <a:prstDash val="solid"/>
-          </a:ln>
-        </p:spPr>
-      </p:sp>
-      <p:sp>
-        <p:nvSpPr>
-          <p:cNvPr id="6" name="Shape 4"/>
-          <p:cNvSpPr/>
-          <p:nvPr/>
-        </p:nvSpPr>
-        <p:spPr>
-          <a:xfrm>
-            <a:off x="2743200" y="1901952"/>
-            <a:ext cx="3657600" cy="594360"/>
+            <a:off x="822960" y="1417320"/>
+            <a:ext cx="3291840" cy="365760"/>
+          </a:xfrm>
+          <a:prstGeom prst="rect">
+            <a:avLst/>
+          </a:prstGeom>
+          <a:noFill/>
+          <a:ln/>
+        </p:spPr>
+        <p:txBody>
+          <a:bodyPr wrap="square" lIns="0" tIns="0" rIns="0" bIns="0" rtlCol="0" anchor="ctr"/>
+          <a:lstStyle/>
+          <a:p>
+            <a:pPr indent="0" marL="0">
+              <a:buNone/>
+            </a:pPr>
+            <a:r>
+              <a:rPr lang="en-US" sz="1600" b="1" dirty="0">
+                <a:solidFill>
+                  <a:srgbClr val="5B6478"/>
+                </a:solidFill>
+                <a:latin typeface="Calibri" pitchFamily="34" charset="0"/>
+                <a:ea typeface="Calibri" pitchFamily="34" charset="-122"/>
+                <a:cs typeface="Calibri" pitchFamily="34" charset="-120"/>
+              </a:rPr>
+              <a:t>Not (yet) a consumer app</a:t>
+            </a:r>
+            <a:endParaRPr lang="en-US" sz="1600" dirty="0"/>
+          </a:p>
+        </p:txBody>
+      </p:sp>
+      <p:pic>
+        <p:nvPicPr>
+          <p:cNvPr id="5" name="Image 0" descr="preencoded.png">    </p:cNvPr>
+          <p:cNvPicPr>
+            <a:picLocks noChangeAspect="1"/>
+          </p:cNvPicPr>
+          <p:nvPr/>
+        </p:nvPicPr>
+        <p:blipFill>
+          <a:blip r:embed="rId1"/>
+          <a:stretch>
+            <a:fillRect/>
+          </a:stretch>
+        </p:blipFill>
+        <p:spPr>
+          <a:xfrm>
+            <a:off x="868680" y="1965960"/>
+            <a:ext cx="292608" cy="292608"/>
+          </a:xfrm>
+          <a:prstGeom prst="rect">
+            <a:avLst/>
+          </a:prstGeom>
+        </p:spPr>
+      </p:pic>
+      <p:sp>
+        <p:nvSpPr>
+          <p:cNvPr id="6" name="Text 3"/>
+          <p:cNvSpPr/>
+          <p:nvPr/>
+        </p:nvSpPr>
+        <p:spPr>
+          <a:xfrm>
+            <a:off x="1280160" y="1901952"/>
+            <a:ext cx="2926080" cy="685800"/>
+          </a:xfrm>
+          <a:prstGeom prst="rect">
+            <a:avLst/>
+          </a:prstGeom>
+          <a:noFill/>
+          <a:ln/>
+        </p:spPr>
+        <p:txBody>
+          <a:bodyPr wrap="square" lIns="0" tIns="0" rIns="0" bIns="0" rtlCol="0" anchor="ctr"/>
+          <a:lstStyle/>
+          <a:p>
+            <a:pPr indent="0" marL="0">
+              <a:buNone/>
+            </a:pPr>
+            <a:r>
+              <a:rPr lang="en-US" sz="1200" dirty="0">
+                <a:solidFill>
+                  <a:srgbClr val="3D4560"/>
+                </a:solidFill>
+                <a:latin typeface="Calibri" pitchFamily="34" charset="0"/>
+                <a:ea typeface="Calibri" pitchFamily="34" charset="-122"/>
+                <a:cs typeface="Calibri" pitchFamily="34" charset="-120"/>
+              </a:rPr>
+              <a:t>A driver-facing safety call needs a much higher trust/liability bar</a:t>
+            </a:r>
+            <a:endParaRPr lang="en-US" sz="1200" dirty="0"/>
+          </a:p>
+        </p:txBody>
+      </p:sp>
+      <p:pic>
+        <p:nvPicPr>
+          <p:cNvPr id="7" name="Image 1" descr="preencoded.png">    </p:cNvPr>
+          <p:cNvPicPr>
+            <a:picLocks noChangeAspect="1"/>
+          </p:cNvPicPr>
+          <p:nvPr/>
+        </p:nvPicPr>
+        <p:blipFill>
+          <a:blip r:embed="rId2"/>
+          <a:stretch>
+            <a:fillRect/>
+          </a:stretch>
+        </p:blipFill>
+        <p:spPr>
+          <a:xfrm>
+            <a:off x="868680" y="2743200"/>
+            <a:ext cx="292608" cy="292608"/>
+          </a:xfrm>
+          <a:prstGeom prst="rect">
+            <a:avLst/>
+          </a:prstGeom>
+        </p:spPr>
+      </p:pic>
+      <p:sp>
+        <p:nvSpPr>
+          <p:cNvPr id="8" name="Text 4"/>
+          <p:cNvSpPr/>
+          <p:nvPr/>
+        </p:nvSpPr>
+        <p:spPr>
+          <a:xfrm>
+            <a:off x="1280160" y="2679192"/>
+            <a:ext cx="2926080" cy="685800"/>
+          </a:xfrm>
+          <a:prstGeom prst="rect">
+            <a:avLst/>
+          </a:prstGeom>
+          <a:noFill/>
+          <a:ln/>
+        </p:spPr>
+        <p:txBody>
+          <a:bodyPr wrap="square" lIns="0" tIns="0" rIns="0" bIns="0" rtlCol="0" anchor="ctr"/>
+          <a:lstStyle/>
+          <a:p>
+            <a:pPr indent="0" marL="0">
+              <a:buNone/>
+            </a:pPr>
+            <a:r>
+              <a:rPr lang="en-US" sz="1200" dirty="0">
+                <a:solidFill>
+                  <a:srgbClr val="3D4560"/>
+                </a:solidFill>
+                <a:latin typeface="Calibri" pitchFamily="34" charset="0"/>
+                <a:ea typeface="Calibri" pitchFamily="34" charset="-122"/>
+                <a:cs typeface="Calibri" pitchFamily="34" charset="-120"/>
+              </a:rPr>
+              <a:t>Two audiences well in 4 weeks = double the UI, or one shallow build</a:t>
+            </a:r>
+            <a:endParaRPr lang="en-US" sz="1200" dirty="0"/>
+          </a:p>
+        </p:txBody>
+      </p:sp>
+      <p:pic>
+        <p:nvPicPr>
+          <p:cNvPr id="9" name="Image 2" descr="preencoded.png">    </p:cNvPr>
+          <p:cNvPicPr>
+            <a:picLocks noChangeAspect="1"/>
+          </p:cNvPicPr>
+          <p:nvPr/>
+        </p:nvPicPr>
+        <p:blipFill>
+          <a:blip r:embed="rId3"/>
+          <a:stretch>
+            <a:fillRect/>
+          </a:stretch>
+        </p:blipFill>
+        <p:spPr>
+          <a:xfrm>
+            <a:off x="868680" y="3520440"/>
+            <a:ext cx="292608" cy="292608"/>
+          </a:xfrm>
+          <a:prstGeom prst="rect">
+            <a:avLst/>
+          </a:prstGeom>
+        </p:spPr>
+      </p:pic>
+      <p:sp>
+        <p:nvSpPr>
+          <p:cNvPr id="10" name="Text 5"/>
+          <p:cNvSpPr/>
+          <p:nvPr/>
+        </p:nvSpPr>
+        <p:spPr>
+          <a:xfrm>
+            <a:off x="1280160" y="3456432"/>
+            <a:ext cx="2926080" cy="685800"/>
+          </a:xfrm>
+          <a:prstGeom prst="rect">
+            <a:avLst/>
+          </a:prstGeom>
+          <a:noFill/>
+          <a:ln/>
+        </p:spPr>
+        <p:txBody>
+          <a:bodyPr wrap="square" lIns="0" tIns="0" rIns="0" bIns="0" rtlCol="0" anchor="ctr"/>
+          <a:lstStyle/>
+          <a:p>
+            <a:pPr indent="0" marL="0">
+              <a:buNone/>
+            </a:pPr>
+            <a:r>
+              <a:rPr lang="en-US" sz="1200" dirty="0">
+                <a:solidFill>
+                  <a:srgbClr val="3D4560"/>
+                </a:solidFill>
+                <a:latin typeface="Calibri" pitchFamily="34" charset="0"/>
+                <a:ea typeface="Calibri" pitchFamily="34" charset="-122"/>
+                <a:cs typeface="Calibri" pitchFamily="34" charset="-120"/>
+              </a:rPr>
+              <a:t>Same agent output generalizes here later — an extension, not ruled out</a:t>
+            </a:r>
+            <a:endParaRPr lang="en-US" sz="1200" dirty="0"/>
+          </a:p>
+        </p:txBody>
+      </p:sp>
+      <p:sp>
+        <p:nvSpPr>
+          <p:cNvPr id="11" name="Shape 6"/>
+          <p:cNvSpPr/>
+          <p:nvPr/>
+        </p:nvSpPr>
+        <p:spPr>
+          <a:xfrm>
+            <a:off x="4754880" y="1234440"/>
+            <a:ext cx="3840480" cy="3246120"/>
           </a:xfrm>
           <a:prstGeom prst="roundRect">
             <a:avLst>
-              <a:gd name="adj" fmla="val 15385"/>
+              <a:gd name="adj" fmla="val 3380"/>
             </a:avLst>
           </a:prstGeom>
           <a:solidFill>
@@ -2806,113 +4107,61 @@
       </p:sp>
       <p:sp>
         <p:nvSpPr>
-          <p:cNvPr id="7" name="Text 5"/>
-          <p:cNvSpPr/>
-          <p:nvPr/>
-        </p:nvSpPr>
-        <p:spPr>
-          <a:xfrm>
-            <a:off x="2743200" y="1901952"/>
-            <a:ext cx="3657600" cy="594360"/>
-          </a:xfrm>
-          <a:prstGeom prst="rect">
-            <a:avLst/>
-          </a:prstGeom>
-          <a:noFill/>
-          <a:ln/>
-        </p:spPr>
-        <p:txBody>
-          <a:bodyPr wrap="square" lIns="50800" tIns="50800" rIns="50800" bIns="50800" rtlCol="0" anchor="ctr"/>
-          <a:lstStyle/>
-          <a:p>
-            <a:pPr algn="ctr" indent="0" marL="0">
-              <a:buNone/>
-            </a:pPr>
-            <a:r>
-              <a:rPr lang="en-US" sz="1400" b="1" dirty="0">
-                <a:solidFill>
-                  <a:srgbClr val="FFFFFF"/>
-                </a:solidFill>
-                <a:latin typeface="Calibri" pitchFamily="34" charset="0"/>
-                <a:ea typeface="Calibri" pitchFamily="34" charset="-122"/>
-                <a:cs typeface="Calibri" pitchFamily="34" charset="-120"/>
-              </a:rPr>
-              <a:t>Agent Orchestrator (LLM)</a:t>
-            </a:r>
-            <a:endParaRPr lang="en-US" sz="1400" dirty="0"/>
-          </a:p>
-        </p:txBody>
-      </p:sp>
-      <p:sp>
-        <p:nvSpPr>
-          <p:cNvPr id="8" name="Shape 6"/>
-          <p:cNvSpPr/>
-          <p:nvPr/>
-        </p:nvSpPr>
-        <p:spPr>
-          <a:xfrm>
-            <a:off x="4572000" y="2514600"/>
-            <a:ext cx="0" cy="256032"/>
-          </a:xfrm>
-          <a:prstGeom prst="line">
-            <a:avLst/>
-          </a:prstGeom>
-          <a:noFill/>
-          <a:ln w="19050">
-            <a:solidFill>
-              <a:srgbClr val="5B6478"/>
-            </a:solidFill>
-            <a:prstDash val="solid"/>
-          </a:ln>
-        </p:spPr>
-      </p:sp>
-      <p:sp>
-        <p:nvSpPr>
-          <p:cNvPr id="9" name="Shape 7"/>
-          <p:cNvSpPr/>
-          <p:nvPr/>
-        </p:nvSpPr>
-        <p:spPr>
-          <a:xfrm>
-            <a:off x="548640" y="2788920"/>
-            <a:ext cx="2514600" cy="1051560"/>
-          </a:xfrm>
-          <a:prstGeom prst="roundRect">
-            <a:avLst>
-              <a:gd name="adj" fmla="val 8696"/>
-            </a:avLst>
-          </a:prstGeom>
-          <a:solidFill>
-            <a:srgbClr val="FFFFFF"/>
-          </a:solidFill>
-          <a:ln/>
-          <a:effectLst>
-            <a:outerShdw sx="100000" sy="100000" kx="0" ky="0" algn="bl" rotWithShape="0" blurRad="127000" dist="38100" dir="2700000">
-              <a:srgbClr val="0B1030">
-                <a:alpha val="18000"/>
-              </a:srgbClr>
-            </a:outerShdw>
-          </a:effectLst>
-        </p:spPr>
+          <p:cNvPr id="12" name="Text 7"/>
+          <p:cNvSpPr/>
+          <p:nvPr/>
+        </p:nvSpPr>
+        <p:spPr>
+          <a:xfrm>
+            <a:off x="5029200" y="1417320"/>
+            <a:ext cx="3291840" cy="365760"/>
+          </a:xfrm>
+          <a:prstGeom prst="rect">
+            <a:avLst/>
+          </a:prstGeom>
+          <a:noFill/>
+          <a:ln/>
+        </p:spPr>
+        <p:txBody>
+          <a:bodyPr wrap="square" lIns="0" tIns="0" rIns="0" bIns="0" rtlCol="0" anchor="ctr"/>
+          <a:lstStyle/>
+          <a:p>
+            <a:pPr indent="0" marL="0">
+              <a:buNone/>
+            </a:pPr>
+            <a:r>
+              <a:rPr lang="en-US" sz="1600" b="1" dirty="0">
+                <a:solidFill>
+                  <a:srgbClr val="F2A93B"/>
+                </a:solidFill>
+                <a:latin typeface="Calibri" pitchFamily="34" charset="0"/>
+                <a:ea typeface="Calibri" pitchFamily="34" charset="-122"/>
+                <a:cs typeface="Calibri" pitchFamily="34" charset="-120"/>
+              </a:rPr>
+              <a:t>Who it's for, right now</a:t>
+            </a:r>
+            <a:endParaRPr lang="en-US" sz="1600" dirty="0"/>
+          </a:p>
+        </p:txBody>
       </p:sp>
       <p:pic>
         <p:nvPicPr>
-          <p:cNvPr id="10" name="Image 0" descr="preencoded.png">    </p:cNvPr>
+          <p:cNvPr id="13" name="Image 3" descr="preencoded.png">    </p:cNvPr>
           <p:cNvPicPr>
             <a:picLocks noChangeAspect="1"/>
           </p:cNvPicPr>
           <p:nvPr/>
         </p:nvPicPr>
         <p:blipFill>
-          <a:blip r:embed="rId1"/>
+          <a:blip r:embed="rId4"/>
           <a:stretch>
             <a:fillRect/>
           </a:stretch>
         </p:blipFill>
         <p:spPr>
           <a:xfrm>
-            <a:off x="685800" y="2926080"/>
-            <a:ext cx="457200" cy="457200"/>
+            <a:off x="5074920" y="1965960"/>
+            <a:ext cx="292608" cy="292608"/>
           </a:xfrm>
           <a:prstGeom prst="rect">
             <a:avLst/>
@@ -2921,14 +4170,14 @@
       </p:pic>
       <p:sp>
         <p:nvSpPr>
-          <p:cNvPr id="11" name="Text 8"/>
-          <p:cNvSpPr/>
-          <p:nvPr/>
-        </p:nvSpPr>
-        <p:spPr>
-          <a:xfrm>
-            <a:off x="1207008" y="2889504"/>
-            <a:ext cx="1783080" cy="320040"/>
+          <p:cNvPr id="14" name="Text 8"/>
+          <p:cNvSpPr/>
+          <p:nvPr/>
+        </p:nvSpPr>
+        <p:spPr>
+          <a:xfrm>
+            <a:off x="5486400" y="1901952"/>
+            <a:ext cx="3017520" cy="685800"/>
           </a:xfrm>
           <a:prstGeom prst="rect">
             <a:avLst/>
@@ -2944,106 +4193,38 @@
               <a:buNone/>
             </a:pPr>
             <a:r>
-              <a:rPr lang="en-US" sz="1200" b="1" dirty="0">
-                <a:solidFill>
-                  <a:srgbClr val="1E2761"/>
-                </a:solidFill>
-                <a:latin typeface="Calibri" pitchFamily="34" charset="0"/>
-                <a:ea typeface="Calibri" pitchFamily="34" charset="-122"/>
-                <a:cs typeface="Calibri" pitchFamily="34" charset="-120"/>
-              </a:rPr>
-              <a:t>Classify Fault</a:t>
+              <a:rPr lang="en-US" sz="1200" dirty="0">
+                <a:solidFill>
+                  <a:srgbClr val="FFFFFF"/>
+                </a:solidFill>
+                <a:latin typeface="Calibri" pitchFamily="34" charset="0"/>
+                <a:ea typeface="Calibri" pitchFamily="34" charset="-122"/>
+                <a:cs typeface="Calibri" pitchFamily="34" charset="-120"/>
+              </a:rPr>
+              <a:t>Fleet maintenance manager (primary) — "pull it in now, or keep driving?"</a:t>
             </a:r>
             <a:endParaRPr lang="en-US" sz="1200" dirty="0"/>
           </a:p>
         </p:txBody>
-      </p:sp>
-      <p:sp>
-        <p:nvSpPr>
-          <p:cNvPr id="12" name="Text 9"/>
-          <p:cNvSpPr/>
-          <p:nvPr/>
-        </p:nvSpPr>
-        <p:spPr>
-          <a:xfrm>
-            <a:off x="1207008" y="3200400"/>
-            <a:ext cx="1783080" cy="457200"/>
-          </a:xfrm>
-          <a:prstGeom prst="rect">
-            <a:avLst/>
-          </a:prstGeom>
-          <a:noFill/>
-          <a:ln/>
-        </p:spPr>
-        <p:txBody>
-          <a:bodyPr wrap="square" lIns="0" tIns="0" rIns="0" bIns="0" rtlCol="0" anchor="ctr"/>
-          <a:lstStyle/>
-          <a:p>
-            <a:pPr indent="0" marL="0">
-              <a:buNone/>
-            </a:pPr>
-            <a:r>
-              <a:rPr lang="en-US" sz="1000" dirty="0">
-                <a:solidFill>
-                  <a:srgbClr val="5B6478"/>
-                </a:solidFill>
-                <a:latin typeface="Calibri" pitchFamily="34" charset="0"/>
-                <a:ea typeface="Calibri" pitchFamily="34" charset="-122"/>
-                <a:cs typeface="Calibri" pitchFamily="34" charset="-120"/>
-              </a:rPr>
-              <a:t>fine-tuned classifier</a:t>
-            </a:r>
-            <a:endParaRPr lang="en-US" sz="1000" dirty="0"/>
-          </a:p>
-        </p:txBody>
-      </p:sp>
-      <p:sp>
-        <p:nvSpPr>
-          <p:cNvPr id="13" name="Shape 10"/>
-          <p:cNvSpPr/>
-          <p:nvPr/>
-        </p:nvSpPr>
-        <p:spPr>
-          <a:xfrm>
-            <a:off x="3319272" y="2788920"/>
-            <a:ext cx="2514600" cy="1051560"/>
-          </a:xfrm>
-          <a:prstGeom prst="roundRect">
-            <a:avLst>
-              <a:gd name="adj" fmla="val 8696"/>
-            </a:avLst>
-          </a:prstGeom>
-          <a:solidFill>
-            <a:srgbClr val="FFFFFF"/>
-          </a:solidFill>
-          <a:ln/>
-          <a:effectLst>
-            <a:outerShdw sx="100000" sy="100000" kx="0" ky="0" algn="bl" rotWithShape="0" blurRad="127000" dist="38100" dir="2700000">
-              <a:srgbClr val="0B1030">
-                <a:alpha val="18000"/>
-              </a:srgbClr>
-            </a:outerShdw>
-          </a:effectLst>
-        </p:spPr>
       </p:sp>
       <p:pic>
         <p:nvPicPr>
-          <p:cNvPr id="14" name="Image 1" descr="preencoded.png">    </p:cNvPr>
+          <p:cNvPr id="15" name="Image 4" descr="preencoded.png">    </p:cNvPr>
           <p:cNvPicPr>
             <a:picLocks noChangeAspect="1"/>
           </p:cNvPicPr>
           <p:nvPr/>
         </p:nvPicPr>
         <p:blipFill>
-          <a:blip r:embed="rId2"/>
+          <a:blip r:embed="rId5"/>
           <a:stretch>
             <a:fillRect/>
           </a:stretch>
         </p:blipFill>
         <p:spPr>
           <a:xfrm>
-            <a:off x="3456432" y="2926080"/>
-            <a:ext cx="457200" cy="457200"/>
+            <a:off x="5074920" y="2743200"/>
+            <a:ext cx="292608" cy="292608"/>
           </a:xfrm>
           <a:prstGeom prst="rect">
             <a:avLst/>
@@ -3052,14 +4233,14 @@
       </p:pic>
       <p:sp>
         <p:nvSpPr>
-          <p:cNvPr id="15" name="Text 11"/>
-          <p:cNvSpPr/>
-          <p:nvPr/>
-        </p:nvSpPr>
-        <p:spPr>
-          <a:xfrm>
-            <a:off x="3977640" y="2889504"/>
-            <a:ext cx="1783080" cy="320040"/>
+          <p:cNvPr id="16" name="Text 9"/>
+          <p:cNvSpPr/>
+          <p:nvPr/>
+        </p:nvSpPr>
+        <p:spPr>
+          <a:xfrm>
+            <a:off x="5486400" y="2679192"/>
+            <a:ext cx="3017520" cy="685800"/>
           </a:xfrm>
           <a:prstGeom prst="rect">
             <a:avLst/>
@@ -3075,106 +4256,38 @@
               <a:buNone/>
             </a:pPr>
             <a:r>
-              <a:rPr lang="en-US" sz="1200" b="1" dirty="0">
-                <a:solidFill>
-                  <a:srgbClr val="1E2761"/>
-                </a:solidFill>
-                <a:latin typeface="Calibri" pitchFamily="34" charset="0"/>
-                <a:ea typeface="Calibri" pitchFamily="34" charset="-122"/>
-                <a:cs typeface="Calibri" pitchFamily="34" charset="-120"/>
-              </a:rPr>
-              <a:t>Search Recalls &amp; TSBs</a:t>
+              <a:rPr lang="en-US" sz="1200" dirty="0">
+                <a:solidFill>
+                  <a:srgbClr val="FFFFFF"/>
+                </a:solidFill>
+                <a:latin typeface="Calibri" pitchFamily="34" charset="0"/>
+                <a:ea typeface="Calibri" pitchFamily="34" charset="-122"/>
+                <a:cs typeface="Calibri" pitchFamily="34" charset="-120"/>
+              </a:rPr>
+              <a:t>OEM/dealer diagnostic engineer (secondary) — same output, root cause + citations</a:t>
             </a:r>
             <a:endParaRPr lang="en-US" sz="1200" dirty="0"/>
           </a:p>
         </p:txBody>
-      </p:sp>
-      <p:sp>
-        <p:nvSpPr>
-          <p:cNvPr id="16" name="Text 12"/>
-          <p:cNvSpPr/>
-          <p:nvPr/>
-        </p:nvSpPr>
-        <p:spPr>
-          <a:xfrm>
-            <a:off x="3977640" y="3200400"/>
-            <a:ext cx="1783080" cy="457200"/>
-          </a:xfrm>
-          <a:prstGeom prst="rect">
-            <a:avLst/>
-          </a:prstGeom>
-          <a:noFill/>
-          <a:ln/>
-        </p:spPr>
-        <p:txBody>
-          <a:bodyPr wrap="square" lIns="0" tIns="0" rIns="0" bIns="0" rtlCol="0" anchor="ctr"/>
-          <a:lstStyle/>
-          <a:p>
-            <a:pPr indent="0" marL="0">
-              <a:buNone/>
-            </a:pPr>
-            <a:r>
-              <a:rPr lang="en-US" sz="1000" dirty="0">
-                <a:solidFill>
-                  <a:srgbClr val="5B6478"/>
-                </a:solidFill>
-                <a:latin typeface="Calibri" pitchFamily="34" charset="0"/>
-                <a:ea typeface="Calibri" pitchFamily="34" charset="-122"/>
-                <a:cs typeface="Calibri" pitchFamily="34" charset="-120"/>
-              </a:rPr>
-              <a:t>RAG · NHTSA corpus</a:t>
-            </a:r>
-            <a:endParaRPr lang="en-US" sz="1000" dirty="0"/>
-          </a:p>
-        </p:txBody>
-      </p:sp>
-      <p:sp>
-        <p:nvSpPr>
-          <p:cNvPr id="17" name="Shape 13"/>
-          <p:cNvSpPr/>
-          <p:nvPr/>
-        </p:nvSpPr>
-        <p:spPr>
-          <a:xfrm>
-            <a:off x="6089904" y="2788920"/>
-            <a:ext cx="2514600" cy="1051560"/>
-          </a:xfrm>
-          <a:prstGeom prst="roundRect">
-            <a:avLst>
-              <a:gd name="adj" fmla="val 8696"/>
-            </a:avLst>
-          </a:prstGeom>
-          <a:solidFill>
-            <a:srgbClr val="FFFFFF"/>
-          </a:solidFill>
-          <a:ln/>
-          <a:effectLst>
-            <a:outerShdw sx="100000" sy="100000" kx="0" ky="0" algn="bl" rotWithShape="0" blurRad="127000" dist="38100" dir="2700000">
-              <a:srgbClr val="0B1030">
-                <a:alpha val="18000"/>
-              </a:srgbClr>
-            </a:outerShdw>
-          </a:effectLst>
-        </p:spPr>
       </p:sp>
       <p:pic>
         <p:nvPicPr>
-          <p:cNvPr id="18" name="Image 2" descr="preencoded.png">    </p:cNvPr>
+          <p:cNvPr id="17" name="Image 5" descr="preencoded.png">    </p:cNvPr>
           <p:cNvPicPr>
             <a:picLocks noChangeAspect="1"/>
           </p:cNvPicPr>
           <p:nvPr/>
         </p:nvPicPr>
         <p:blipFill>
-          <a:blip r:embed="rId3"/>
+          <a:blip r:embed="rId6"/>
           <a:stretch>
             <a:fillRect/>
           </a:stretch>
         </p:blipFill>
         <p:spPr>
           <a:xfrm>
-            <a:off x="6227064" y="2926080"/>
-            <a:ext cx="457200" cy="457200"/>
+            <a:off x="5074920" y="3520440"/>
+            <a:ext cx="292608" cy="292608"/>
           </a:xfrm>
           <a:prstGeom prst="rect">
             <a:avLst/>
@@ -3183,14 +4296,14 @@
       </p:pic>
       <p:sp>
         <p:nvSpPr>
-          <p:cNvPr id="19" name="Text 14"/>
-          <p:cNvSpPr/>
-          <p:nvPr/>
-        </p:nvSpPr>
-        <p:spPr>
-          <a:xfrm>
-            <a:off x="6748272" y="2889504"/>
-            <a:ext cx="1783080" cy="320040"/>
+          <p:cNvPr id="18" name="Text 10"/>
+          <p:cNvSpPr/>
+          <p:nvPr/>
+        </p:nvSpPr>
+        <p:spPr>
+          <a:xfrm>
+            <a:off x="5486400" y="3456432"/>
+            <a:ext cx="3017520" cy="685800"/>
           </a:xfrm>
           <a:prstGeom prst="rect">
             <a:avLst/>
@@ -3206,15 +4319,15 @@
               <a:buNone/>
             </a:pPr>
             <a:r>
-              <a:rPr lang="en-US" sz="1200" b="1" dirty="0">
-                <a:solidFill>
-                  <a:srgbClr val="1E2761"/>
-                </a:solidFill>
-                <a:latin typeface="Calibri" pitchFamily="34" charset="0"/>
-                <a:ea typeface="Calibri" pitchFamily="34" charset="-122"/>
-                <a:cs typeface="Calibri" pitchFamily="34" charset="-120"/>
-              </a:rPr>
-              <a:t>Generate Ticket</a:t>
+              <a:rPr lang="en-US" sz="1200" dirty="0">
+                <a:solidFill>
+                  <a:srgbClr val="FFFFFF"/>
+                </a:solidFill>
+                <a:latin typeface="Calibri" pitchFamily="34" charset="0"/>
+                <a:ea typeface="Calibri" pitchFamily="34" charset="-122"/>
+                <a:cs typeface="Calibri" pitchFamily="34" charset="-120"/>
+              </a:rPr>
+              <a:t>Post-production, in-service vehicles — not a manufacturing-line QA tool</a:t>
             </a:r>
             <a:endParaRPr lang="en-US" sz="1200" dirty="0"/>
           </a:p>
@@ -3222,137 +4335,7 @@
       </p:sp>
       <p:sp>
         <p:nvSpPr>
-          <p:cNvPr id="20" name="Text 15"/>
-          <p:cNvSpPr/>
-          <p:nvPr/>
-        </p:nvSpPr>
-        <p:spPr>
-          <a:xfrm>
-            <a:off x="6748272" y="3200400"/>
-            <a:ext cx="1783080" cy="457200"/>
-          </a:xfrm>
-          <a:prstGeom prst="rect">
-            <a:avLst/>
-          </a:prstGeom>
-          <a:noFill/>
-          <a:ln/>
-        </p:spPr>
-        <p:txBody>
-          <a:bodyPr wrap="square" lIns="0" tIns="0" rIns="0" bIns="0" rtlCol="0" anchor="ctr"/>
-          <a:lstStyle/>
-          <a:p>
-            <a:pPr indent="0" marL="0">
-              <a:buNone/>
-            </a:pPr>
-            <a:r>
-              <a:rPr lang="en-US" sz="1000" dirty="0">
-                <a:solidFill>
-                  <a:srgbClr val="5B6478"/>
-                </a:solidFill>
-                <a:latin typeface="Calibri" pitchFamily="34" charset="0"/>
-                <a:ea typeface="Calibri" pitchFamily="34" charset="-122"/>
-                <a:cs typeface="Calibri" pitchFamily="34" charset="-120"/>
-              </a:rPr>
-              <a:t>cited repair writeup</a:t>
-            </a:r>
-            <a:endParaRPr lang="en-US" sz="1000" dirty="0"/>
-          </a:p>
-        </p:txBody>
-      </p:sp>
-      <p:sp>
-        <p:nvSpPr>
-          <p:cNvPr id="21" name="Shape 16"/>
-          <p:cNvSpPr/>
-          <p:nvPr/>
-        </p:nvSpPr>
-        <p:spPr>
-          <a:xfrm>
-            <a:off x="4572000" y="3840480"/>
-            <a:ext cx="0" cy="256032"/>
-          </a:xfrm>
-          <a:prstGeom prst="line">
-            <a:avLst/>
-          </a:prstGeom>
-          <a:noFill/>
-          <a:ln w="19050">
-            <a:solidFill>
-              <a:srgbClr val="5B6478"/>
-            </a:solidFill>
-            <a:prstDash val="solid"/>
-          </a:ln>
-        </p:spPr>
-      </p:sp>
-      <p:sp>
-        <p:nvSpPr>
-          <p:cNvPr id="22" name="Shape 17"/>
-          <p:cNvSpPr/>
-          <p:nvPr/>
-        </p:nvSpPr>
-        <p:spPr>
-          <a:xfrm>
-            <a:off x="2286000" y="4114800"/>
-            <a:ext cx="4572000" cy="548640"/>
-          </a:xfrm>
-          <a:prstGeom prst="roundRect">
-            <a:avLst>
-              <a:gd name="adj" fmla="val 16667"/>
-            </a:avLst>
-          </a:prstGeom>
-          <a:solidFill>
-            <a:srgbClr val="EEF3FD"/>
-          </a:solidFill>
-          <a:ln/>
-          <a:effectLst>
-            <a:outerShdw sx="100000" sy="100000" kx="0" ky="0" algn="bl" rotWithShape="0" blurRad="127000" dist="38100" dir="2700000">
-              <a:srgbClr val="0B1030">
-                <a:alpha val="18000"/>
-              </a:srgbClr>
-            </a:outerShdw>
-          </a:effectLst>
-        </p:spPr>
-      </p:sp>
-      <p:sp>
-        <p:nvSpPr>
-          <p:cNvPr id="23" name="Text 18"/>
-          <p:cNvSpPr/>
-          <p:nvPr/>
-        </p:nvSpPr>
-        <p:spPr>
-          <a:xfrm>
-            <a:off x="2286000" y="4114800"/>
-            <a:ext cx="4572000" cy="548640"/>
-          </a:xfrm>
-          <a:prstGeom prst="rect">
-            <a:avLst/>
-          </a:prstGeom>
-          <a:noFill/>
-          <a:ln/>
-        </p:spPr>
-        <p:txBody>
-          <a:bodyPr wrap="square" lIns="50800" tIns="50800" rIns="50800" bIns="50800" rtlCol="0" anchor="ctr"/>
-          <a:lstStyle/>
-          <a:p>
-            <a:pPr algn="ctr" indent="0" marL="0">
-              <a:buNone/>
-            </a:pPr>
-            <a:r>
-              <a:rPr lang="en-US" sz="1300" b="1" dirty="0">
-                <a:solidFill>
-                  <a:srgbClr val="1E2761"/>
-                </a:solidFill>
-                <a:latin typeface="Calibri" pitchFamily="34" charset="0"/>
-                <a:ea typeface="Calibri" pitchFamily="34" charset="-122"/>
-                <a:cs typeface="Calibri" pitchFamily="34" charset="-120"/>
-              </a:rPr>
-              <a:t>Dashboard — reasoning trace + final ticket</a:t>
-            </a:r>
-            <a:endParaRPr lang="en-US" sz="1300" dirty="0"/>
-          </a:p>
-        </p:txBody>
-      </p:sp>
-      <p:sp>
-        <p:nvSpPr>
-          <p:cNvPr id="24" name="Text 19"/>
+          <p:cNvPr id="19" name="Text 11"/>
           <p:cNvSpPr/>
           <p:nvPr/>
         </p:nvSpPr>
@@ -3451,7 +4434,7 @@
                 <a:ea typeface="Calibri" pitchFamily="34" charset="-122"/>
                 <a:cs typeface="Calibri" pitchFamily="34" charset="-120"/>
               </a:rPr>
-              <a:t>Why Agentic Matters</a:t>
+              <a:t>How It Works</a:t>
             </a:r>
             <a:endParaRPr lang="en-US" sz="3000" dirty="0"/>
           </a:p>
@@ -3465,16 +4448,16 @@
         </p:nvSpPr>
         <p:spPr>
           <a:xfrm>
-            <a:off x="548640" y="1234440"/>
-            <a:ext cx="3840480" cy="3246120"/>
+            <a:off x="3200400" y="1051560"/>
+            <a:ext cx="2743200" cy="502920"/>
           </a:xfrm>
           <a:prstGeom prst="roundRect">
             <a:avLst>
-              <a:gd name="adj" fmla="val 3380"/>
+              <a:gd name="adj" fmla="val 18182"/>
             </a:avLst>
           </a:prstGeom>
           <a:solidFill>
-            <a:srgbClr val="FFFFFF"/>
+            <a:srgbClr val="EEF3FD"/>
           </a:solidFill>
           <a:ln/>
           <a:effectLst>
@@ -3494,40 +4477,183 @@
         </p:nvSpPr>
         <p:spPr>
           <a:xfrm>
-            <a:off x="822960" y="1417320"/>
-            <a:ext cx="3291840" cy="365760"/>
-          </a:xfrm>
-          <a:prstGeom prst="rect">
-            <a:avLst/>
-          </a:prstGeom>
-          <a:noFill/>
-          <a:ln/>
-        </p:spPr>
-        <p:txBody>
-          <a:bodyPr wrap="square" lIns="0" tIns="0" rIns="0" bIns="0" rtlCol="0" anchor="ctr"/>
-          <a:lstStyle/>
-          <a:p>
-            <a:pPr indent="0" marL="0">
-              <a:buNone/>
-            </a:pPr>
-            <a:r>
-              <a:rPr lang="en-US" sz="1600" b="1" dirty="0">
-                <a:solidFill>
-                  <a:srgbClr val="5B6478"/>
-                </a:solidFill>
-                <a:latin typeface="Calibri" pitchFamily="34" charset="0"/>
-                <a:ea typeface="Calibri" pitchFamily="34" charset="-122"/>
-                <a:cs typeface="Calibri" pitchFamily="34" charset="-120"/>
-              </a:rPr>
-              <a:t>Typical Pipeline</a:t>
-            </a:r>
-            <a:endParaRPr lang="en-US" sz="1600" dirty="0"/>
-          </a:p>
-        </p:txBody>
+            <a:off x="3200400" y="1051560"/>
+            <a:ext cx="2743200" cy="502920"/>
+          </a:xfrm>
+          <a:prstGeom prst="rect">
+            <a:avLst/>
+          </a:prstGeom>
+          <a:noFill/>
+          <a:ln/>
+        </p:spPr>
+        <p:txBody>
+          <a:bodyPr wrap="square" lIns="50800" tIns="50800" rIns="50800" bIns="50800" rtlCol="0" anchor="ctr"/>
+          <a:lstStyle/>
+          <a:p>
+            <a:pPr algn="ctr" indent="0" marL="0">
+              <a:buNone/>
+            </a:pPr>
+            <a:r>
+              <a:rPr lang="en-US" sz="1300" b="1" dirty="0">
+                <a:solidFill>
+                  <a:srgbClr val="1E2761"/>
+                </a:solidFill>
+                <a:latin typeface="Calibri" pitchFamily="34" charset="0"/>
+                <a:ea typeface="Calibri" pitchFamily="34" charset="-122"/>
+                <a:cs typeface="Calibri" pitchFamily="34" charset="-120"/>
+              </a:rPr>
+              <a:t>Sensor / DTC Input</a:t>
+            </a:r>
+            <a:endParaRPr lang="en-US" sz="1300" dirty="0"/>
+          </a:p>
+        </p:txBody>
+      </p:sp>
+      <p:sp>
+        <p:nvSpPr>
+          <p:cNvPr id="5" name="Shape 3"/>
+          <p:cNvSpPr/>
+          <p:nvPr/>
+        </p:nvSpPr>
+        <p:spPr>
+          <a:xfrm>
+            <a:off x="4572000" y="1572768"/>
+            <a:ext cx="0" cy="292608"/>
+          </a:xfrm>
+          <a:prstGeom prst="line">
+            <a:avLst/>
+          </a:prstGeom>
+          <a:noFill/>
+          <a:ln w="19050">
+            <a:solidFill>
+              <a:srgbClr val="5B6478"/>
+            </a:solidFill>
+            <a:prstDash val="solid"/>
+          </a:ln>
+        </p:spPr>
+      </p:sp>
+      <p:sp>
+        <p:nvSpPr>
+          <p:cNvPr id="6" name="Shape 4"/>
+          <p:cNvSpPr/>
+          <p:nvPr/>
+        </p:nvSpPr>
+        <p:spPr>
+          <a:xfrm>
+            <a:off x="2743200" y="1901952"/>
+            <a:ext cx="3657600" cy="594360"/>
+          </a:xfrm>
+          <a:prstGeom prst="roundRect">
+            <a:avLst>
+              <a:gd name="adj" fmla="val 15385"/>
+            </a:avLst>
+          </a:prstGeom>
+          <a:solidFill>
+            <a:srgbClr val="1E2761"/>
+          </a:solidFill>
+          <a:ln/>
+          <a:effectLst>
+            <a:outerShdw sx="100000" sy="100000" kx="0" ky="0" algn="bl" rotWithShape="0" blurRad="127000" dist="38100" dir="2700000">
+              <a:srgbClr val="0B1030">
+                <a:alpha val="18000"/>
+              </a:srgbClr>
+            </a:outerShdw>
+          </a:effectLst>
+        </p:spPr>
+      </p:sp>
+      <p:sp>
+        <p:nvSpPr>
+          <p:cNvPr id="7" name="Text 5"/>
+          <p:cNvSpPr/>
+          <p:nvPr/>
+        </p:nvSpPr>
+        <p:spPr>
+          <a:xfrm>
+            <a:off x="2743200" y="1901952"/>
+            <a:ext cx="3657600" cy="594360"/>
+          </a:xfrm>
+          <a:prstGeom prst="rect">
+            <a:avLst/>
+          </a:prstGeom>
+          <a:noFill/>
+          <a:ln/>
+        </p:spPr>
+        <p:txBody>
+          <a:bodyPr wrap="square" lIns="50800" tIns="50800" rIns="50800" bIns="50800" rtlCol="0" anchor="ctr"/>
+          <a:lstStyle/>
+          <a:p>
+            <a:pPr algn="ctr" indent="0" marL="0">
+              <a:buNone/>
+            </a:pPr>
+            <a:r>
+              <a:rPr lang="en-US" sz="1400" b="1" dirty="0">
+                <a:solidFill>
+                  <a:srgbClr val="FFFFFF"/>
+                </a:solidFill>
+                <a:latin typeface="Calibri" pitchFamily="34" charset="0"/>
+                <a:ea typeface="Calibri" pitchFamily="34" charset="-122"/>
+                <a:cs typeface="Calibri" pitchFamily="34" charset="-120"/>
+              </a:rPr>
+              <a:t>Agent Orchestrator (LLM)</a:t>
+            </a:r>
+            <a:endParaRPr lang="en-US" sz="1400" dirty="0"/>
+          </a:p>
+        </p:txBody>
+      </p:sp>
+      <p:sp>
+        <p:nvSpPr>
+          <p:cNvPr id="8" name="Shape 6"/>
+          <p:cNvSpPr/>
+          <p:nvPr/>
+        </p:nvSpPr>
+        <p:spPr>
+          <a:xfrm>
+            <a:off x="4572000" y="2514600"/>
+            <a:ext cx="0" cy="256032"/>
+          </a:xfrm>
+          <a:prstGeom prst="line">
+            <a:avLst/>
+          </a:prstGeom>
+          <a:noFill/>
+          <a:ln w="19050">
+            <a:solidFill>
+              <a:srgbClr val="5B6478"/>
+            </a:solidFill>
+            <a:prstDash val="solid"/>
+          </a:ln>
+        </p:spPr>
+      </p:sp>
+      <p:sp>
+        <p:nvSpPr>
+          <p:cNvPr id="9" name="Shape 7"/>
+          <p:cNvSpPr/>
+          <p:nvPr/>
+        </p:nvSpPr>
+        <p:spPr>
+          <a:xfrm>
+            <a:off x="548640" y="2788920"/>
+            <a:ext cx="2514600" cy="1051560"/>
+          </a:xfrm>
+          <a:prstGeom prst="roundRect">
+            <a:avLst>
+              <a:gd name="adj" fmla="val 8696"/>
+            </a:avLst>
+          </a:prstGeom>
+          <a:solidFill>
+            <a:srgbClr val="FFFFFF"/>
+          </a:solidFill>
+          <a:ln/>
+          <a:effectLst>
+            <a:outerShdw sx="100000" sy="100000" kx="0" ky="0" algn="bl" rotWithShape="0" blurRad="127000" dist="38100" dir="2700000">
+              <a:srgbClr val="0B1030">
+                <a:alpha val="18000"/>
+              </a:srgbClr>
+            </a:outerShdw>
+          </a:effectLst>
+        </p:spPr>
       </p:sp>
       <p:pic>
         <p:nvPicPr>
-          <p:cNvPr id="5" name="Image 0" descr="preencoded.png">    </p:cNvPr>
+          <p:cNvPr id="10" name="Image 0" descr="preencoded.png">    </p:cNvPr>
           <p:cNvPicPr>
             <a:picLocks noChangeAspect="1"/>
           </p:cNvPicPr>
@@ -3541,8 +4667,8 @@
         </p:blipFill>
         <p:spPr>
           <a:xfrm>
-            <a:off x="868680" y="1965960"/>
-            <a:ext cx="292608" cy="292608"/>
+            <a:off x="685800" y="2926080"/>
+            <a:ext cx="457200" cy="457200"/>
           </a:xfrm>
           <a:prstGeom prst="rect">
             <a:avLst/>
@@ -3551,14 +4677,14 @@
       </p:pic>
       <p:sp>
         <p:nvSpPr>
-          <p:cNvPr id="6" name="Text 3"/>
-          <p:cNvSpPr/>
-          <p:nvPr/>
-        </p:nvSpPr>
-        <p:spPr>
-          <a:xfrm>
-            <a:off x="1280160" y="1920240"/>
-            <a:ext cx="2926080" cy="457200"/>
+          <p:cNvPr id="11" name="Text 8"/>
+          <p:cNvSpPr/>
+          <p:nvPr/>
+        </p:nvSpPr>
+        <p:spPr>
+          <a:xfrm>
+            <a:off x="1207008" y="2889504"/>
+            <a:ext cx="1783080" cy="320040"/>
           </a:xfrm>
           <a:prstGeom prst="rect">
             <a:avLst/>
@@ -3574,23 +4700,91 @@
               <a:buNone/>
             </a:pPr>
             <a:r>
-              <a:rPr lang="en-US" sz="1250" dirty="0">
-                <a:solidFill>
-                  <a:srgbClr val="3D4560"/>
-                </a:solidFill>
-                <a:latin typeface="Calibri" pitchFamily="34" charset="0"/>
-                <a:ea typeface="Calibri" pitchFamily="34" charset="-122"/>
-                <a:cs typeface="Calibri" pitchFamily="34" charset="-120"/>
-              </a:rPr>
-              <a:t>Fixed script, one pass through</a:t>
-            </a:r>
-            <a:endParaRPr lang="en-US" sz="1250" dirty="0"/>
-          </a:p>
-        </p:txBody>
+              <a:rPr lang="en-US" sz="1200" b="1" dirty="0">
+                <a:solidFill>
+                  <a:srgbClr val="1E2761"/>
+                </a:solidFill>
+                <a:latin typeface="Calibri" pitchFamily="34" charset="0"/>
+                <a:ea typeface="Calibri" pitchFamily="34" charset="-122"/>
+                <a:cs typeface="Calibri" pitchFamily="34" charset="-120"/>
+              </a:rPr>
+              <a:t>Classify Fault</a:t>
+            </a:r>
+            <a:endParaRPr lang="en-US" sz="1200" dirty="0"/>
+          </a:p>
+        </p:txBody>
+      </p:sp>
+      <p:sp>
+        <p:nvSpPr>
+          <p:cNvPr id="12" name="Text 9"/>
+          <p:cNvSpPr/>
+          <p:nvPr/>
+        </p:nvSpPr>
+        <p:spPr>
+          <a:xfrm>
+            <a:off x="1207008" y="3200400"/>
+            <a:ext cx="1783080" cy="457200"/>
+          </a:xfrm>
+          <a:prstGeom prst="rect">
+            <a:avLst/>
+          </a:prstGeom>
+          <a:noFill/>
+          <a:ln/>
+        </p:spPr>
+        <p:txBody>
+          <a:bodyPr wrap="square" lIns="0" tIns="0" rIns="0" bIns="0" rtlCol="0" anchor="ctr"/>
+          <a:lstStyle/>
+          <a:p>
+            <a:pPr indent="0" marL="0">
+              <a:buNone/>
+            </a:pPr>
+            <a:r>
+              <a:rPr lang="en-US" sz="1000" dirty="0">
+                <a:solidFill>
+                  <a:srgbClr val="5B6478"/>
+                </a:solidFill>
+                <a:latin typeface="Calibri" pitchFamily="34" charset="0"/>
+                <a:ea typeface="Calibri" pitchFamily="34" charset="-122"/>
+                <a:cs typeface="Calibri" pitchFamily="34" charset="-120"/>
+              </a:rPr>
+              <a:t>fine-tuned classifier</a:t>
+            </a:r>
+            <a:endParaRPr lang="en-US" sz="1000" dirty="0"/>
+          </a:p>
+        </p:txBody>
+      </p:sp>
+      <p:sp>
+        <p:nvSpPr>
+          <p:cNvPr id="13" name="Shape 10"/>
+          <p:cNvSpPr/>
+          <p:nvPr/>
+        </p:nvSpPr>
+        <p:spPr>
+          <a:xfrm>
+            <a:off x="3319272" y="2788920"/>
+            <a:ext cx="2514600" cy="1051560"/>
+          </a:xfrm>
+          <a:prstGeom prst="roundRect">
+            <a:avLst>
+              <a:gd name="adj" fmla="val 8696"/>
+            </a:avLst>
+          </a:prstGeom>
+          <a:solidFill>
+            <a:srgbClr val="FFFFFF"/>
+          </a:solidFill>
+          <a:ln/>
+          <a:effectLst>
+            <a:outerShdw sx="100000" sy="100000" kx="0" ky="0" algn="bl" rotWithShape="0" blurRad="127000" dist="38100" dir="2700000">
+              <a:srgbClr val="0B1030">
+                <a:alpha val="18000"/>
+              </a:srgbClr>
+            </a:outerShdw>
+          </a:effectLst>
+        </p:spPr>
       </p:sp>
       <p:pic>
         <p:nvPicPr>
-          <p:cNvPr id="7" name="Image 1" descr="preencoded.png">    </p:cNvPr>
+          <p:cNvPr id="14" name="Image 1" descr="preencoded.png">    </p:cNvPr>
           <p:cNvPicPr>
             <a:picLocks noChangeAspect="1"/>
           </p:cNvPicPr>
@@ -3604,8 +4798,8 @@
         </p:blipFill>
         <p:spPr>
           <a:xfrm>
-            <a:off x="868680" y="2532888"/>
-            <a:ext cx="292608" cy="292608"/>
+            <a:off x="3456432" y="2926080"/>
+            <a:ext cx="457200" cy="457200"/>
           </a:xfrm>
           <a:prstGeom prst="rect">
             <a:avLst/>
@@ -3614,14 +4808,14 @@
       </p:pic>
       <p:sp>
         <p:nvSpPr>
-          <p:cNvPr id="8" name="Text 4"/>
-          <p:cNvSpPr/>
-          <p:nvPr/>
-        </p:nvSpPr>
-        <p:spPr>
-          <a:xfrm>
-            <a:off x="1280160" y="2487168"/>
-            <a:ext cx="2926080" cy="457200"/>
+          <p:cNvPr id="15" name="Text 11"/>
+          <p:cNvSpPr/>
+          <p:nvPr/>
+        </p:nvSpPr>
+        <p:spPr>
+          <a:xfrm>
+            <a:off x="3977640" y="2889504"/>
+            <a:ext cx="1783080" cy="320040"/>
           </a:xfrm>
           <a:prstGeom prst="rect">
             <a:avLst/>
@@ -3637,23 +4831,91 @@
               <a:buNone/>
             </a:pPr>
             <a:r>
-              <a:rPr lang="en-US" sz="1250" dirty="0">
-                <a:solidFill>
-                  <a:srgbClr val="3D4560"/>
-                </a:solidFill>
-                <a:latin typeface="Calibri" pitchFamily="34" charset="0"/>
-                <a:ea typeface="Calibri" pitchFamily="34" charset="-122"/>
-                <a:cs typeface="Calibri" pitchFamily="34" charset="-120"/>
-              </a:rPr>
-              <a:t>Classify → template output</a:t>
-            </a:r>
-            <a:endParaRPr lang="en-US" sz="1250" dirty="0"/>
-          </a:p>
-        </p:txBody>
+              <a:rPr lang="en-US" sz="1200" b="1" dirty="0">
+                <a:solidFill>
+                  <a:srgbClr val="1E2761"/>
+                </a:solidFill>
+                <a:latin typeface="Calibri" pitchFamily="34" charset="0"/>
+                <a:ea typeface="Calibri" pitchFamily="34" charset="-122"/>
+                <a:cs typeface="Calibri" pitchFamily="34" charset="-120"/>
+              </a:rPr>
+              <a:t>Search Recalls &amp; TSBs</a:t>
+            </a:r>
+            <a:endParaRPr lang="en-US" sz="1200" dirty="0"/>
+          </a:p>
+        </p:txBody>
+      </p:sp>
+      <p:sp>
+        <p:nvSpPr>
+          <p:cNvPr id="16" name="Text 12"/>
+          <p:cNvSpPr/>
+          <p:nvPr/>
+        </p:nvSpPr>
+        <p:spPr>
+          <a:xfrm>
+            <a:off x="3977640" y="3200400"/>
+            <a:ext cx="1783080" cy="457200"/>
+          </a:xfrm>
+          <a:prstGeom prst="rect">
+            <a:avLst/>
+          </a:prstGeom>
+          <a:noFill/>
+          <a:ln/>
+        </p:spPr>
+        <p:txBody>
+          <a:bodyPr wrap="square" lIns="0" tIns="0" rIns="0" bIns="0" rtlCol="0" anchor="ctr"/>
+          <a:lstStyle/>
+          <a:p>
+            <a:pPr indent="0" marL="0">
+              <a:buNone/>
+            </a:pPr>
+            <a:r>
+              <a:rPr lang="en-US" sz="1000" dirty="0">
+                <a:solidFill>
+                  <a:srgbClr val="5B6478"/>
+                </a:solidFill>
+                <a:latin typeface="Calibri" pitchFamily="34" charset="0"/>
+                <a:ea typeface="Calibri" pitchFamily="34" charset="-122"/>
+                <a:cs typeface="Calibri" pitchFamily="34" charset="-120"/>
+              </a:rPr>
+              <a:t>RAG · NHTSA corpus</a:t>
+            </a:r>
+            <a:endParaRPr lang="en-US" sz="1000" dirty="0"/>
+          </a:p>
+        </p:txBody>
+      </p:sp>
+      <p:sp>
+        <p:nvSpPr>
+          <p:cNvPr id="17" name="Shape 13"/>
+          <p:cNvSpPr/>
+          <p:nvPr/>
+        </p:nvSpPr>
+        <p:spPr>
+          <a:xfrm>
+            <a:off x="6089904" y="2788920"/>
+            <a:ext cx="2514600" cy="1051560"/>
+          </a:xfrm>
+          <a:prstGeom prst="roundRect">
+            <a:avLst>
+              <a:gd name="adj" fmla="val 8696"/>
+            </a:avLst>
+          </a:prstGeom>
+          <a:solidFill>
+            <a:srgbClr val="FFFFFF"/>
+          </a:solidFill>
+          <a:ln/>
+          <a:effectLst>
+            <a:outerShdw sx="100000" sy="100000" kx="0" ky="0" algn="bl" rotWithShape="0" blurRad="127000" dist="38100" dir="2700000">
+              <a:srgbClr val="0B1030">
+                <a:alpha val="18000"/>
+              </a:srgbClr>
+            </a:outerShdw>
+          </a:effectLst>
+        </p:spPr>
       </p:sp>
       <p:pic>
         <p:nvPicPr>
-          <p:cNvPr id="9" name="Image 2" descr="preencoded.png">    </p:cNvPr>
+          <p:cNvPr id="18" name="Image 2" descr="preencoded.png">    </p:cNvPr>
           <p:cNvPicPr>
             <a:picLocks noChangeAspect="1"/>
           </p:cNvPicPr>
@@ -3667,8 +4929,8 @@
         </p:blipFill>
         <p:spPr>
           <a:xfrm>
-            <a:off x="868680" y="3099816"/>
-            <a:ext cx="292608" cy="292608"/>
+            <a:off x="6227064" y="2926080"/>
+            <a:ext cx="457200" cy="457200"/>
           </a:xfrm>
           <a:prstGeom prst="rect">
             <a:avLst/>
@@ -3677,14 +4939,14 @@
       </p:pic>
       <p:sp>
         <p:nvSpPr>
-          <p:cNvPr id="10" name="Text 5"/>
-          <p:cNvSpPr/>
-          <p:nvPr/>
-        </p:nvSpPr>
-        <p:spPr>
-          <a:xfrm>
-            <a:off x="1280160" y="3054096"/>
-            <a:ext cx="2926080" cy="457200"/>
+          <p:cNvPr id="19" name="Text 14"/>
+          <p:cNvSpPr/>
+          <p:nvPr/>
+        </p:nvSpPr>
+        <p:spPr>
+          <a:xfrm>
+            <a:off x="6748272" y="2889504"/>
+            <a:ext cx="1783080" cy="320040"/>
           </a:xfrm>
           <a:prstGeom prst="rect">
             <a:avLst/>
@@ -3700,54 +4962,30 @@
               <a:buNone/>
             </a:pPr>
             <a:r>
-              <a:rPr lang="en-US" sz="1250" dirty="0">
-                <a:solidFill>
-                  <a:srgbClr val="3D4560"/>
-                </a:solidFill>
-                <a:latin typeface="Calibri" pitchFamily="34" charset="0"/>
-                <a:ea typeface="Calibri" pitchFamily="34" charset="-122"/>
-                <a:cs typeface="Calibri" pitchFamily="34" charset="-120"/>
-              </a:rPr>
-              <a:t>No visible reasoning</a:t>
-            </a:r>
-            <a:endParaRPr lang="en-US" sz="1250" dirty="0"/>
-          </a:p>
-        </p:txBody>
-      </p:sp>
-      <p:pic>
-        <p:nvPicPr>
-          <p:cNvPr id="11" name="Image 3" descr="preencoded.png">    </p:cNvPr>
-          <p:cNvPicPr>
-            <a:picLocks noChangeAspect="1"/>
-          </p:cNvPicPr>
-          <p:nvPr/>
-        </p:nvPicPr>
-        <p:blipFill>
-          <a:blip r:embed="rId4"/>
-          <a:stretch>
-            <a:fillRect/>
-          </a:stretch>
-        </p:blipFill>
-        <p:spPr>
-          <a:xfrm>
-            <a:off x="868680" y="3666744"/>
-            <a:ext cx="292608" cy="292608"/>
-          </a:xfrm>
-          <a:prstGeom prst="rect">
-            <a:avLst/>
-          </a:prstGeom>
-        </p:spPr>
-      </p:pic>
-      <p:sp>
-        <p:nvSpPr>
-          <p:cNvPr id="12" name="Text 6"/>
-          <p:cNvSpPr/>
-          <p:nvPr/>
-        </p:nvSpPr>
-        <p:spPr>
-          <a:xfrm>
-            <a:off x="1280160" y="3621024"/>
-            <a:ext cx="2926080" cy="457200"/>
+              <a:rPr lang="en-US" sz="1200" b="1" dirty="0">
+                <a:solidFill>
+                  <a:srgbClr val="1E2761"/>
+                </a:solidFill>
+                <a:latin typeface="Calibri" pitchFamily="34" charset="0"/>
+                <a:ea typeface="Calibri" pitchFamily="34" charset="-122"/>
+                <a:cs typeface="Calibri" pitchFamily="34" charset="-120"/>
+              </a:rPr>
+              <a:t>Generate Ticket</a:t>
+            </a:r>
+            <a:endParaRPr lang="en-US" sz="1200" dirty="0"/>
+          </a:p>
+        </p:txBody>
+      </p:sp>
+      <p:sp>
+        <p:nvSpPr>
+          <p:cNvPr id="20" name="Text 15"/>
+          <p:cNvSpPr/>
+          <p:nvPr/>
+        </p:nvSpPr>
+        <p:spPr>
+          <a:xfrm>
+            <a:off x="6748272" y="3200400"/>
+            <a:ext cx="1783080" cy="457200"/>
           </a:xfrm>
           <a:prstGeom prst="rect">
             <a:avLst/>
@@ -3763,38 +5001,61 @@
               <a:buNone/>
             </a:pPr>
             <a:r>
-              <a:rPr lang="en-US" sz="1250" dirty="0">
-                <a:solidFill>
-                  <a:srgbClr val="3D4560"/>
-                </a:solidFill>
-                <a:latin typeface="Calibri" pitchFamily="34" charset="0"/>
-                <a:ea typeface="Calibri" pitchFamily="34" charset="-122"/>
-                <a:cs typeface="Calibri" pitchFamily="34" charset="-120"/>
-              </a:rPr>
-              <a:t>Reads as “just a chatbot”</a:t>
-            </a:r>
-            <a:endParaRPr lang="en-US" sz="1250" dirty="0"/>
-          </a:p>
-        </p:txBody>
-      </p:sp>
-      <p:sp>
-        <p:nvSpPr>
-          <p:cNvPr id="13" name="Shape 7"/>
-          <p:cNvSpPr/>
-          <p:nvPr/>
-        </p:nvSpPr>
-        <p:spPr>
-          <a:xfrm>
-            <a:off x="4754880" y="1234440"/>
-            <a:ext cx="3840480" cy="3246120"/>
+              <a:rPr lang="en-US" sz="1000" dirty="0">
+                <a:solidFill>
+                  <a:srgbClr val="5B6478"/>
+                </a:solidFill>
+                <a:latin typeface="Calibri" pitchFamily="34" charset="0"/>
+                <a:ea typeface="Calibri" pitchFamily="34" charset="-122"/>
+                <a:cs typeface="Calibri" pitchFamily="34" charset="-120"/>
+              </a:rPr>
+              <a:t>cited repair writeup</a:t>
+            </a:r>
+            <a:endParaRPr lang="en-US" sz="1000" dirty="0"/>
+          </a:p>
+        </p:txBody>
+      </p:sp>
+      <p:sp>
+        <p:nvSpPr>
+          <p:cNvPr id="21" name="Shape 16"/>
+          <p:cNvSpPr/>
+          <p:nvPr/>
+        </p:nvSpPr>
+        <p:spPr>
+          <a:xfrm>
+            <a:off x="4572000" y="3840480"/>
+            <a:ext cx="0" cy="256032"/>
+          </a:xfrm>
+          <a:prstGeom prst="line">
+            <a:avLst/>
+          </a:prstGeom>
+          <a:noFill/>
+          <a:ln w="19050">
+            <a:solidFill>
+              <a:srgbClr val="5B6478"/>
+            </a:solidFill>
+            <a:prstDash val="solid"/>
+          </a:ln>
+        </p:spPr>
+      </p:sp>
+      <p:sp>
+        <p:nvSpPr>
+          <p:cNvPr id="22" name="Shape 17"/>
+          <p:cNvSpPr/>
+          <p:nvPr/>
+        </p:nvSpPr>
+        <p:spPr>
+          <a:xfrm>
+            <a:off x="2286000" y="4114800"/>
+            <a:ext cx="4572000" cy="548640"/>
           </a:xfrm>
           <a:prstGeom prst="roundRect">
             <a:avLst>
-              <a:gd name="adj" fmla="val 3380"/>
+              <a:gd name="adj" fmla="val 16667"/>
             </a:avLst>
           </a:prstGeom>
           <a:solidFill>
-            <a:srgbClr val="1E2761"/>
+            <a:srgbClr val="EEF3FD"/>
           </a:solidFill>
           <a:ln/>
           <a:effectLst>
@@ -3808,298 +5069,46 @@
       </p:sp>
       <p:sp>
         <p:nvSpPr>
-          <p:cNvPr id="14" name="Text 8"/>
-          <p:cNvSpPr/>
-          <p:nvPr/>
-        </p:nvSpPr>
-        <p:spPr>
-          <a:xfrm>
-            <a:off x="5029200" y="1417320"/>
-            <a:ext cx="3291840" cy="365760"/>
-          </a:xfrm>
-          <a:prstGeom prst="rect">
-            <a:avLst/>
-          </a:prstGeom>
-          <a:noFill/>
-          <a:ln/>
-        </p:spPr>
-        <p:txBody>
-          <a:bodyPr wrap="square" lIns="0" tIns="0" rIns="0" bIns="0" rtlCol="0" anchor="ctr"/>
-          <a:lstStyle/>
-          <a:p>
-            <a:pPr indent="0" marL="0">
-              <a:buNone/>
-            </a:pPr>
-            <a:r>
-              <a:rPr lang="en-US" sz="1600" b="1" dirty="0">
-                <a:solidFill>
-                  <a:srgbClr val="F2A93B"/>
-                </a:solidFill>
-                <a:latin typeface="Calibri" pitchFamily="34" charset="0"/>
-                <a:ea typeface="Calibri" pitchFamily="34" charset="-122"/>
-                <a:cs typeface="Calibri" pitchFamily="34" charset="-120"/>
-              </a:rPr>
-              <a:t>Our Agentic Approach</a:t>
-            </a:r>
-            <a:endParaRPr lang="en-US" sz="1600" dirty="0"/>
-          </a:p>
-        </p:txBody>
-      </p:sp>
-      <p:pic>
-        <p:nvPicPr>
-          <p:cNvPr id="15" name="Image 4" descr="preencoded.png">    </p:cNvPr>
-          <p:cNvPicPr>
-            <a:picLocks noChangeAspect="1"/>
-          </p:cNvPicPr>
-          <p:nvPr/>
-        </p:nvPicPr>
-        <p:blipFill>
-          <a:blip r:embed="rId5"/>
-          <a:stretch>
-            <a:fillRect/>
-          </a:stretch>
-        </p:blipFill>
-        <p:spPr>
-          <a:xfrm>
-            <a:off x="5074920" y="1965960"/>
-            <a:ext cx="292608" cy="292608"/>
-          </a:xfrm>
-          <a:prstGeom prst="rect">
-            <a:avLst/>
-          </a:prstGeom>
-        </p:spPr>
-      </p:pic>
-      <p:sp>
-        <p:nvSpPr>
-          <p:cNvPr id="16" name="Text 9"/>
-          <p:cNvSpPr/>
-          <p:nvPr/>
-        </p:nvSpPr>
-        <p:spPr>
-          <a:xfrm>
-            <a:off x="5486400" y="1920240"/>
-            <a:ext cx="3017520" cy="457200"/>
-          </a:xfrm>
-          <a:prstGeom prst="rect">
-            <a:avLst/>
-          </a:prstGeom>
-          <a:noFill/>
-          <a:ln/>
-        </p:spPr>
-        <p:txBody>
-          <a:bodyPr wrap="square" lIns="0" tIns="0" rIns="0" bIns="0" rtlCol="0" anchor="ctr"/>
-          <a:lstStyle/>
-          <a:p>
-            <a:pPr indent="0" marL="0">
-              <a:buNone/>
-            </a:pPr>
-            <a:r>
-              <a:rPr lang="en-US" sz="1250" dirty="0">
-                <a:solidFill>
-                  <a:srgbClr val="FFFFFF"/>
-                </a:solidFill>
-                <a:latin typeface="Calibri" pitchFamily="34" charset="0"/>
-                <a:ea typeface="Calibri" pitchFamily="34" charset="-122"/>
-                <a:cs typeface="Calibri" pitchFamily="34" charset="-120"/>
-              </a:rPr>
-              <a:t>LLM decides which tool to call next</a:t>
-            </a:r>
-            <a:endParaRPr lang="en-US" sz="1250" dirty="0"/>
-          </a:p>
-        </p:txBody>
-      </p:sp>
-      <p:pic>
-        <p:nvPicPr>
-          <p:cNvPr id="17" name="Image 5" descr="preencoded.png">    </p:cNvPr>
-          <p:cNvPicPr>
-            <a:picLocks noChangeAspect="1"/>
-          </p:cNvPicPr>
-          <p:nvPr/>
-        </p:nvPicPr>
-        <p:blipFill>
-          <a:blip r:embed="rId6"/>
-          <a:stretch>
-            <a:fillRect/>
-          </a:stretch>
-        </p:blipFill>
-        <p:spPr>
-          <a:xfrm>
-            <a:off x="5074920" y="2532888"/>
-            <a:ext cx="292608" cy="292608"/>
-          </a:xfrm>
-          <a:prstGeom prst="rect">
-            <a:avLst/>
-          </a:prstGeom>
-        </p:spPr>
-      </p:pic>
-      <p:sp>
-        <p:nvSpPr>
-          <p:cNvPr id="18" name="Text 10"/>
-          <p:cNvSpPr/>
-          <p:nvPr/>
-        </p:nvSpPr>
-        <p:spPr>
-          <a:xfrm>
-            <a:off x="5486400" y="2487168"/>
-            <a:ext cx="3017520" cy="457200"/>
-          </a:xfrm>
-          <a:prstGeom prst="rect">
-            <a:avLst/>
-          </a:prstGeom>
-          <a:noFill/>
-          <a:ln/>
-        </p:spPr>
-        <p:txBody>
-          <a:bodyPr wrap="square" lIns="0" tIns="0" rIns="0" bIns="0" rtlCol="0" anchor="ctr"/>
-          <a:lstStyle/>
-          <a:p>
-            <a:pPr indent="0" marL="0">
-              <a:buNone/>
-            </a:pPr>
-            <a:r>
-              <a:rPr lang="en-US" sz="1250" dirty="0">
-                <a:solidFill>
-                  <a:srgbClr val="FFFFFF"/>
-                </a:solidFill>
-                <a:latin typeface="Calibri" pitchFamily="34" charset="0"/>
-                <a:ea typeface="Calibri" pitchFamily="34" charset="-122"/>
-                <a:cs typeface="Calibri" pitchFamily="34" charset="-120"/>
-              </a:rPr>
-              <a:t>Classify → retrieve → generate, adaptively</a:t>
-            </a:r>
-            <a:endParaRPr lang="en-US" sz="1250" dirty="0"/>
-          </a:p>
-        </p:txBody>
-      </p:sp>
-      <p:pic>
-        <p:nvPicPr>
-          <p:cNvPr id="19" name="Image 6" descr="preencoded.png">    </p:cNvPr>
-          <p:cNvPicPr>
-            <a:picLocks noChangeAspect="1"/>
-          </p:cNvPicPr>
-          <p:nvPr/>
-        </p:nvPicPr>
-        <p:blipFill>
-          <a:blip r:embed="rId7"/>
-          <a:stretch>
-            <a:fillRect/>
-          </a:stretch>
-        </p:blipFill>
-        <p:spPr>
-          <a:xfrm>
-            <a:off x="5074920" y="3099816"/>
-            <a:ext cx="292608" cy="292608"/>
-          </a:xfrm>
-          <a:prstGeom prst="rect">
-            <a:avLst/>
-          </a:prstGeom>
-        </p:spPr>
-      </p:pic>
-      <p:sp>
-        <p:nvSpPr>
-          <p:cNvPr id="20" name="Text 11"/>
-          <p:cNvSpPr/>
-          <p:nvPr/>
-        </p:nvSpPr>
-        <p:spPr>
-          <a:xfrm>
-            <a:off x="5486400" y="3054096"/>
-            <a:ext cx="3017520" cy="457200"/>
-          </a:xfrm>
-          <a:prstGeom prst="rect">
-            <a:avLst/>
-          </a:prstGeom>
-          <a:noFill/>
-          <a:ln/>
-        </p:spPr>
-        <p:txBody>
-          <a:bodyPr wrap="square" lIns="0" tIns="0" rIns="0" bIns="0" rtlCol="0" anchor="ctr"/>
-          <a:lstStyle/>
-          <a:p>
-            <a:pPr indent="0" marL="0">
-              <a:buNone/>
-            </a:pPr>
-            <a:r>
-              <a:rPr lang="en-US" sz="1250" dirty="0">
-                <a:solidFill>
-                  <a:srgbClr val="FFFFFF"/>
-                </a:solidFill>
-                <a:latin typeface="Calibri" pitchFamily="34" charset="0"/>
-                <a:ea typeface="Calibri" pitchFamily="34" charset="-122"/>
-                <a:cs typeface="Calibri" pitchFamily="34" charset="-120"/>
-              </a:rPr>
-              <a:t>Reasoning trace shown in the UI</a:t>
-            </a:r>
-            <a:endParaRPr lang="en-US" sz="1250" dirty="0"/>
-          </a:p>
-        </p:txBody>
-      </p:sp>
-      <p:pic>
-        <p:nvPicPr>
-          <p:cNvPr id="21" name="Image 7" descr="preencoded.png">    </p:cNvPr>
-          <p:cNvPicPr>
-            <a:picLocks noChangeAspect="1"/>
-          </p:cNvPicPr>
-          <p:nvPr/>
-        </p:nvPicPr>
-        <p:blipFill>
-          <a:blip r:embed="rId8"/>
-          <a:stretch>
-            <a:fillRect/>
-          </a:stretch>
-        </p:blipFill>
-        <p:spPr>
-          <a:xfrm>
-            <a:off x="5074920" y="3666744"/>
-            <a:ext cx="292608" cy="292608"/>
-          </a:xfrm>
-          <a:prstGeom prst="rect">
-            <a:avLst/>
-          </a:prstGeom>
-        </p:spPr>
-      </p:pic>
-      <p:sp>
-        <p:nvSpPr>
-          <p:cNvPr id="22" name="Text 12"/>
-          <p:cNvSpPr/>
-          <p:nvPr/>
-        </p:nvSpPr>
-        <p:spPr>
-          <a:xfrm>
-            <a:off x="5486400" y="3621024"/>
-            <a:ext cx="3017520" cy="457200"/>
-          </a:xfrm>
-          <a:prstGeom prst="rect">
-            <a:avLst/>
-          </a:prstGeom>
-          <a:noFill/>
-          <a:ln/>
-        </p:spPr>
-        <p:txBody>
-          <a:bodyPr wrap="square" lIns="0" tIns="0" rIns="0" bIns="0" rtlCol="0" anchor="ctr"/>
-          <a:lstStyle/>
-          <a:p>
-            <a:pPr indent="0" marL="0">
-              <a:buNone/>
-            </a:pPr>
-            <a:r>
-              <a:rPr lang="en-US" sz="1250" dirty="0">
-                <a:solidFill>
-                  <a:srgbClr val="FFFFFF"/>
-                </a:solidFill>
-                <a:latin typeface="Calibri" pitchFamily="34" charset="0"/>
-                <a:ea typeface="Calibri" pitchFamily="34" charset="-122"/>
-                <a:cs typeface="Calibri" pitchFamily="34" charset="-120"/>
-              </a:rPr>
-              <a:t>Grounded, cited, escalates when unsure</a:t>
-            </a:r>
-            <a:endParaRPr lang="en-US" sz="1250" dirty="0"/>
-          </a:p>
-        </p:txBody>
-      </p:sp>
-      <p:sp>
-        <p:nvSpPr>
-          <p:cNvPr id="23" name="Text 13"/>
+          <p:cNvPr id="23" name="Text 18"/>
+          <p:cNvSpPr/>
+          <p:nvPr/>
+        </p:nvSpPr>
+        <p:spPr>
+          <a:xfrm>
+            <a:off x="2286000" y="4114800"/>
+            <a:ext cx="4572000" cy="548640"/>
+          </a:xfrm>
+          <a:prstGeom prst="rect">
+            <a:avLst/>
+          </a:prstGeom>
+          <a:noFill/>
+          <a:ln/>
+        </p:spPr>
+        <p:txBody>
+          <a:bodyPr wrap="square" lIns="50800" tIns="50800" rIns="50800" bIns="50800" rtlCol="0" anchor="ctr"/>
+          <a:lstStyle/>
+          <a:p>
+            <a:pPr algn="ctr" indent="0" marL="0">
+              <a:buNone/>
+            </a:pPr>
+            <a:r>
+              <a:rPr lang="en-US" sz="1300" b="1" dirty="0">
+                <a:solidFill>
+                  <a:srgbClr val="1E2761"/>
+                </a:solidFill>
+                <a:latin typeface="Calibri" pitchFamily="34" charset="0"/>
+                <a:ea typeface="Calibri" pitchFamily="34" charset="-122"/>
+                <a:cs typeface="Calibri" pitchFamily="34" charset="-120"/>
+              </a:rPr>
+              <a:t>Dashboard — reasoning trace + final ticket</a:t>
+            </a:r>
+            <a:endParaRPr lang="en-US" sz="1300" dirty="0"/>
+          </a:p>
+        </p:txBody>
+      </p:sp>
+      <p:sp>
+        <p:nvSpPr>
+          <p:cNvPr id="24" name="Text 19"/>
           <p:cNvSpPr/>
           <p:nvPr/>
         </p:nvSpPr>
@@ -4198,7 +5207,7 @@
                 <a:ea typeface="Calibri" pitchFamily="34" charset="-122"/>
                 <a:cs typeface="Calibri" pitchFamily="34" charset="-120"/>
               </a:rPr>
-              <a:t>This Space Is Real — Good News</a:t>
+              <a:t>Data Rigor: Every Dataset Earns Its Spot</a:t>
             </a:r>
             <a:endParaRPr lang="en-US" sz="3000" dirty="0"/>
           </a:p>
@@ -4206,18 +5215,124 @@
       </p:sp>
       <p:sp>
         <p:nvSpPr>
-          <p:cNvPr id="3" name="Shape 1"/>
-          <p:cNvSpPr/>
-          <p:nvPr/>
-        </p:nvSpPr>
-        <p:spPr>
-          <a:xfrm>
-            <a:off x="548640" y="1188720"/>
-            <a:ext cx="2624328" cy="2148840"/>
+          <p:cNvPr id="3" name="Text 1"/>
+          <p:cNvSpPr/>
+          <p:nvPr/>
+        </p:nvSpPr>
+        <p:spPr>
+          <a:xfrm>
+            <a:off x="548640" y="1097280"/>
+            <a:ext cx="8046720" cy="365760"/>
+          </a:xfrm>
+          <a:prstGeom prst="rect">
+            <a:avLst/>
+          </a:prstGeom>
+          <a:noFill/>
+          <a:ln/>
+        </p:spPr>
+        <p:txBody>
+          <a:bodyPr wrap="square" lIns="0" tIns="0" rIns="0" bIns="0" rtlCol="0" anchor="ctr"/>
+          <a:lstStyle/>
+          <a:p>
+            <a:pPr indent="0" marL="0">
+              <a:buNone/>
+            </a:pPr>
+            <a:r>
+              <a:rPr lang="en-US" sz="1300" b="1" dirty="0">
+                <a:solidFill>
+                  <a:srgbClr val="1E2761"/>
+                </a:solidFill>
+                <a:latin typeface="Calibri" pitchFamily="34" charset="0"/>
+                <a:ea typeface="Calibri" pitchFamily="34" charset="-122"/>
+                <a:cs typeface="Calibri" pitchFamily="34" charset="-120"/>
+              </a:rPr>
+              <a:t>The setback: </a:t>
+            </a:r>
+            <a:pPr indent="0" marL="0">
+              <a:buNone/>
+            </a:pPr>
+            <a:r>
+              <a:rPr lang="en-US" sz="1300" dirty="0">
+                <a:solidFill>
+                  <a:srgbClr val="2B3350"/>
+                </a:solidFill>
+                <a:latin typeface="Calibri" pitchFamily="34" charset="0"/>
+                <a:ea typeface="Calibri" pitchFamily="34" charset="-122"/>
+                <a:cs typeface="Calibri" pitchFamily="34" charset="-120"/>
+              </a:rPr>
+              <a:t>our first-choice Kaggle dataset was removed from the platform during our prep, ahead of kickoff — page gone, not in search.</a:t>
+            </a:r>
+            <a:endParaRPr lang="en-US" sz="1300" dirty="0"/>
+          </a:p>
+        </p:txBody>
+      </p:sp>
+      <p:sp>
+        <p:nvSpPr>
+          <p:cNvPr id="4" name="Text 2"/>
+          <p:cNvSpPr/>
+          <p:nvPr/>
+        </p:nvSpPr>
+        <p:spPr>
+          <a:xfrm>
+            <a:off x="548640" y="1508760"/>
+            <a:ext cx="8046720" cy="457200"/>
+          </a:xfrm>
+          <a:prstGeom prst="rect">
+            <a:avLst/>
+          </a:prstGeom>
+          <a:noFill/>
+          <a:ln/>
+        </p:spPr>
+        <p:txBody>
+          <a:bodyPr wrap="square" lIns="0" tIns="0" rIns="0" bIns="0" rtlCol="0" anchor="ctr"/>
+          <a:lstStyle/>
+          <a:p>
+            <a:pPr indent="0" marL="0">
+              <a:buNone/>
+            </a:pPr>
+            <a:r>
+              <a:rPr lang="en-US" sz="1300" b="1" dirty="0">
+                <a:solidFill>
+                  <a:srgbClr val="1E2761"/>
+                </a:solidFill>
+                <a:latin typeface="Calibri" pitchFamily="34" charset="0"/>
+                <a:ea typeface="Calibri" pitchFamily="34" charset="-122"/>
+                <a:cs typeface="Calibri" pitchFamily="34" charset="-120"/>
+              </a:rPr>
+              <a:t>The method: </a:t>
+            </a:r>
+            <a:pPr indent="0" marL="0">
+              <a:buNone/>
+            </a:pPr>
+            <a:r>
+              <a:rPr lang="en-US" sz="1300" dirty="0">
+                <a:solidFill>
+                  <a:srgbClr val="2B3350"/>
+                </a:solidFill>
+                <a:latin typeface="Calibri" pitchFamily="34" charset="0"/>
+                <a:ea typeface="Calibri" pitchFamily="34" charset="-122"/>
+                <a:cs typeface="Calibri" pitchFamily="34" charset="-120"/>
+              </a:rPr>
+              <a:t>fit a quick model on each candidate's own features against its own labels, and check AUC against a coin-flip baseline. Only qualifies if it clears that bar by a wide margin.</a:t>
+            </a:r>
+            <a:endParaRPr lang="en-US" sz="1300" dirty="0"/>
+          </a:p>
+        </p:txBody>
+      </p:sp>
+      <p:sp>
+        <p:nvSpPr>
+          <p:cNvPr id="5" name="Shape 3"/>
+          <p:cNvSpPr/>
+          <p:nvPr/>
+        </p:nvSpPr>
+        <p:spPr>
+          <a:xfrm>
+            <a:off x="548640" y="2103120"/>
+            <a:ext cx="3840480" cy="1783080"/>
           </a:xfrm>
           <a:prstGeom prst="roundRect">
             <a:avLst>
-              <a:gd name="adj" fmla="val 5106"/>
+              <a:gd name="adj" fmla="val 6154"/>
             </a:avLst>
           </a:prstGeom>
           <a:solidFill>
@@ -4233,29 +5348,9 @@
           </a:effectLst>
         </p:spPr>
       </p:sp>
-      <p:sp>
-        <p:nvSpPr>
-          <p:cNvPr id="4" name="Shape 2"/>
-          <p:cNvSpPr/>
-          <p:nvPr/>
-        </p:nvSpPr>
-        <p:spPr>
-          <a:xfrm>
-            <a:off x="1586484" y="1371600"/>
-            <a:ext cx="548640" cy="548640"/>
-          </a:xfrm>
-          <a:prstGeom prst="ellipse">
-            <a:avLst/>
-          </a:prstGeom>
-          <a:solidFill>
-            <a:srgbClr val="EEF3FD"/>
-          </a:solidFill>
-          <a:ln/>
-        </p:spPr>
-      </p:sp>
       <p:pic>
         <p:nvPicPr>
-          <p:cNvPr id="5" name="Image 0" descr="preencoded.png">    </p:cNvPr>
+          <p:cNvPr id="6" name="Image 0" descr="preencoded.png">    </p:cNvPr>
           <p:cNvPicPr>
             <a:picLocks noChangeAspect="1"/>
           </p:cNvPicPr>
@@ -4269,8 +5364,8 @@
         </p:blipFill>
         <p:spPr>
           <a:xfrm>
-            <a:off x="1729130" y="1514246"/>
-            <a:ext cx="263347" cy="263347"/>
+            <a:off x="777240" y="2286000"/>
+            <a:ext cx="347472" cy="347472"/>
           </a:xfrm>
           <a:prstGeom prst="rect">
             <a:avLst/>
@@ -4279,38 +5374,38 @@
       </p:pic>
       <p:sp>
         <p:nvSpPr>
-          <p:cNvPr id="6" name="Text 3"/>
-          <p:cNvSpPr/>
-          <p:nvPr/>
-        </p:nvSpPr>
-        <p:spPr>
-          <a:xfrm>
-            <a:off x="685800" y="2029968"/>
-            <a:ext cx="2350008" cy="365760"/>
-          </a:xfrm>
-          <a:prstGeom prst="rect">
-            <a:avLst/>
-          </a:prstGeom>
-          <a:noFill/>
-          <a:ln/>
-        </p:spPr>
-        <p:txBody>
-          <a:bodyPr wrap="square" lIns="0" tIns="0" rIns="0" bIns="0" rtlCol="0" anchor="ctr"/>
-          <a:lstStyle/>
-          <a:p>
-            <a:pPr algn="ctr" indent="0" marL="0">
+          <p:cNvPr id="7" name="Text 4"/>
+          <p:cNvSpPr/>
+          <p:nvPr/>
+        </p:nvSpPr>
+        <p:spPr>
+          <a:xfrm>
+            <a:off x="1234440" y="2304288"/>
+            <a:ext cx="3017520" cy="310896"/>
+          </a:xfrm>
+          <a:prstGeom prst="rect">
+            <a:avLst/>
+          </a:prstGeom>
+          <a:noFill/>
+          <a:ln/>
+        </p:spPr>
+        <p:txBody>
+          <a:bodyPr wrap="square" lIns="0" tIns="0" rIns="0" bIns="0" rtlCol="0" anchor="ctr"/>
+          <a:lstStyle/>
+          <a:p>
+            <a:pPr indent="0" marL="0">
               <a:buNone/>
             </a:pPr>
             <a:r>
               <a:rPr lang="en-US" sz="1300" b="1" dirty="0">
                 <a:solidFill>
-                  <a:srgbClr val="1E2761"/>
-                </a:solidFill>
-                <a:latin typeface="Calibri" pitchFamily="34" charset="0"/>
-                <a:ea typeface="Calibri" pitchFamily="34" charset="-122"/>
-                <a:cs typeface="Calibri" pitchFamily="34" charset="-120"/>
-              </a:rPr>
-              <a:t>MECH AI</a:t>
+                  <a:srgbClr val="5B6478"/>
+                </a:solidFill>
+                <a:latin typeface="Calibri" pitchFamily="34" charset="0"/>
+                <a:ea typeface="Calibri" pitchFamily="34" charset="-122"/>
+                <a:cs typeface="Calibri" pitchFamily="34" charset="-120"/>
+              </a:rPr>
+              <a:t>Rejected — looked perfect on paper</a:t>
             </a:r>
             <a:endParaRPr lang="en-US" sz="1300" dirty="0"/>
           </a:p>
@@ -4318,30 +5413,69 @@
       </p:sp>
       <p:sp>
         <p:nvSpPr>
-          <p:cNvPr id="7" name="Text 4"/>
-          <p:cNvSpPr/>
-          <p:nvPr/>
-        </p:nvSpPr>
-        <p:spPr>
-          <a:xfrm>
-            <a:off x="713232" y="2423160"/>
-            <a:ext cx="2295144" cy="822960"/>
-          </a:xfrm>
-          <a:prstGeom prst="rect">
-            <a:avLst/>
-          </a:prstGeom>
-          <a:noFill/>
-          <a:ln/>
-        </p:spPr>
-        <p:txBody>
-          <a:bodyPr wrap="square" lIns="0" tIns="0" rIns="0" bIns="0" rtlCol="0" anchor="t"/>
-          <a:lstStyle/>
-          <a:p>
-            <a:pPr algn="ctr" indent="0" marL="0">
-              <a:buNone/>
-            </a:pPr>
-            <a:r>
-              <a:rPr lang="en-US" sz="1000" dirty="0">
+          <p:cNvPr id="8" name="Text 5"/>
+          <p:cNvSpPr/>
+          <p:nvPr/>
+        </p:nvSpPr>
+        <p:spPr>
+          <a:xfrm>
+            <a:off x="822960" y="2679192"/>
+            <a:ext cx="3383280" cy="457200"/>
+          </a:xfrm>
+          <a:prstGeom prst="rect">
+            <a:avLst/>
+          </a:prstGeom>
+          <a:noFill/>
+          <a:ln/>
+        </p:spPr>
+        <p:txBody>
+          <a:bodyPr wrap="square" lIns="0" tIns="0" rIns="0" bIns="0" rtlCol="0" anchor="ctr"/>
+          <a:lstStyle/>
+          <a:p>
+            <a:pPr indent="0" marL="0">
+              <a:buNone/>
+            </a:pPr>
+            <a:r>
+              <a:rPr lang="en-US" sz="1050" dirty="0">
+                <a:solidFill>
+                  <a:srgbClr val="3D4560"/>
+                </a:solidFill>
+                <a:latin typeface="Calibri" pitchFamily="34" charset="0"/>
+                <a:ea typeface="Calibri" pitchFamily="34" charset="-122"/>
+                <a:cs typeface="Calibri" pitchFamily="34" charset="-120"/>
+              </a:rPr>
+              <a:t>Right scale, plausible sensor columns, realistic-looking imbalance. Signal-tested anyway:</a:t>
+            </a:r>
+            <a:endParaRPr lang="en-US" sz="1050" dirty="0"/>
+          </a:p>
+        </p:txBody>
+      </p:sp>
+      <p:sp>
+        <p:nvSpPr>
+          <p:cNvPr id="9" name="Text 6"/>
+          <p:cNvSpPr/>
+          <p:nvPr/>
+        </p:nvSpPr>
+        <p:spPr>
+          <a:xfrm>
+            <a:off x="822960" y="3136392"/>
+            <a:ext cx="3383280" cy="365760"/>
+          </a:xfrm>
+          <a:prstGeom prst="rect">
+            <a:avLst/>
+          </a:prstGeom>
+          <a:noFill/>
+          <a:ln/>
+        </p:spPr>
+        <p:txBody>
+          <a:bodyPr wrap="square" lIns="0" tIns="0" rIns="0" bIns="0" rtlCol="0" anchor="ctr"/>
+          <a:lstStyle/>
+          <a:p>
+            <a:pPr indent="0" marL="0">
+              <a:buNone/>
+            </a:pPr>
+            <a:r>
+              <a:rPr lang="en-US" sz="1500" b="1" dirty="0">
                 <a:solidFill>
                   <a:srgbClr val="5B6478"/>
                 </a:solidFill>
@@ -4349,30 +5483,69 @@
                 <a:ea typeface="Calibri" pitchFamily="34" charset="-122"/>
                 <a:cs typeface="Calibri" pitchFamily="34" charset="-120"/>
               </a:rPr>
-              <a:t>Consumer app cross-referencing OBD-II codes against NHTSA recall data.</a:t>
-            </a:r>
-            <a:endParaRPr lang="en-US" sz="1000" dirty="0"/>
-          </a:p>
-        </p:txBody>
-      </p:sp>
-      <p:sp>
-        <p:nvSpPr>
-          <p:cNvPr id="8" name="Shape 5"/>
-          <p:cNvSpPr/>
-          <p:nvPr/>
-        </p:nvSpPr>
-        <p:spPr>
-          <a:xfrm>
-            <a:off x="3355848" y="1188720"/>
-            <a:ext cx="2624328" cy="2148840"/>
+              <a:t>No real signal — same as guessing</a:t>
+            </a:r>
+            <a:endParaRPr lang="en-US" sz="1500" dirty="0"/>
+          </a:p>
+        </p:txBody>
+      </p:sp>
+      <p:sp>
+        <p:nvSpPr>
+          <p:cNvPr id="10" name="Text 7"/>
+          <p:cNvSpPr/>
+          <p:nvPr/>
+        </p:nvSpPr>
+        <p:spPr>
+          <a:xfrm>
+            <a:off x="822960" y="3493008"/>
+            <a:ext cx="3383280" cy="320040"/>
+          </a:xfrm>
+          <a:prstGeom prst="rect">
+            <a:avLst/>
+          </a:prstGeom>
+          <a:noFill/>
+          <a:ln/>
+        </p:spPr>
+        <p:txBody>
+          <a:bodyPr wrap="square" lIns="0" tIns="0" rIns="0" bIns="0" rtlCol="0" anchor="ctr"/>
+          <a:lstStyle/>
+          <a:p>
+            <a:pPr indent="0" marL="0">
+              <a:buNone/>
+            </a:pPr>
+            <a:r>
+              <a:rPr lang="en-US" sz="900" i="1" dirty="0">
+                <a:solidFill>
+                  <a:srgbClr val="5B6478"/>
+                </a:solidFill>
+                <a:latin typeface="Calibri" pitchFamily="34" charset="0"/>
+                <a:ea typeface="Calibri" pitchFamily="34" charset="-122"/>
+                <a:cs typeface="Calibri" pitchFamily="34" charset="-120"/>
+              </a:rPr>
+              <a:t>(AUC 0.4975 against its own labels) — sensor means differed &lt;2% between classes</a:t>
+            </a:r>
+            <a:endParaRPr lang="en-US" sz="900" dirty="0"/>
+          </a:p>
+        </p:txBody>
+      </p:sp>
+      <p:sp>
+        <p:nvSpPr>
+          <p:cNvPr id="11" name="Shape 8"/>
+          <p:cNvSpPr/>
+          <p:nvPr/>
+        </p:nvSpPr>
+        <p:spPr>
+          <a:xfrm>
+            <a:off x="4754880" y="2103120"/>
+            <a:ext cx="3840480" cy="1783080"/>
           </a:xfrm>
           <a:prstGeom prst="roundRect">
             <a:avLst>
-              <a:gd name="adj" fmla="val 5106"/>
+              <a:gd name="adj" fmla="val 6154"/>
             </a:avLst>
           </a:prstGeom>
           <a:solidFill>
-            <a:srgbClr val="FFFFFF"/>
+            <a:srgbClr val="1E2761"/>
           </a:solidFill>
           <a:ln/>
           <a:effectLst>
@@ -4384,29 +5557,9 @@
           </a:effectLst>
         </p:spPr>
       </p:sp>
-      <p:sp>
-        <p:nvSpPr>
-          <p:cNvPr id="9" name="Shape 6"/>
-          <p:cNvSpPr/>
-          <p:nvPr/>
-        </p:nvSpPr>
-        <p:spPr>
-          <a:xfrm>
-            <a:off x="4393692" y="1371600"/>
-            <a:ext cx="548640" cy="548640"/>
-          </a:xfrm>
-          <a:prstGeom prst="ellipse">
-            <a:avLst/>
-          </a:prstGeom>
-          <a:solidFill>
-            <a:srgbClr val="EEF3FD"/>
-          </a:solidFill>
-          <a:ln/>
-        </p:spPr>
-      </p:sp>
       <p:pic>
         <p:nvPicPr>
-          <p:cNvPr id="10" name="Image 1" descr="preencoded.png">    </p:cNvPr>
+          <p:cNvPr id="12" name="Image 1" descr="preencoded.png">    </p:cNvPr>
           <p:cNvPicPr>
             <a:picLocks noChangeAspect="1"/>
           </p:cNvPicPr>
@@ -4420,8 +5573,8 @@
         </p:blipFill>
         <p:spPr>
           <a:xfrm>
-            <a:off x="4536338" y="1514246"/>
-            <a:ext cx="263347" cy="263347"/>
+            <a:off x="4983480" y="2286000"/>
+            <a:ext cx="347472" cy="347472"/>
           </a:xfrm>
           <a:prstGeom prst="rect">
             <a:avLst/>
@@ -4430,38 +5583,38 @@
       </p:pic>
       <p:sp>
         <p:nvSpPr>
-          <p:cNvPr id="11" name="Text 7"/>
-          <p:cNvSpPr/>
-          <p:nvPr/>
-        </p:nvSpPr>
-        <p:spPr>
-          <a:xfrm>
-            <a:off x="3493008" y="2029968"/>
-            <a:ext cx="2350008" cy="365760"/>
-          </a:xfrm>
-          <a:prstGeom prst="rect">
-            <a:avLst/>
-          </a:prstGeom>
-          <a:noFill/>
-          <a:ln/>
-        </p:spPr>
-        <p:txBody>
-          <a:bodyPr wrap="square" lIns="0" tIns="0" rIns="0" bIns="0" rtlCol="0" anchor="ctr"/>
-          <a:lstStyle/>
-          <a:p>
-            <a:pPr algn="ctr" indent="0" marL="0">
+          <p:cNvPr id="13" name="Text 9"/>
+          <p:cNvSpPr/>
+          <p:nvPr/>
+        </p:nvSpPr>
+        <p:spPr>
+          <a:xfrm>
+            <a:off x="5440680" y="2304288"/>
+            <a:ext cx="3017520" cy="310896"/>
+          </a:xfrm>
+          <a:prstGeom prst="rect">
+            <a:avLst/>
+          </a:prstGeom>
+          <a:noFill/>
+          <a:ln/>
+        </p:spPr>
+        <p:txBody>
+          <a:bodyPr wrap="square" lIns="0" tIns="0" rIns="0" bIns="0" rtlCol="0" anchor="ctr"/>
+          <a:lstStyle/>
+          <a:p>
+            <a:pPr indent="0" marL="0">
               <a:buNone/>
             </a:pPr>
             <a:r>
               <a:rPr lang="en-US" sz="1300" b="1" dirty="0">
                 <a:solidFill>
-                  <a:srgbClr val="1E2761"/>
-                </a:solidFill>
-                <a:latin typeface="Calibri" pitchFamily="34" charset="0"/>
-                <a:ea typeface="Calibri" pitchFamily="34" charset="-122"/>
-                <a:cs typeface="Calibri" pitchFamily="34" charset="-120"/>
-              </a:rPr>
-              <a:t>Recall Recon (99P Labs)</a:t>
+                  <a:srgbClr val="F2A93B"/>
+                </a:solidFill>
+                <a:latin typeface="Calibri" pitchFamily="34" charset="0"/>
+                <a:ea typeface="Calibri" pitchFamily="34" charset="-122"/>
+                <a:cs typeface="Calibri" pitchFamily="34" charset="-120"/>
+              </a:rPr>
+              <a:t>Selected — signal confirmed</a:t>
             </a:r>
             <a:endParaRPr lang="en-US" sz="1300" dirty="0"/>
           </a:p>
@@ -4469,61 +5622,139 @@
       </p:sp>
       <p:sp>
         <p:nvSpPr>
-          <p:cNvPr id="12" name="Text 8"/>
-          <p:cNvSpPr/>
-          <p:nvPr/>
-        </p:nvSpPr>
-        <p:spPr>
-          <a:xfrm>
-            <a:off x="3520440" y="2423160"/>
-            <a:ext cx="2295144" cy="822960"/>
-          </a:xfrm>
-          <a:prstGeom prst="rect">
-            <a:avLst/>
-          </a:prstGeom>
-          <a:noFill/>
-          <a:ln/>
-        </p:spPr>
-        <p:txBody>
-          <a:bodyPr wrap="square" lIns="0" tIns="0" rIns="0" bIns="0" rtlCol="0" anchor="t"/>
-          <a:lstStyle/>
-          <a:p>
-            <a:pPr algn="ctr" indent="0" marL="0">
-              <a:buNone/>
-            </a:pPr>
-            <a:r>
-              <a:rPr lang="en-US" sz="1000" dirty="0">
-                <a:solidFill>
-                  <a:srgbClr val="5B6478"/>
-                </a:solidFill>
-                <a:latin typeface="Calibri" pitchFamily="34" charset="0"/>
-                <a:ea typeface="Calibri" pitchFamily="34" charset="-122"/>
-                <a:cs typeface="Calibri" pitchFamily="34" charset="-120"/>
-              </a:rPr>
-              <a:t>Published ML + RAG system forecasting safety recalls from NHTSA data.</a:t>
-            </a:r>
-            <a:endParaRPr lang="en-US" sz="1000" dirty="0"/>
-          </a:p>
-        </p:txBody>
-      </p:sp>
-      <p:sp>
-        <p:nvSpPr>
-          <p:cNvPr id="13" name="Shape 9"/>
-          <p:cNvSpPr/>
-          <p:nvPr/>
-        </p:nvSpPr>
-        <p:spPr>
-          <a:xfrm>
-            <a:off x="6163056" y="1188720"/>
-            <a:ext cx="2624328" cy="2148840"/>
+          <p:cNvPr id="14" name="Text 10"/>
+          <p:cNvSpPr/>
+          <p:nvPr/>
+        </p:nvSpPr>
+        <p:spPr>
+          <a:xfrm>
+            <a:off x="5029200" y="2679192"/>
+            <a:ext cx="3383280" cy="365760"/>
+          </a:xfrm>
+          <a:prstGeom prst="rect">
+            <a:avLst/>
+          </a:prstGeom>
+          <a:noFill/>
+          <a:ln/>
+        </p:spPr>
+        <p:txBody>
+          <a:bodyPr wrap="square" lIns="0" tIns="0" rIns="0" bIns="0" rtlCol="0" anchor="ctr"/>
+          <a:lstStyle/>
+          <a:p>
+            <a:pPr indent="0" marL="0">
+              <a:buNone/>
+            </a:pPr>
+            <a:r>
+              <a:rPr lang="en-US" sz="1050" dirty="0">
+                <a:solidFill>
+                  <a:srgbClr val="CADCFC"/>
+                </a:solidFill>
+                <a:latin typeface="Calibri" pitchFamily="34" charset="0"/>
+                <a:ea typeface="Calibri" pitchFamily="34" charset="-122"/>
+                <a:cs typeface="Calibri" pitchFamily="34" charset="-120"/>
+              </a:rPr>
+              <a:t>Real DTC codes as the target, not a generated label:</a:t>
+            </a:r>
+            <a:endParaRPr lang="en-US" sz="1050" dirty="0"/>
+          </a:p>
+        </p:txBody>
+      </p:sp>
+      <p:sp>
+        <p:nvSpPr>
+          <p:cNvPr id="15" name="Text 11"/>
+          <p:cNvSpPr/>
+          <p:nvPr/>
+        </p:nvSpPr>
+        <p:spPr>
+          <a:xfrm>
+            <a:off x="5029200" y="3136392"/>
+            <a:ext cx="3383280" cy="365760"/>
+          </a:xfrm>
+          <a:prstGeom prst="rect">
+            <a:avLst/>
+          </a:prstGeom>
+          <a:noFill/>
+          <a:ln/>
+        </p:spPr>
+        <p:txBody>
+          <a:bodyPr wrap="square" lIns="0" tIns="0" rIns="0" bIns="0" rtlCol="0" anchor="ctr"/>
+          <a:lstStyle/>
+          <a:p>
+            <a:pPr indent="0" marL="0">
+              <a:buNone/>
+            </a:pPr>
+            <a:r>
+              <a:rPr lang="en-US" sz="1500" b="1" dirty="0">
+                <a:solidFill>
+                  <a:srgbClr val="FFFFFF"/>
+                </a:solidFill>
+                <a:latin typeface="Calibri" pitchFamily="34" charset="0"/>
+                <a:ea typeface="Calibri" pitchFamily="34" charset="-122"/>
+                <a:cs typeface="Calibri" pitchFamily="34" charset="-120"/>
+              </a:rPr>
+              <a:t>Learns the real pattern</a:t>
+            </a:r>
+            <a:endParaRPr lang="en-US" sz="1500" dirty="0"/>
+          </a:p>
+        </p:txBody>
+      </p:sp>
+      <p:sp>
+        <p:nvSpPr>
+          <p:cNvPr id="16" name="Text 12"/>
+          <p:cNvSpPr/>
+          <p:nvPr/>
+        </p:nvSpPr>
+        <p:spPr>
+          <a:xfrm>
+            <a:off x="5029200" y="3493008"/>
+            <a:ext cx="3383280" cy="320040"/>
+          </a:xfrm>
+          <a:prstGeom prst="rect">
+            <a:avLst/>
+          </a:prstGeom>
+          <a:noFill/>
+          <a:ln/>
+        </p:spPr>
+        <p:txBody>
+          <a:bodyPr wrap="square" lIns="0" tIns="0" rIns="0" bIns="0" rtlCol="0" anchor="ctr"/>
+          <a:lstStyle/>
+          <a:p>
+            <a:pPr indent="0" marL="0">
+              <a:buNone/>
+            </a:pPr>
+            <a:r>
+              <a:rPr lang="en-US" sz="900" i="1" dirty="0">
+                <a:solidFill>
+                  <a:srgbClr val="CADCFC"/>
+                </a:solidFill>
+                <a:latin typeface="Calibri" pitchFamily="34" charset="0"/>
+                <a:ea typeface="Calibri" pitchFamily="34" charset="-122"/>
+                <a:cs typeface="Calibri" pitchFamily="34" charset="-120"/>
+              </a:rPr>
+              <a:t>(AUC 0.9999 · F1 0.995) — importances match the real code names (Motor RPM/Torque/Temp ↔ P0MR/P0MT)</a:t>
+            </a:r>
+            <a:endParaRPr lang="en-US" sz="900" dirty="0"/>
+          </a:p>
+        </p:txBody>
+      </p:sp>
+      <p:sp>
+        <p:nvSpPr>
+          <p:cNvPr id="17" name="Shape 13"/>
+          <p:cNvSpPr/>
+          <p:nvPr/>
+        </p:nvSpPr>
+        <p:spPr>
+          <a:xfrm>
+            <a:off x="548640" y="4041648"/>
+            <a:ext cx="2624328" cy="777240"/>
           </a:xfrm>
           <a:prstGeom prst="roundRect">
             <a:avLst>
-              <a:gd name="adj" fmla="val 5106"/>
+              <a:gd name="adj" fmla="val 11765"/>
             </a:avLst>
           </a:prstGeom>
           <a:solidFill>
-            <a:srgbClr val="FFFFFF"/>
+            <a:srgbClr val="EEF3FD"/>
           </a:solidFill>
           <a:ln/>
           <a:effectLst>
@@ -4537,57 +5768,13 @@
       </p:sp>
       <p:sp>
         <p:nvSpPr>
-          <p:cNvPr id="14" name="Shape 10"/>
-          <p:cNvSpPr/>
-          <p:nvPr/>
-        </p:nvSpPr>
-        <p:spPr>
-          <a:xfrm>
-            <a:off x="7200900" y="1371600"/>
-            <a:ext cx="548640" cy="548640"/>
-          </a:xfrm>
-          <a:prstGeom prst="ellipse">
-            <a:avLst/>
-          </a:prstGeom>
-          <a:solidFill>
-            <a:srgbClr val="EEF3FD"/>
-          </a:solidFill>
-          <a:ln/>
-        </p:spPr>
-      </p:sp>
-      <p:pic>
-        <p:nvPicPr>
-          <p:cNvPr id="15" name="Image 2" descr="preencoded.png">    </p:cNvPr>
-          <p:cNvPicPr>
-            <a:picLocks noChangeAspect="1"/>
-          </p:cNvPicPr>
-          <p:nvPr/>
-        </p:nvPicPr>
-        <p:blipFill>
-          <a:blip r:embed="rId3"/>
-          <a:stretch>
-            <a:fillRect/>
-          </a:stretch>
-        </p:blipFill>
-        <p:spPr>
-          <a:xfrm>
-            <a:off x="7343546" y="1514246"/>
-            <a:ext cx="263347" cy="263347"/>
-          </a:xfrm>
-          <a:prstGeom prst="rect">
-            <a:avLst/>
-          </a:prstGeom>
-        </p:spPr>
-      </p:pic>
-      <p:sp>
-        <p:nvSpPr>
-          <p:cNvPr id="16" name="Text 11"/>
-          <p:cNvSpPr/>
-          <p:nvPr/>
-        </p:nvSpPr>
-        <p:spPr>
-          <a:xfrm>
-            <a:off x="6300216" y="2029968"/>
+          <p:cNvPr id="18" name="Text 14"/>
+          <p:cNvSpPr/>
+          <p:nvPr/>
+        </p:nvSpPr>
+        <p:spPr>
+          <a:xfrm>
+            <a:off x="685800" y="4114800"/>
             <a:ext cx="2350008" cy="365760"/>
           </a:xfrm>
           <a:prstGeom prst="rect">
@@ -4604,7 +5791,7 @@
               <a:buNone/>
             </a:pPr>
             <a:r>
-              <a:rPr lang="en-US" sz="1300" b="1" dirty="0">
+              <a:rPr lang="en-US" sz="1700" b="1" dirty="0">
                 <a:solidFill>
                   <a:srgbClr val="1E2761"/>
                 </a:solidFill>
@@ -4612,38 +5799,38 @@
                 <a:ea typeface="Calibri" pitchFamily="34" charset="-122"/>
                 <a:cs typeface="Calibri" pitchFamily="34" charset="-120"/>
               </a:rPr>
-              <a:t>Academic RAG (Springer, 2025)</a:t>
-            </a:r>
-            <a:endParaRPr lang="en-US" sz="1300" dirty="0"/>
-          </a:p>
-        </p:txBody>
-      </p:sp>
-      <p:sp>
-        <p:nvSpPr>
-          <p:cNvPr id="17" name="Text 12"/>
-          <p:cNvSpPr/>
-          <p:nvPr/>
-        </p:nvSpPr>
-        <p:spPr>
-          <a:xfrm>
-            <a:off x="6327648" y="2423160"/>
-            <a:ext cx="2295144" cy="822960"/>
-          </a:xfrm>
-          <a:prstGeom prst="rect">
-            <a:avLst/>
-          </a:prstGeom>
-          <a:noFill/>
-          <a:ln/>
-        </p:spPr>
-        <p:txBody>
-          <a:bodyPr wrap="square" lIns="0" tIns="0" rIns="0" bIns="0" rtlCol="0" anchor="t"/>
+              <a:t>175,200 rows</a:t>
+            </a:r>
+            <a:endParaRPr lang="en-US" sz="1700" dirty="0"/>
+          </a:p>
+        </p:txBody>
+      </p:sp>
+      <p:sp>
+        <p:nvSpPr>
+          <p:cNvPr id="19" name="Text 15"/>
+          <p:cNvSpPr/>
+          <p:nvPr/>
+        </p:nvSpPr>
+        <p:spPr>
+          <a:xfrm>
+            <a:off x="640080" y="4498848"/>
+            <a:ext cx="2441448" cy="274320"/>
+          </a:xfrm>
+          <a:prstGeom prst="rect">
+            <a:avLst/>
+          </a:prstGeom>
+          <a:noFill/>
+          <a:ln/>
+        </p:spPr>
+        <p:txBody>
+          <a:bodyPr wrap="square" lIns="0" tIns="0" rIns="0" bIns="0" rtlCol="0" anchor="ctr"/>
           <a:lstStyle/>
           <a:p>
             <a:pPr algn="ctr" indent="0" marL="0">
               <a:buNone/>
             </a:pPr>
             <a:r>
-              <a:rPr lang="en-US" sz="1000" dirty="0">
+              <a:rPr lang="en-US" sz="900" dirty="0">
                 <a:solidFill>
                   <a:srgbClr val="5B6478"/>
                 </a:solidFill>
@@ -4651,26 +5838,26 @@
                 <a:ea typeface="Calibri" pitchFamily="34" charset="-122"/>
                 <a:cs typeface="Calibri" pitchFamily="34" charset="-120"/>
               </a:rPr>
-              <a:t>Hybrid classifier + multi-step RAG for generating diagnostic reports.</a:t>
-            </a:r>
-            <a:endParaRPr lang="en-US" sz="1000" dirty="0"/>
-          </a:p>
-        </p:txBody>
-      </p:sp>
-      <p:sp>
-        <p:nvSpPr>
-          <p:cNvPr id="18" name="Shape 13"/>
-          <p:cNvSpPr/>
-          <p:nvPr/>
-        </p:nvSpPr>
-        <p:spPr>
-          <a:xfrm>
-            <a:off x="548640" y="3611880"/>
-            <a:ext cx="8046720" cy="1051560"/>
+              <a:t>4 EVs × 5 yrs, hourly telemetry</a:t>
+            </a:r>
+            <a:endParaRPr lang="en-US" sz="900" dirty="0"/>
+          </a:p>
+        </p:txBody>
+      </p:sp>
+      <p:sp>
+        <p:nvSpPr>
+          <p:cNvPr id="20" name="Shape 16"/>
+          <p:cNvSpPr/>
+          <p:nvPr/>
+        </p:nvSpPr>
+        <p:spPr>
+          <a:xfrm>
+            <a:off x="3355848" y="4041648"/>
+            <a:ext cx="2624328" cy="777240"/>
           </a:xfrm>
           <a:prstGeom prst="roundRect">
             <a:avLst>
-              <a:gd name="adj" fmla="val 8696"/>
+              <a:gd name="adj" fmla="val 11765"/>
             </a:avLst>
           </a:prstGeom>
           <a:solidFill>
@@ -4688,30 +5875,30 @@
       </p:sp>
       <p:sp>
         <p:nvSpPr>
-          <p:cNvPr id="19" name="Text 14"/>
-          <p:cNvSpPr/>
-          <p:nvPr/>
-        </p:nvSpPr>
-        <p:spPr>
-          <a:xfrm>
-            <a:off x="822960" y="3611880"/>
-            <a:ext cx="7498080" cy="1051560"/>
-          </a:xfrm>
-          <a:prstGeom prst="rect">
-            <a:avLst/>
-          </a:prstGeom>
-          <a:noFill/>
-          <a:ln/>
-        </p:spPr>
-        <p:txBody>
-          <a:bodyPr wrap="square" lIns="0" tIns="0" rIns="0" bIns="0" rtlCol="0" anchor="ctr"/>
-          <a:lstStyle/>
-          <a:p>
-            <a:pPr indent="0" marL="0">
-              <a:buNone/>
-            </a:pPr>
-            <a:r>
-              <a:rPr lang="en-US" sz="1300" b="1" dirty="0">
+          <p:cNvPr id="21" name="Text 17"/>
+          <p:cNvSpPr/>
+          <p:nvPr/>
+        </p:nvSpPr>
+        <p:spPr>
+          <a:xfrm>
+            <a:off x="3493008" y="4114800"/>
+            <a:ext cx="2350008" cy="365760"/>
+          </a:xfrm>
+          <a:prstGeom prst="rect">
+            <a:avLst/>
+          </a:prstGeom>
+          <a:noFill/>
+          <a:ln/>
+        </p:spPr>
+        <p:txBody>
+          <a:bodyPr wrap="square" lIns="0" tIns="0" rIns="0" bIns="0" rtlCol="0" anchor="ctr"/>
+          <a:lstStyle/>
+          <a:p>
+            <a:pPr algn="ctr" indent="0" marL="0">
+              <a:buNone/>
+            </a:pPr>
+            <a:r>
+              <a:rPr lang="en-US" sz="1700" b="1" dirty="0">
                 <a:solidFill>
                   <a:srgbClr val="1E2761"/>
                 </a:solidFill>
@@ -4719,29 +5906,161 @@
                 <a:ea typeface="Calibri" pitchFamily="34" charset="-122"/>
                 <a:cs typeface="Calibri" pitchFamily="34" charset="-120"/>
               </a:rPr>
-              <a:t>Our edge: </a:t>
-            </a:r>
-            <a:pPr indent="0" marL="0">
-              <a:buNone/>
-            </a:pPr>
-            <a:r>
-              <a:rPr lang="en-US" sz="1300" dirty="0">
-                <a:solidFill>
-                  <a:srgbClr val="2B3350"/>
-                </a:solidFill>
-                <a:latin typeface="Calibri" pitchFamily="34" charset="0"/>
-                <a:ea typeface="Calibri" pitchFamily="34" charset="-122"/>
-                <a:cs typeface="Calibri" pitchFamily="34" charset="-120"/>
-              </a:rPr>
-              <a:t>agentic orchestration with a visible reasoning trace, plus full-stack ownership end-to-end — not a single vendor API.</a:t>
-            </a:r>
-            <a:endParaRPr lang="en-US" sz="1300" dirty="0"/>
-          </a:p>
-        </p:txBody>
-      </p:sp>
-      <p:sp>
-        <p:nvSpPr>
-          <p:cNvPr id="20" name="Text 15"/>
+              <a:t>1.51% / 0.12%</a:t>
+            </a:r>
+            <a:endParaRPr lang="en-US" sz="1700" dirty="0"/>
+          </a:p>
+        </p:txBody>
+      </p:sp>
+      <p:sp>
+        <p:nvSpPr>
+          <p:cNvPr id="22" name="Text 18"/>
+          <p:cNvSpPr/>
+          <p:nvPr/>
+        </p:nvSpPr>
+        <p:spPr>
+          <a:xfrm>
+            <a:off x="3447288" y="4498848"/>
+            <a:ext cx="2441448" cy="274320"/>
+          </a:xfrm>
+          <a:prstGeom prst="rect">
+            <a:avLst/>
+          </a:prstGeom>
+          <a:noFill/>
+          <a:ln/>
+        </p:spPr>
+        <p:txBody>
+          <a:bodyPr wrap="square" lIns="0" tIns="0" rIns="0" bIns="0" rtlCol="0" anchor="ctr"/>
+          <a:lstStyle/>
+          <a:p>
+            <a:pPr algn="ctr" indent="0" marL="0">
+              <a:buNone/>
+            </a:pPr>
+            <a:r>
+              <a:rPr lang="en-US" sz="900" dirty="0">
+                <a:solidFill>
+                  <a:srgbClr val="5B6478"/>
+                </a:solidFill>
+                <a:latin typeface="Calibri" pitchFamily="34" charset="0"/>
+                <a:ea typeface="Calibri" pitchFamily="34" charset="-122"/>
+                <a:cs typeface="Calibri" pitchFamily="34" charset="-120"/>
+              </a:rPr>
+              <a:t>Fault / Warning rate (rest Normal)</a:t>
+            </a:r>
+            <a:endParaRPr lang="en-US" sz="900" dirty="0"/>
+          </a:p>
+        </p:txBody>
+      </p:sp>
+      <p:sp>
+        <p:nvSpPr>
+          <p:cNvPr id="23" name="Shape 19"/>
+          <p:cNvSpPr/>
+          <p:nvPr/>
+        </p:nvSpPr>
+        <p:spPr>
+          <a:xfrm>
+            <a:off x="6163056" y="4041648"/>
+            <a:ext cx="2624328" cy="777240"/>
+          </a:xfrm>
+          <a:prstGeom prst="roundRect">
+            <a:avLst>
+              <a:gd name="adj" fmla="val 11765"/>
+            </a:avLst>
+          </a:prstGeom>
+          <a:solidFill>
+            <a:srgbClr val="EEF3FD"/>
+          </a:solidFill>
+          <a:ln/>
+          <a:effectLst>
+            <a:outerShdw sx="100000" sy="100000" kx="0" ky="0" algn="bl" rotWithShape="0" blurRad="127000" dist="38100" dir="2700000">
+              <a:srgbClr val="0B1030">
+                <a:alpha val="18000"/>
+              </a:srgbClr>
+            </a:outerShdw>
+          </a:effectLst>
+        </p:spPr>
+      </p:sp>
+      <p:sp>
+        <p:nvSpPr>
+          <p:cNvPr id="24" name="Text 20"/>
+          <p:cNvSpPr/>
+          <p:nvPr/>
+        </p:nvSpPr>
+        <p:spPr>
+          <a:xfrm>
+            <a:off x="6300216" y="4114800"/>
+            <a:ext cx="2350008" cy="365760"/>
+          </a:xfrm>
+          <a:prstGeom prst="rect">
+            <a:avLst/>
+          </a:prstGeom>
+          <a:noFill/>
+          <a:ln/>
+        </p:spPr>
+        <p:txBody>
+          <a:bodyPr wrap="square" lIns="0" tIns="0" rIns="0" bIns="0" rtlCol="0" anchor="ctr"/>
+          <a:lstStyle/>
+          <a:p>
+            <a:pPr algn="ctr" indent="0" marL="0">
+              <a:buNone/>
+            </a:pPr>
+            <a:r>
+              <a:rPr lang="en-US" sz="1700" b="1" dirty="0">
+                <a:solidFill>
+                  <a:srgbClr val="1E2761"/>
+                </a:solidFill>
+                <a:latin typeface="Calibri" pitchFamily="34" charset="0"/>
+                <a:ea typeface="Calibri" pitchFamily="34" charset="-122"/>
+                <a:cs typeface="Calibri" pitchFamily="34" charset="-120"/>
+              </a:rPr>
+              <a:t>202 + 3,329</a:t>
+            </a:r>
+            <a:endParaRPr lang="en-US" sz="1700" dirty="0"/>
+          </a:p>
+        </p:txBody>
+      </p:sp>
+      <p:sp>
+        <p:nvSpPr>
+          <p:cNvPr id="25" name="Text 21"/>
+          <p:cNvSpPr/>
+          <p:nvPr/>
+        </p:nvSpPr>
+        <p:spPr>
+          <a:xfrm>
+            <a:off x="6254496" y="4498848"/>
+            <a:ext cx="2441448" cy="274320"/>
+          </a:xfrm>
+          <a:prstGeom prst="rect">
+            <a:avLst/>
+          </a:prstGeom>
+          <a:noFill/>
+          <a:ln/>
+        </p:spPr>
+        <p:txBody>
+          <a:bodyPr wrap="square" lIns="0" tIns="0" rIns="0" bIns="0" rtlCol="0" anchor="ctr"/>
+          <a:lstStyle/>
+          <a:p>
+            <a:pPr algn="ctr" indent="0" marL="0">
+              <a:buNone/>
+            </a:pPr>
+            <a:r>
+              <a:rPr lang="en-US" sz="900" dirty="0">
+                <a:solidFill>
+                  <a:srgbClr val="5B6478"/>
+                </a:solidFill>
+                <a:latin typeface="Calibri" pitchFamily="34" charset="0"/>
+                <a:ea typeface="Calibri" pitchFamily="34" charset="-122"/>
+                <a:cs typeface="Calibri" pitchFamily="34" charset="-120"/>
+              </a:rPr>
+              <a:t>NHTSA recalls + complaints filtered</a:t>
+            </a:r>
+            <a:endParaRPr lang="en-US" sz="900" dirty="0"/>
+          </a:p>
+        </p:txBody>
+      </p:sp>
+      <p:sp>
+        <p:nvSpPr>
+          <p:cNvPr id="26" name="Text 22"/>
           <p:cNvSpPr/>
           <p:nvPr/>
         </p:nvSpPr>
@@ -4789,7 +6108,7 @@
     <p:bg>
       <p:bgPr>
         <a:solidFill>
-          <a:srgbClr val="1E2761"/>
+          <a:srgbClr val="F7F9FC"/>
         </a:solidFill>
       </p:bgPr>
     </p:bg>
@@ -4834,13 +6153,13 @@
             <a:r>
               <a:rPr lang="en-US" sz="3000" b="1" dirty="0">
                 <a:solidFill>
-                  <a:srgbClr val="FFFFFF"/>
-                </a:solidFill>
-                <a:latin typeface="Calibri" pitchFamily="34" charset="0"/>
-                <a:ea typeface="Calibri" pitchFamily="34" charset="-122"/>
-                <a:cs typeface="Calibri" pitchFamily="34" charset="-120"/>
-              </a:rPr>
-              <a:t>4-Week Scope</a:t>
+                  <a:srgbClr val="1E2761"/>
+                </a:solidFill>
+                <a:latin typeface="Calibri" pitchFamily="34" charset="0"/>
+                <a:ea typeface="Calibri" pitchFamily="34" charset="-122"/>
+                <a:cs typeface="Calibri" pitchFamily="34" charset="-120"/>
+              </a:rPr>
+              <a:t>How We'll Measure Success</a:t>
             </a:r>
             <a:endParaRPr lang="en-US" sz="3000" dirty="0"/>
           </a:p>
@@ -4854,21 +6173,50 @@
         </p:nvSpPr>
         <p:spPr>
           <a:xfrm>
-            <a:off x="640080" y="1371600"/>
-            <a:ext cx="457200" cy="457200"/>
+            <a:off x="548640" y="1188720"/>
+            <a:ext cx="2624328" cy="2148840"/>
+          </a:xfrm>
+          <a:prstGeom prst="roundRect">
+            <a:avLst>
+              <a:gd name="adj" fmla="val 5106"/>
+            </a:avLst>
+          </a:prstGeom>
+          <a:solidFill>
+            <a:srgbClr val="FFFFFF"/>
+          </a:solidFill>
+          <a:ln/>
+          <a:effectLst>
+            <a:outerShdw sx="100000" sy="100000" kx="0" ky="0" algn="bl" rotWithShape="0" blurRad="127000" dist="38100" dir="2700000">
+              <a:srgbClr val="0B1030">
+                <a:alpha val="18000"/>
+              </a:srgbClr>
+            </a:outerShdw>
+          </a:effectLst>
+        </p:spPr>
+      </p:sp>
+      <p:sp>
+        <p:nvSpPr>
+          <p:cNvPr id="4" name="Shape 2"/>
+          <p:cNvSpPr/>
+          <p:nvPr/>
+        </p:nvSpPr>
+        <p:spPr>
+          <a:xfrm>
+            <a:off x="1586484" y="1371600"/>
+            <a:ext cx="548640" cy="548640"/>
           </a:xfrm>
           <a:prstGeom prst="ellipse">
             <a:avLst/>
           </a:prstGeom>
           <a:solidFill>
-            <a:srgbClr val="2A3372"/>
+            <a:srgbClr val="EEF3FD"/>
           </a:solidFill>
           <a:ln/>
         </p:spPr>
       </p:sp>
       <p:pic>
         <p:nvPicPr>
-          <p:cNvPr id="4" name="Image 0" descr="preencoded.png">    </p:cNvPr>
+          <p:cNvPr id="5" name="Image 0" descr="preencoded.png">    </p:cNvPr>
           <p:cNvPicPr>
             <a:picLocks noChangeAspect="1"/>
           </p:cNvPicPr>
@@ -4882,8 +6230,8 @@
         </p:blipFill>
         <p:spPr>
           <a:xfrm>
-            <a:off x="749808" y="1472184"/>
-            <a:ext cx="256032" cy="256032"/>
+            <a:off x="1729130" y="1514246"/>
+            <a:ext cx="263347" cy="263347"/>
           </a:xfrm>
           <a:prstGeom prst="rect">
             <a:avLst/>
@@ -4892,105 +6240,134 @@
       </p:pic>
       <p:sp>
         <p:nvSpPr>
-          <p:cNvPr id="5" name="Text 2"/>
-          <p:cNvSpPr/>
-          <p:nvPr/>
-        </p:nvSpPr>
-        <p:spPr>
-          <a:xfrm>
-            <a:off x="1280160" y="1344168"/>
-            <a:ext cx="3291840" cy="320040"/>
-          </a:xfrm>
-          <a:prstGeom prst="rect">
-            <a:avLst/>
-          </a:prstGeom>
-          <a:noFill/>
-          <a:ln/>
-        </p:spPr>
-        <p:txBody>
-          <a:bodyPr wrap="square" lIns="0" tIns="0" rIns="0" bIns="0" rtlCol="0" anchor="ctr"/>
-          <a:lstStyle/>
-          <a:p>
-            <a:pPr indent="0" marL="0">
-              <a:buNone/>
-            </a:pPr>
-            <a:r>
-              <a:rPr lang="en-US" sz="1400" b="1" dirty="0">
-                <a:solidFill>
-                  <a:srgbClr val="FFFFFF"/>
-                </a:solidFill>
-                <a:latin typeface="Calibri" pitchFamily="34" charset="0"/>
-                <a:ea typeface="Calibri" pitchFamily="34" charset="-122"/>
-                <a:cs typeface="Calibri" pitchFamily="34" charset="-120"/>
-              </a:rPr>
-              <a:t>One subsystem</a:t>
-            </a:r>
-            <a:endParaRPr lang="en-US" sz="1400" dirty="0"/>
-          </a:p>
-        </p:txBody>
-      </p:sp>
-      <p:sp>
-        <p:nvSpPr>
           <p:cNvPr id="6" name="Text 3"/>
           <p:cNvSpPr/>
           <p:nvPr/>
         </p:nvSpPr>
         <p:spPr>
           <a:xfrm>
-            <a:off x="1280160" y="1645920"/>
-            <a:ext cx="3566160" cy="274320"/>
-          </a:xfrm>
-          <a:prstGeom prst="rect">
-            <a:avLst/>
-          </a:prstGeom>
-          <a:noFill/>
-          <a:ln/>
-        </p:spPr>
-        <p:txBody>
-          <a:bodyPr wrap="square" lIns="0" tIns="0" rIns="0" bIns="0" rtlCol="0" anchor="ctr"/>
-          <a:lstStyle/>
-          <a:p>
-            <a:pPr indent="0" marL="0">
-              <a:buNone/>
-            </a:pPr>
-            <a:r>
-              <a:rPr lang="en-US" sz="1050" dirty="0">
-                <a:solidFill>
-                  <a:srgbClr val="CADCFC"/>
-                </a:solidFill>
-                <a:latin typeface="Calibri" pitchFamily="34" charset="0"/>
-                <a:ea typeface="Calibri" pitchFamily="34" charset="-122"/>
-                <a:cs typeface="Calibri" pitchFamily="34" charset="-120"/>
-              </a:rPr>
-              <a:t>braking, battery/EV, or engine cooling</a:t>
-            </a:r>
-            <a:endParaRPr lang="en-US" sz="1050" dirty="0"/>
-          </a:p>
-        </p:txBody>
-      </p:sp>
-      <p:sp>
-        <p:nvSpPr>
-          <p:cNvPr id="7" name="Shape 4"/>
-          <p:cNvSpPr/>
-          <p:nvPr/>
-        </p:nvSpPr>
-        <p:spPr>
-          <a:xfrm>
-            <a:off x="640080" y="1993392"/>
-            <a:ext cx="457200" cy="457200"/>
+            <a:off x="685800" y="2029968"/>
+            <a:ext cx="2350008" cy="365760"/>
+          </a:xfrm>
+          <a:prstGeom prst="rect">
+            <a:avLst/>
+          </a:prstGeom>
+          <a:noFill/>
+          <a:ln/>
+        </p:spPr>
+        <p:txBody>
+          <a:bodyPr wrap="square" lIns="0" tIns="0" rIns="0" bIns="0" rtlCol="0" anchor="ctr"/>
+          <a:lstStyle/>
+          <a:p>
+            <a:pPr algn="ctr" indent="0" marL="0">
+              <a:buNone/>
+            </a:pPr>
+            <a:r>
+              <a:rPr lang="en-US" sz="1300" b="1" dirty="0">
+                <a:solidFill>
+                  <a:srgbClr val="1E2761"/>
+                </a:solidFill>
+                <a:latin typeface="Calibri" pitchFamily="34" charset="0"/>
+                <a:ea typeface="Calibri" pitchFamily="34" charset="-122"/>
+                <a:cs typeface="Calibri" pitchFamily="34" charset="-120"/>
+              </a:rPr>
+              <a:t>Macro F1 + Recall</a:t>
+            </a:r>
+            <a:endParaRPr lang="en-US" sz="1300" dirty="0"/>
+          </a:p>
+        </p:txBody>
+      </p:sp>
+      <p:sp>
+        <p:nvSpPr>
+          <p:cNvPr id="7" name="Text 4"/>
+          <p:cNvSpPr/>
+          <p:nvPr/>
+        </p:nvSpPr>
+        <p:spPr>
+          <a:xfrm>
+            <a:off x="713232" y="2423160"/>
+            <a:ext cx="2295144" cy="868680"/>
+          </a:xfrm>
+          <a:prstGeom prst="rect">
+            <a:avLst/>
+          </a:prstGeom>
+          <a:noFill/>
+          <a:ln/>
+        </p:spPr>
+        <p:txBody>
+          <a:bodyPr wrap="square" lIns="0" tIns="0" rIns="0" bIns="0" rtlCol="0" anchor="t"/>
+          <a:lstStyle/>
+          <a:p>
+            <a:pPr algn="ctr" indent="0" marL="0">
+              <a:buNone/>
+            </a:pPr>
+            <a:r>
+              <a:rPr lang="en-US" sz="1000" dirty="0">
+                <a:solidFill>
+                  <a:srgbClr val="5B6478"/>
+                </a:solidFill>
+                <a:latin typeface="Calibri" pitchFamily="34" charset="0"/>
+                <a:ea typeface="Calibri" pitchFamily="34" charset="-122"/>
+                <a:cs typeface="Calibri" pitchFamily="34" charset="-120"/>
+              </a:rPr>
+              <a:t>Per-class recall + confusion matrix across Normal/Warning/Fault — averaged equally, not dominated by the majority class.</a:t>
+            </a:r>
+            <a:endParaRPr lang="en-US" sz="1000" dirty="0"/>
+          </a:p>
+        </p:txBody>
+      </p:sp>
+      <p:sp>
+        <p:nvSpPr>
+          <p:cNvPr id="8" name="Shape 5"/>
+          <p:cNvSpPr/>
+          <p:nvPr/>
+        </p:nvSpPr>
+        <p:spPr>
+          <a:xfrm>
+            <a:off x="3355848" y="1188720"/>
+            <a:ext cx="2624328" cy="2148840"/>
+          </a:xfrm>
+          <a:prstGeom prst="roundRect">
+            <a:avLst>
+              <a:gd name="adj" fmla="val 5106"/>
+            </a:avLst>
+          </a:prstGeom>
+          <a:solidFill>
+            <a:srgbClr val="FFFFFF"/>
+          </a:solidFill>
+          <a:ln/>
+          <a:effectLst>
+            <a:outerShdw sx="100000" sy="100000" kx="0" ky="0" algn="bl" rotWithShape="0" blurRad="127000" dist="38100" dir="2700000">
+              <a:srgbClr val="0B1030">
+                <a:alpha val="18000"/>
+              </a:srgbClr>
+            </a:outerShdw>
+          </a:effectLst>
+        </p:spPr>
+      </p:sp>
+      <p:sp>
+        <p:nvSpPr>
+          <p:cNvPr id="9" name="Shape 6"/>
+          <p:cNvSpPr/>
+          <p:nvPr/>
+        </p:nvSpPr>
+        <p:spPr>
+          <a:xfrm>
+            <a:off x="4393692" y="1371600"/>
+            <a:ext cx="548640" cy="548640"/>
           </a:xfrm>
           <a:prstGeom prst="ellipse">
             <a:avLst/>
           </a:prstGeom>
           <a:solidFill>
-            <a:srgbClr val="2A3372"/>
+            <a:srgbClr val="EEF3FD"/>
           </a:solidFill>
           <a:ln/>
         </p:spPr>
       </p:sp>
       <p:pic>
         <p:nvPicPr>
-          <p:cNvPr id="8" name="Image 1" descr="preencoded.png">    </p:cNvPr>
+          <p:cNvPr id="10" name="Image 1" descr="preencoded.png">    </p:cNvPr>
           <p:cNvPicPr>
             <a:picLocks noChangeAspect="1"/>
           </p:cNvPicPr>
@@ -5004,8 +6381,8 @@
         </p:blipFill>
         <p:spPr>
           <a:xfrm>
-            <a:off x="749808" y="2093976"/>
-            <a:ext cx="256032" cy="256032"/>
+            <a:off x="4536338" y="1514246"/>
+            <a:ext cx="263347" cy="263347"/>
           </a:xfrm>
           <a:prstGeom prst="rect">
             <a:avLst/>
@@ -5014,105 +6391,134 @@
       </p:pic>
       <p:sp>
         <p:nvSpPr>
-          <p:cNvPr id="9" name="Text 5"/>
-          <p:cNvSpPr/>
-          <p:nvPr/>
-        </p:nvSpPr>
-        <p:spPr>
-          <a:xfrm>
-            <a:off x="1280160" y="1965960"/>
-            <a:ext cx="3291840" cy="320040"/>
-          </a:xfrm>
-          <a:prstGeom prst="rect">
-            <a:avLst/>
-          </a:prstGeom>
-          <a:noFill/>
-          <a:ln/>
-        </p:spPr>
-        <p:txBody>
-          <a:bodyPr wrap="square" lIns="0" tIns="0" rIns="0" bIns="0" rtlCol="0" anchor="ctr"/>
-          <a:lstStyle/>
-          <a:p>
-            <a:pPr indent="0" marL="0">
-              <a:buNone/>
-            </a:pPr>
-            <a:r>
-              <a:rPr lang="en-US" sz="1400" b="1" dirty="0">
-                <a:solidFill>
-                  <a:srgbClr val="FFFFFF"/>
-                </a:solidFill>
-                <a:latin typeface="Calibri" pitchFamily="34" charset="0"/>
-                <a:ea typeface="Calibri" pitchFamily="34" charset="-122"/>
-                <a:cs typeface="Calibri" pitchFamily="34" charset="-120"/>
-              </a:rPr>
-              <a:t>Trained fault classifier</a:t>
-            </a:r>
-            <a:endParaRPr lang="en-US" sz="1400" dirty="0"/>
-          </a:p>
-        </p:txBody>
-      </p:sp>
-      <p:sp>
-        <p:nvSpPr>
-          <p:cNvPr id="10" name="Text 6"/>
-          <p:cNvSpPr/>
-          <p:nvPr/>
-        </p:nvSpPr>
-        <p:spPr>
-          <a:xfrm>
-            <a:off x="1280160" y="2267712"/>
-            <a:ext cx="3566160" cy="274320"/>
-          </a:xfrm>
-          <a:prstGeom prst="rect">
-            <a:avLst/>
-          </a:prstGeom>
-          <a:noFill/>
-          <a:ln/>
-        </p:spPr>
-        <p:txBody>
-          <a:bodyPr wrap="square" lIns="0" tIns="0" rIns="0" bIns="0" rtlCol="0" anchor="ctr"/>
-          <a:lstStyle/>
-          <a:p>
-            <a:pPr indent="0" marL="0">
-              <a:buNone/>
-            </a:pPr>
-            <a:r>
-              <a:rPr lang="en-US" sz="1050" dirty="0">
-                <a:solidFill>
-                  <a:srgbClr val="CADCFC"/>
-                </a:solidFill>
-                <a:latin typeface="Calibri" pitchFamily="34" charset="0"/>
-                <a:ea typeface="Calibri" pitchFamily="34" charset="-122"/>
-                <a:cs typeface="Calibri" pitchFamily="34" charset="-120"/>
-              </a:rPr>
-              <a:t>baseline → small neural net</a:t>
-            </a:r>
-            <a:endParaRPr lang="en-US" sz="1050" dirty="0"/>
-          </a:p>
-        </p:txBody>
-      </p:sp>
-      <p:sp>
-        <p:nvSpPr>
-          <p:cNvPr id="11" name="Shape 7"/>
-          <p:cNvSpPr/>
-          <p:nvPr/>
-        </p:nvSpPr>
-        <p:spPr>
-          <a:xfrm>
-            <a:off x="640080" y="2615184"/>
-            <a:ext cx="457200" cy="457200"/>
+          <p:cNvPr id="11" name="Text 7"/>
+          <p:cNvSpPr/>
+          <p:nvPr/>
+        </p:nvSpPr>
+        <p:spPr>
+          <a:xfrm>
+            <a:off x="3493008" y="2029968"/>
+            <a:ext cx="2350008" cy="365760"/>
+          </a:xfrm>
+          <a:prstGeom prst="rect">
+            <a:avLst/>
+          </a:prstGeom>
+          <a:noFill/>
+          <a:ln/>
+        </p:spPr>
+        <p:txBody>
+          <a:bodyPr wrap="square" lIns="0" tIns="0" rIns="0" bIns="0" rtlCol="0" anchor="ctr"/>
+          <a:lstStyle/>
+          <a:p>
+            <a:pPr algn="ctr" indent="0" marL="0">
+              <a:buNone/>
+            </a:pPr>
+            <a:r>
+              <a:rPr lang="en-US" sz="1300" b="1" dirty="0">
+                <a:solidFill>
+                  <a:srgbClr val="1E2761"/>
+                </a:solidFill>
+                <a:latin typeface="Calibri" pitchFamily="34" charset="0"/>
+                <a:ea typeface="Calibri" pitchFamily="34" charset="-122"/>
+                <a:cs typeface="Calibri" pitchFamily="34" charset="-120"/>
+              </a:rPr>
+              <a:t>Binary Rollup</a:t>
+            </a:r>
+            <a:endParaRPr lang="en-US" sz="1300" dirty="0"/>
+          </a:p>
+        </p:txBody>
+      </p:sp>
+      <p:sp>
+        <p:nvSpPr>
+          <p:cNvPr id="12" name="Text 8"/>
+          <p:cNvSpPr/>
+          <p:nvPr/>
+        </p:nvSpPr>
+        <p:spPr>
+          <a:xfrm>
+            <a:off x="3520440" y="2423160"/>
+            <a:ext cx="2295144" cy="868680"/>
+          </a:xfrm>
+          <a:prstGeom prst="rect">
+            <a:avLst/>
+          </a:prstGeom>
+          <a:noFill/>
+          <a:ln/>
+        </p:spPr>
+        <p:txBody>
+          <a:bodyPr wrap="square" lIns="0" tIns="0" rIns="0" bIns="0" rtlCol="0" anchor="t"/>
+          <a:lstStyle/>
+          <a:p>
+            <a:pPr algn="ctr" indent="0" marL="0">
+              <a:buNone/>
+            </a:pPr>
+            <a:r>
+              <a:rPr lang="en-US" sz="1000" dirty="0">
+                <a:solidFill>
+                  <a:srgbClr val="5B6478"/>
+                </a:solidFill>
+                <a:latin typeface="Calibri" pitchFamily="34" charset="0"/>
+                <a:ea typeface="Calibri" pitchFamily="34" charset="-122"/>
+                <a:cs typeface="Calibri" pitchFamily="34" charset="-120"/>
+              </a:rPr>
+              <a:t>Normal vs. Any-Issue — the statistically reliable headline number (Warning has ~40 test rows, reported as directional).</a:t>
+            </a:r>
+            <a:endParaRPr lang="en-US" sz="1000" dirty="0"/>
+          </a:p>
+        </p:txBody>
+      </p:sp>
+      <p:sp>
+        <p:nvSpPr>
+          <p:cNvPr id="13" name="Shape 9"/>
+          <p:cNvSpPr/>
+          <p:nvPr/>
+        </p:nvSpPr>
+        <p:spPr>
+          <a:xfrm>
+            <a:off x="6163056" y="1188720"/>
+            <a:ext cx="2624328" cy="2148840"/>
+          </a:xfrm>
+          <a:prstGeom prst="roundRect">
+            <a:avLst>
+              <a:gd name="adj" fmla="val 5106"/>
+            </a:avLst>
+          </a:prstGeom>
+          <a:solidFill>
+            <a:srgbClr val="FFFFFF"/>
+          </a:solidFill>
+          <a:ln/>
+          <a:effectLst>
+            <a:outerShdw sx="100000" sy="100000" kx="0" ky="0" algn="bl" rotWithShape="0" blurRad="127000" dist="38100" dir="2700000">
+              <a:srgbClr val="0B1030">
+                <a:alpha val="18000"/>
+              </a:srgbClr>
+            </a:outerShdw>
+          </a:effectLst>
+        </p:spPr>
+      </p:sp>
+      <p:sp>
+        <p:nvSpPr>
+          <p:cNvPr id="14" name="Shape 10"/>
+          <p:cNvSpPr/>
+          <p:nvPr/>
+        </p:nvSpPr>
+        <p:spPr>
+          <a:xfrm>
+            <a:off x="7200900" y="1371600"/>
+            <a:ext cx="548640" cy="548640"/>
           </a:xfrm>
           <a:prstGeom prst="ellipse">
             <a:avLst/>
           </a:prstGeom>
           <a:solidFill>
-            <a:srgbClr val="2A3372"/>
+            <a:srgbClr val="EEF3FD"/>
           </a:solidFill>
           <a:ln/>
         </p:spPr>
       </p:sp>
       <p:pic>
         <p:nvPicPr>
-          <p:cNvPr id="12" name="Image 2" descr="preencoded.png">    </p:cNvPr>
+          <p:cNvPr id="15" name="Image 2" descr="preencoded.png">    </p:cNvPr>
           <p:cNvPicPr>
             <a:picLocks noChangeAspect="1"/>
           </p:cNvPicPr>
@@ -5126,8 +6532,8 @@
         </p:blipFill>
         <p:spPr>
           <a:xfrm>
-            <a:off x="749808" y="2715768"/>
-            <a:ext cx="256032" cy="256032"/>
+            <a:off x="7343546" y="1514246"/>
+            <a:ext cx="263347" cy="263347"/>
           </a:xfrm>
           <a:prstGeom prst="rect">
             <a:avLst/>
@@ -5136,14 +6542,121 @@
       </p:pic>
       <p:sp>
         <p:nvSpPr>
-          <p:cNvPr id="13" name="Text 8"/>
-          <p:cNvSpPr/>
-          <p:nvPr/>
-        </p:nvSpPr>
-        <p:spPr>
-          <a:xfrm>
-            <a:off x="1280160" y="2587752"/>
-            <a:ext cx="3291840" cy="320040"/>
+          <p:cNvPr id="16" name="Text 11"/>
+          <p:cNvSpPr/>
+          <p:nvPr/>
+        </p:nvSpPr>
+        <p:spPr>
+          <a:xfrm>
+            <a:off x="6300216" y="2029968"/>
+            <a:ext cx="2350008" cy="365760"/>
+          </a:xfrm>
+          <a:prstGeom prst="rect">
+            <a:avLst/>
+          </a:prstGeom>
+          <a:noFill/>
+          <a:ln/>
+        </p:spPr>
+        <p:txBody>
+          <a:bodyPr wrap="square" lIns="0" tIns="0" rIns="0" bIns="0" rtlCol="0" anchor="ctr"/>
+          <a:lstStyle/>
+          <a:p>
+            <a:pPr algn="ctr" indent="0" marL="0">
+              <a:buNone/>
+            </a:pPr>
+            <a:r>
+              <a:rPr lang="en-US" sz="1300" b="1" dirty="0">
+                <a:solidFill>
+                  <a:srgbClr val="1E2761"/>
+                </a:solidFill>
+                <a:latin typeface="Calibri" pitchFamily="34" charset="0"/>
+                <a:ea typeface="Calibri" pitchFamily="34" charset="-122"/>
+                <a:cs typeface="Calibri" pitchFamily="34" charset="-120"/>
+              </a:rPr>
+              <a:t>Chronological Split</a:t>
+            </a:r>
+            <a:endParaRPr lang="en-US" sz="1300" dirty="0"/>
+          </a:p>
+        </p:txBody>
+      </p:sp>
+      <p:sp>
+        <p:nvSpPr>
+          <p:cNvPr id="17" name="Text 12"/>
+          <p:cNvSpPr/>
+          <p:nvPr/>
+        </p:nvSpPr>
+        <p:spPr>
+          <a:xfrm>
+            <a:off x="6327648" y="2423160"/>
+            <a:ext cx="2295144" cy="868680"/>
+          </a:xfrm>
+          <a:prstGeom prst="rect">
+            <a:avLst/>
+          </a:prstGeom>
+          <a:noFill/>
+          <a:ln/>
+        </p:spPr>
+        <p:txBody>
+          <a:bodyPr wrap="square" lIns="0" tIns="0" rIns="0" bIns="0" rtlCol="0" anchor="t"/>
+          <a:lstStyle/>
+          <a:p>
+            <a:pPr algn="ctr" indent="0" marL="0">
+              <a:buNone/>
+            </a:pPr>
+            <a:r>
+              <a:rPr lang="en-US" sz="1000" dirty="0">
+                <a:solidFill>
+                  <a:srgbClr val="5B6478"/>
+                </a:solidFill>
+                <a:latin typeface="Calibri" pitchFamily="34" charset="0"/>
+                <a:ea typeface="Calibri" pitchFamily="34" charset="-122"/>
+                <a:cs typeface="Calibri" pitchFamily="34" charset="-120"/>
+              </a:rPr>
+              <a:t>Per vehicle, last ~20% of the timeline held out — not a random row split, avoids adjacent-hour leakage.</a:t>
+            </a:r>
+            <a:endParaRPr lang="en-US" sz="1000" dirty="0"/>
+          </a:p>
+        </p:txBody>
+      </p:sp>
+      <p:sp>
+        <p:nvSpPr>
+          <p:cNvPr id="18" name="Shape 13"/>
+          <p:cNvSpPr/>
+          <p:nvPr/>
+        </p:nvSpPr>
+        <p:spPr>
+          <a:xfrm>
+            <a:off x="548640" y="3611880"/>
+            <a:ext cx="8046720" cy="1051560"/>
+          </a:xfrm>
+          <a:prstGeom prst="roundRect">
+            <a:avLst>
+              <a:gd name="adj" fmla="val 8696"/>
+            </a:avLst>
+          </a:prstGeom>
+          <a:solidFill>
+            <a:srgbClr val="EEF3FD"/>
+          </a:solidFill>
+          <a:ln/>
+          <a:effectLst>
+            <a:outerShdw sx="100000" sy="100000" kx="0" ky="0" algn="bl" rotWithShape="0" blurRad="127000" dist="38100" dir="2700000">
+              <a:srgbClr val="0B1030">
+                <a:alpha val="18000"/>
+              </a:srgbClr>
+            </a:outerShdw>
+          </a:effectLst>
+        </p:spPr>
+      </p:sp>
+      <p:sp>
+        <p:nvSpPr>
+          <p:cNvPr id="19" name="Text 14"/>
+          <p:cNvSpPr/>
+          <p:nvPr/>
+        </p:nvSpPr>
+        <p:spPr>
+          <a:xfrm>
+            <a:off x="822960" y="3611880"/>
+            <a:ext cx="7498080" cy="1051560"/>
           </a:xfrm>
           <a:prstGeom prst="rect">
             <a:avLst/>
@@ -5159,82 +6672,401 @@
               <a:buNone/>
             </a:pPr>
             <a:r>
-              <a:rPr lang="en-US" sz="1400" b="1" dirty="0">
-                <a:solidFill>
-                  <a:srgbClr val="FFFFFF"/>
-                </a:solidFill>
-                <a:latin typeface="Calibri" pitchFamily="34" charset="0"/>
-                <a:ea typeface="Calibri" pitchFamily="34" charset="-122"/>
-                <a:cs typeface="Calibri" pitchFamily="34" charset="-120"/>
-              </a:rPr>
-              <a:t>NHTSA-grounded retrieval</a:t>
-            </a:r>
-            <a:endParaRPr lang="en-US" sz="1400" dirty="0"/>
-          </a:p>
-        </p:txBody>
-      </p:sp>
-      <p:sp>
-        <p:nvSpPr>
-          <p:cNvPr id="14" name="Text 9"/>
-          <p:cNvSpPr/>
-          <p:nvPr/>
-        </p:nvSpPr>
-        <p:spPr>
-          <a:xfrm>
-            <a:off x="1280160" y="2889504"/>
-            <a:ext cx="3566160" cy="274320"/>
-          </a:xfrm>
-          <a:prstGeom prst="rect">
-            <a:avLst/>
-          </a:prstGeom>
-          <a:noFill/>
-          <a:ln/>
-        </p:spPr>
-        <p:txBody>
-          <a:bodyPr wrap="square" lIns="0" tIns="0" rIns="0" bIns="0" rtlCol="0" anchor="ctr"/>
-          <a:lstStyle/>
-          <a:p>
+              <a:rPr lang="en-US" sz="1300" b="1" dirty="0">
+                <a:solidFill>
+                  <a:srgbClr val="1E2761"/>
+                </a:solidFill>
+                <a:latin typeface="Calibri" pitchFamily="34" charset="0"/>
+                <a:ea typeface="Calibri" pitchFamily="34" charset="-122"/>
+                <a:cs typeface="Calibri" pitchFamily="34" charset="-120"/>
+              </a:rPr>
+              <a:t>Why not accuracy: </a:t>
+            </a:r>
             <a:pPr indent="0" marL="0">
               <a:buNone/>
             </a:pPr>
             <a:r>
-              <a:rPr lang="en-US" sz="1050" dirty="0">
-                <a:solidFill>
-                  <a:srgbClr val="CADCFC"/>
-                </a:solidFill>
-                <a:latin typeface="Calibri" pitchFamily="34" charset="0"/>
-                <a:ea typeface="Calibri" pitchFamily="34" charset="-122"/>
-                <a:cs typeface="Calibri" pitchFamily="34" charset="-120"/>
-              </a:rPr>
-              <a:t>recalls, complaints, TSBs</a:t>
-            </a:r>
-            <a:endParaRPr lang="en-US" sz="1050" dirty="0"/>
-          </a:p>
-        </p:txBody>
-      </p:sp>
-      <p:sp>
-        <p:nvSpPr>
-          <p:cNvPr id="15" name="Shape 10"/>
-          <p:cNvSpPr/>
-          <p:nvPr/>
-        </p:nvSpPr>
-        <p:spPr>
-          <a:xfrm>
-            <a:off x="640080" y="3236976"/>
-            <a:ext cx="457200" cy="457200"/>
-          </a:xfrm>
-          <a:prstGeom prst="ellipse">
-            <a:avLst/>
+              <a:rPr lang="en-US" sz="1300" dirty="0">
+                <a:solidFill>
+                  <a:srgbClr val="2B3350"/>
+                </a:solidFill>
+                <a:latin typeface="Calibri" pitchFamily="34" charset="0"/>
+                <a:ea typeface="Calibri" pitchFamily="34" charset="-122"/>
+                <a:cs typeface="Calibri" pitchFamily="34" charset="-120"/>
+              </a:rPr>
+              <a:t>with 98.37% of rows Normal, guessing “Normal” every time scores 98%+ while catching zero real faults.</a:t>
+            </a:r>
+            <a:endParaRPr lang="en-US" sz="1300" dirty="0"/>
+          </a:p>
+        </p:txBody>
+      </p:sp>
+      <p:sp>
+        <p:nvSpPr>
+          <p:cNvPr id="20" name="Text 15"/>
+          <p:cNvSpPr/>
+          <p:nvPr/>
+        </p:nvSpPr>
+        <p:spPr>
+          <a:xfrm>
+            <a:off x="8732520" y="4800600"/>
+            <a:ext cx="365760" cy="274320"/>
+          </a:xfrm>
+          <a:prstGeom prst="rect">
+            <a:avLst/>
+          </a:prstGeom>
+          <a:noFill/>
+          <a:ln/>
+        </p:spPr>
+        <p:txBody>
+          <a:bodyPr wrap="square" lIns="0" tIns="0" rIns="0" bIns="0" rtlCol="0" anchor="ctr"/>
+          <a:lstStyle/>
+          <a:p>
+            <a:pPr algn="r" indent="0" marL="0">
+              <a:buNone/>
+            </a:pPr>
+            <a:r>
+              <a:rPr lang="en-US" sz="1000" dirty="0">
+                <a:solidFill>
+                  <a:srgbClr val="5B6478"/>
+                </a:solidFill>
+              </a:rPr>
+              <a:t>7</a:t>
+            </a:r>
+            <a:endParaRPr lang="en-US" sz="1000" dirty="0"/>
+          </a:p>
+        </p:txBody>
+      </p:sp>
+    </p:spTree>
+  </p:cSld>
+  <p:clrMapOvr>
+    <a:masterClrMapping/>
+  </p:clrMapOvr>
+</p:sld>
+</file>
+
+<file path=ppt/slides/slide8.xml><?xml version="1.0" encoding="utf-8"?>
+<p:sld xmlns:a="http://schemas.openxmlformats.org/drawingml/2006/main" xmlns:r="http://schemas.openxmlformats.org/officeDocument/2006/relationships" xmlns:p="http://schemas.openxmlformats.org/presentationml/2006/main">
+  <p:cSld name="Slide 8">
+    <p:bg>
+      <p:bgPr>
+        <a:solidFill>
+          <a:srgbClr val="F7F9FC"/>
+        </a:solidFill>
+      </p:bgPr>
+    </p:bg>
+    <p:spTree>
+      <p:nvGrpSpPr>
+        <p:cNvPr id="1" name=""/>
+        <p:cNvGrpSpPr/>
+        <p:nvPr/>
+      </p:nvGrpSpPr>
+      <p:grpSpPr>
+        <a:xfrm>
+          <a:off x="0" y="0"/>
+          <a:ext cx="0" cy="0"/>
+          <a:chOff x="0" y="0"/>
+          <a:chExt cx="0" cy="0"/>
+        </a:xfrm>
+      </p:grpSpPr>
+      <p:sp>
+        <p:nvSpPr>
+          <p:cNvPr id="2" name="Text 0"/>
+          <p:cNvSpPr/>
+          <p:nvPr/>
+        </p:nvSpPr>
+        <p:spPr>
+          <a:xfrm>
+            <a:off x="548640" y="365760"/>
+            <a:ext cx="8046720" cy="640080"/>
+          </a:xfrm>
+          <a:prstGeom prst="rect">
+            <a:avLst/>
+          </a:prstGeom>
+          <a:noFill/>
+          <a:ln/>
+        </p:spPr>
+        <p:txBody>
+          <a:bodyPr wrap="square" lIns="0" tIns="0" rIns="0" bIns="0" rtlCol="0" anchor="ctr"/>
+          <a:lstStyle/>
+          <a:p>
+            <a:pPr indent="0" marL="0">
+              <a:buNone/>
+            </a:pPr>
+            <a:r>
+              <a:rPr lang="en-US" sz="3000" b="1" dirty="0">
+                <a:solidFill>
+                  <a:srgbClr val="1E2761"/>
+                </a:solidFill>
+                <a:latin typeface="Calibri" pitchFamily="34" charset="0"/>
+                <a:ea typeface="Calibri" pitchFamily="34" charset="-122"/>
+                <a:cs typeface="Calibri" pitchFamily="34" charset="-120"/>
+              </a:rPr>
+              <a:t>Why Agentic Matters</a:t>
+            </a:r>
+            <a:endParaRPr lang="en-US" sz="3000" dirty="0"/>
+          </a:p>
+        </p:txBody>
+      </p:sp>
+      <p:sp>
+        <p:nvSpPr>
+          <p:cNvPr id="3" name="Shape 1"/>
+          <p:cNvSpPr/>
+          <p:nvPr/>
+        </p:nvSpPr>
+        <p:spPr>
+          <a:xfrm>
+            <a:off x="548640" y="1234440"/>
+            <a:ext cx="3840480" cy="3246120"/>
+          </a:xfrm>
+          <a:prstGeom prst="roundRect">
+            <a:avLst>
+              <a:gd name="adj" fmla="val 3380"/>
+            </a:avLst>
           </a:prstGeom>
           <a:solidFill>
-            <a:srgbClr val="2A3372"/>
+            <a:srgbClr val="FFFFFF"/>
           </a:solidFill>
           <a:ln/>
-        </p:spPr>
+          <a:effectLst>
+            <a:outerShdw sx="100000" sy="100000" kx="0" ky="0" algn="bl" rotWithShape="0" blurRad="127000" dist="38100" dir="2700000">
+              <a:srgbClr val="0B1030">
+                <a:alpha val="18000"/>
+              </a:srgbClr>
+            </a:outerShdw>
+          </a:effectLst>
+        </p:spPr>
+      </p:sp>
+      <p:sp>
+        <p:nvSpPr>
+          <p:cNvPr id="4" name="Text 2"/>
+          <p:cNvSpPr/>
+          <p:nvPr/>
+        </p:nvSpPr>
+        <p:spPr>
+          <a:xfrm>
+            <a:off x="822960" y="1417320"/>
+            <a:ext cx="3291840" cy="365760"/>
+          </a:xfrm>
+          <a:prstGeom prst="rect">
+            <a:avLst/>
+          </a:prstGeom>
+          <a:noFill/>
+          <a:ln/>
+        </p:spPr>
+        <p:txBody>
+          <a:bodyPr wrap="square" lIns="0" tIns="0" rIns="0" bIns="0" rtlCol="0" anchor="ctr"/>
+          <a:lstStyle/>
+          <a:p>
+            <a:pPr indent="0" marL="0">
+              <a:buNone/>
+            </a:pPr>
+            <a:r>
+              <a:rPr lang="en-US" sz="1600" b="1" dirty="0">
+                <a:solidFill>
+                  <a:srgbClr val="5B6478"/>
+                </a:solidFill>
+                <a:latin typeface="Calibri" pitchFamily="34" charset="0"/>
+                <a:ea typeface="Calibri" pitchFamily="34" charset="-122"/>
+                <a:cs typeface="Calibri" pitchFamily="34" charset="-120"/>
+              </a:rPr>
+              <a:t>Typical Pipeline</a:t>
+            </a:r>
+            <a:endParaRPr lang="en-US" sz="1600" dirty="0"/>
+          </a:p>
+        </p:txBody>
       </p:sp>
       <p:pic>
         <p:nvPicPr>
-          <p:cNvPr id="16" name="Image 3" descr="preencoded.png">    </p:cNvPr>
+          <p:cNvPr id="5" name="Image 0" descr="preencoded.png">    </p:cNvPr>
+          <p:cNvPicPr>
+            <a:picLocks noChangeAspect="1"/>
+          </p:cNvPicPr>
+          <p:nvPr/>
+        </p:nvPicPr>
+        <p:blipFill>
+          <a:blip r:embed="rId1"/>
+          <a:stretch>
+            <a:fillRect/>
+          </a:stretch>
+        </p:blipFill>
+        <p:spPr>
+          <a:xfrm>
+            <a:off x="868680" y="1965960"/>
+            <a:ext cx="292608" cy="292608"/>
+          </a:xfrm>
+          <a:prstGeom prst="rect">
+            <a:avLst/>
+          </a:prstGeom>
+        </p:spPr>
+      </p:pic>
+      <p:sp>
+        <p:nvSpPr>
+          <p:cNvPr id="6" name="Text 3"/>
+          <p:cNvSpPr/>
+          <p:nvPr/>
+        </p:nvSpPr>
+        <p:spPr>
+          <a:xfrm>
+            <a:off x="1280160" y="1920240"/>
+            <a:ext cx="2926080" cy="457200"/>
+          </a:xfrm>
+          <a:prstGeom prst="rect">
+            <a:avLst/>
+          </a:prstGeom>
+          <a:noFill/>
+          <a:ln/>
+        </p:spPr>
+        <p:txBody>
+          <a:bodyPr wrap="square" lIns="0" tIns="0" rIns="0" bIns="0" rtlCol="0" anchor="ctr"/>
+          <a:lstStyle/>
+          <a:p>
+            <a:pPr indent="0" marL="0">
+              <a:buNone/>
+            </a:pPr>
+            <a:r>
+              <a:rPr lang="en-US" sz="1250" dirty="0">
+                <a:solidFill>
+                  <a:srgbClr val="3D4560"/>
+                </a:solidFill>
+                <a:latin typeface="Calibri" pitchFamily="34" charset="0"/>
+                <a:ea typeface="Calibri" pitchFamily="34" charset="-122"/>
+                <a:cs typeface="Calibri" pitchFamily="34" charset="-120"/>
+              </a:rPr>
+              <a:t>Fixed script, one pass through</a:t>
+            </a:r>
+            <a:endParaRPr lang="en-US" sz="1250" dirty="0"/>
+          </a:p>
+        </p:txBody>
+      </p:sp>
+      <p:pic>
+        <p:nvPicPr>
+          <p:cNvPr id="7" name="Image 1" descr="preencoded.png">    </p:cNvPr>
+          <p:cNvPicPr>
+            <a:picLocks noChangeAspect="1"/>
+          </p:cNvPicPr>
+          <p:nvPr/>
+        </p:nvPicPr>
+        <p:blipFill>
+          <a:blip r:embed="rId2"/>
+          <a:stretch>
+            <a:fillRect/>
+          </a:stretch>
+        </p:blipFill>
+        <p:spPr>
+          <a:xfrm>
+            <a:off x="868680" y="2532888"/>
+            <a:ext cx="292608" cy="292608"/>
+          </a:xfrm>
+          <a:prstGeom prst="rect">
+            <a:avLst/>
+          </a:prstGeom>
+        </p:spPr>
+      </p:pic>
+      <p:sp>
+        <p:nvSpPr>
+          <p:cNvPr id="8" name="Text 4"/>
+          <p:cNvSpPr/>
+          <p:nvPr/>
+        </p:nvSpPr>
+        <p:spPr>
+          <a:xfrm>
+            <a:off x="1280160" y="2487168"/>
+            <a:ext cx="2926080" cy="457200"/>
+          </a:xfrm>
+          <a:prstGeom prst="rect">
+            <a:avLst/>
+          </a:prstGeom>
+          <a:noFill/>
+          <a:ln/>
+        </p:spPr>
+        <p:txBody>
+          <a:bodyPr wrap="square" lIns="0" tIns="0" rIns="0" bIns="0" rtlCol="0" anchor="ctr"/>
+          <a:lstStyle/>
+          <a:p>
+            <a:pPr indent="0" marL="0">
+              <a:buNone/>
+            </a:pPr>
+            <a:r>
+              <a:rPr lang="en-US" sz="1250" dirty="0">
+                <a:solidFill>
+                  <a:srgbClr val="3D4560"/>
+                </a:solidFill>
+                <a:latin typeface="Calibri" pitchFamily="34" charset="0"/>
+                <a:ea typeface="Calibri" pitchFamily="34" charset="-122"/>
+                <a:cs typeface="Calibri" pitchFamily="34" charset="-120"/>
+              </a:rPr>
+              <a:t>Classify → template output</a:t>
+            </a:r>
+            <a:endParaRPr lang="en-US" sz="1250" dirty="0"/>
+          </a:p>
+        </p:txBody>
+      </p:sp>
+      <p:pic>
+        <p:nvPicPr>
+          <p:cNvPr id="9" name="Image 2" descr="preencoded.png">    </p:cNvPr>
+          <p:cNvPicPr>
+            <a:picLocks noChangeAspect="1"/>
+          </p:cNvPicPr>
+          <p:nvPr/>
+        </p:nvPicPr>
+        <p:blipFill>
+          <a:blip r:embed="rId3"/>
+          <a:stretch>
+            <a:fillRect/>
+          </a:stretch>
+        </p:blipFill>
+        <p:spPr>
+          <a:xfrm>
+            <a:off x="868680" y="3099816"/>
+            <a:ext cx="292608" cy="292608"/>
+          </a:xfrm>
+          <a:prstGeom prst="rect">
+            <a:avLst/>
+          </a:prstGeom>
+        </p:spPr>
+      </p:pic>
+      <p:sp>
+        <p:nvSpPr>
+          <p:cNvPr id="10" name="Text 5"/>
+          <p:cNvSpPr/>
+          <p:nvPr/>
+        </p:nvSpPr>
+        <p:spPr>
+          <a:xfrm>
+            <a:off x="1280160" y="3054096"/>
+            <a:ext cx="2926080" cy="457200"/>
+          </a:xfrm>
+          <a:prstGeom prst="rect">
+            <a:avLst/>
+          </a:prstGeom>
+          <a:noFill/>
+          <a:ln/>
+        </p:spPr>
+        <p:txBody>
+          <a:bodyPr wrap="square" lIns="0" tIns="0" rIns="0" bIns="0" rtlCol="0" anchor="ctr"/>
+          <a:lstStyle/>
+          <a:p>
+            <a:pPr indent="0" marL="0">
+              <a:buNone/>
+            </a:pPr>
+            <a:r>
+              <a:rPr lang="en-US" sz="1250" dirty="0">
+                <a:solidFill>
+                  <a:srgbClr val="3D4560"/>
+                </a:solidFill>
+                <a:latin typeface="Calibri" pitchFamily="34" charset="0"/>
+                <a:ea typeface="Calibri" pitchFamily="34" charset="-122"/>
+                <a:cs typeface="Calibri" pitchFamily="34" charset="-120"/>
+              </a:rPr>
+              <a:t>No visible reasoning</a:t>
+            </a:r>
+            <a:endParaRPr lang="en-US" sz="1250" dirty="0"/>
+          </a:p>
+        </p:txBody>
+      </p:sp>
+      <p:pic>
+        <p:nvPicPr>
+          <p:cNvPr id="11" name="Image 3" descr="preencoded.png">    </p:cNvPr>
           <p:cNvPicPr>
             <a:picLocks noChangeAspect="1"/>
           </p:cNvPicPr>
@@ -5248,8 +7080,8 @@
         </p:blipFill>
         <p:spPr>
           <a:xfrm>
-            <a:off x="749808" y="3337560"/>
-            <a:ext cx="256032" cy="256032"/>
+            <a:off x="868680" y="3666744"/>
+            <a:ext cx="292608" cy="292608"/>
           </a:xfrm>
           <a:prstGeom prst="rect">
             <a:avLst/>
@@ -5258,14 +7090,14 @@
       </p:pic>
       <p:sp>
         <p:nvSpPr>
-          <p:cNvPr id="17" name="Text 11"/>
-          <p:cNvSpPr/>
-          <p:nvPr/>
-        </p:nvSpPr>
-        <p:spPr>
-          <a:xfrm>
-            <a:off x="1280160" y="3209544"/>
-            <a:ext cx="3291840" cy="320040"/>
+          <p:cNvPr id="12" name="Text 6"/>
+          <p:cNvSpPr/>
+          <p:nvPr/>
+        </p:nvSpPr>
+        <p:spPr>
+          <a:xfrm>
+            <a:off x="1280160" y="3621024"/>
+            <a:ext cx="2926080" cy="457200"/>
           </a:xfrm>
           <a:prstGeom prst="rect">
             <a:avLst/>
@@ -5281,30 +7113,59 @@
               <a:buNone/>
             </a:pPr>
             <a:r>
-              <a:rPr lang="en-US" sz="1400" b="1" dirty="0">
-                <a:solidFill>
-                  <a:srgbClr val="FFFFFF"/>
-                </a:solidFill>
-                <a:latin typeface="Calibri" pitchFamily="34" charset="0"/>
-                <a:ea typeface="Calibri" pitchFamily="34" charset="-122"/>
-                <a:cs typeface="Calibri" pitchFamily="34" charset="-120"/>
-              </a:rPr>
-              <a:t>Agentic ticket generation</a:t>
-            </a:r>
-            <a:endParaRPr lang="en-US" sz="1400" dirty="0"/>
-          </a:p>
-        </p:txBody>
-      </p:sp>
-      <p:sp>
-        <p:nvSpPr>
-          <p:cNvPr id="18" name="Text 12"/>
-          <p:cNvSpPr/>
-          <p:nvPr/>
-        </p:nvSpPr>
-        <p:spPr>
-          <a:xfrm>
-            <a:off x="1280160" y="3511296"/>
-            <a:ext cx="3566160" cy="274320"/>
+              <a:rPr lang="en-US" sz="1250" dirty="0">
+                <a:solidFill>
+                  <a:srgbClr val="3D4560"/>
+                </a:solidFill>
+                <a:latin typeface="Calibri" pitchFamily="34" charset="0"/>
+                <a:ea typeface="Calibri" pitchFamily="34" charset="-122"/>
+                <a:cs typeface="Calibri" pitchFamily="34" charset="-120"/>
+              </a:rPr>
+              <a:t>Reads as “just a chatbot”</a:t>
+            </a:r>
+            <a:endParaRPr lang="en-US" sz="1250" dirty="0"/>
+          </a:p>
+        </p:txBody>
+      </p:sp>
+      <p:sp>
+        <p:nvSpPr>
+          <p:cNvPr id="13" name="Shape 7"/>
+          <p:cNvSpPr/>
+          <p:nvPr/>
+        </p:nvSpPr>
+        <p:spPr>
+          <a:xfrm>
+            <a:off x="4754880" y="1234440"/>
+            <a:ext cx="3840480" cy="3246120"/>
+          </a:xfrm>
+          <a:prstGeom prst="roundRect">
+            <a:avLst>
+              <a:gd name="adj" fmla="val 3380"/>
+            </a:avLst>
+          </a:prstGeom>
+          <a:solidFill>
+            <a:srgbClr val="1E2761"/>
+          </a:solidFill>
+          <a:ln/>
+          <a:effectLst>
+            <a:outerShdw sx="100000" sy="100000" kx="0" ky="0" algn="bl" rotWithShape="0" blurRad="127000" dist="38100" dir="2700000">
+              <a:srgbClr val="0B1030">
+                <a:alpha val="18000"/>
+              </a:srgbClr>
+            </a:outerShdw>
+          </a:effectLst>
+        </p:spPr>
+      </p:sp>
+      <p:sp>
+        <p:nvSpPr>
+          <p:cNvPr id="14" name="Text 8"/>
+          <p:cNvSpPr/>
+          <p:nvPr/>
+        </p:nvSpPr>
+        <p:spPr>
+          <a:xfrm>
+            <a:off x="5029200" y="1417320"/>
+            <a:ext cx="3291840" cy="365760"/>
           </a:xfrm>
           <a:prstGeom prst="rect">
             <a:avLst/>
@@ -5320,43 +7181,23 @@
               <a:buNone/>
             </a:pPr>
             <a:r>
-              <a:rPr lang="en-US" sz="1050" dirty="0">
-                <a:solidFill>
-                  <a:srgbClr val="CADCFC"/>
-                </a:solidFill>
-                <a:latin typeface="Calibri" pitchFamily="34" charset="0"/>
-                <a:ea typeface="Calibri" pitchFamily="34" charset="-122"/>
-                <a:cs typeface="Calibri" pitchFamily="34" charset="-120"/>
-              </a:rPr>
-              <a:t>tool-calling loop + guardrails</a:t>
-            </a:r>
-            <a:endParaRPr lang="en-US" sz="1050" dirty="0"/>
-          </a:p>
-        </p:txBody>
-      </p:sp>
-      <p:sp>
-        <p:nvSpPr>
-          <p:cNvPr id="19" name="Shape 13"/>
-          <p:cNvSpPr/>
-          <p:nvPr/>
-        </p:nvSpPr>
-        <p:spPr>
-          <a:xfrm>
-            <a:off x="640080" y="3858768"/>
-            <a:ext cx="457200" cy="457200"/>
-          </a:xfrm>
-          <a:prstGeom prst="ellipse">
-            <a:avLst/>
-          </a:prstGeom>
-          <a:solidFill>
-            <a:srgbClr val="2A3372"/>
-          </a:solidFill>
-          <a:ln/>
-        </p:spPr>
+              <a:rPr lang="en-US" sz="1600" b="1" dirty="0">
+                <a:solidFill>
+                  <a:srgbClr val="F2A93B"/>
+                </a:solidFill>
+                <a:latin typeface="Calibri" pitchFamily="34" charset="0"/>
+                <a:ea typeface="Calibri" pitchFamily="34" charset="-122"/>
+                <a:cs typeface="Calibri" pitchFamily="34" charset="-120"/>
+              </a:rPr>
+              <a:t>Our Agentic Approach</a:t>
+            </a:r>
+            <a:endParaRPr lang="en-US" sz="1600" dirty="0"/>
+          </a:p>
+        </p:txBody>
       </p:sp>
       <p:pic>
         <p:nvPicPr>
-          <p:cNvPr id="20" name="Image 4" descr="preencoded.png">    </p:cNvPr>
+          <p:cNvPr id="15" name="Image 4" descr="preencoded.png">    </p:cNvPr>
           <p:cNvPicPr>
             <a:picLocks noChangeAspect="1"/>
           </p:cNvPicPr>
@@ -5370,8 +7211,8 @@
         </p:blipFill>
         <p:spPr>
           <a:xfrm>
-            <a:off x="749808" y="3959352"/>
-            <a:ext cx="256032" cy="256032"/>
+            <a:off x="5074920" y="1965960"/>
+            <a:ext cx="292608" cy="292608"/>
           </a:xfrm>
           <a:prstGeom prst="rect">
             <a:avLst/>
@@ -5380,14 +7221,14 @@
       </p:pic>
       <p:sp>
         <p:nvSpPr>
-          <p:cNvPr id="21" name="Text 14"/>
-          <p:cNvSpPr/>
-          <p:nvPr/>
-        </p:nvSpPr>
-        <p:spPr>
-          <a:xfrm>
-            <a:off x="1280160" y="3831336"/>
-            <a:ext cx="3291840" cy="320040"/>
+          <p:cNvPr id="16" name="Text 9"/>
+          <p:cNvSpPr/>
+          <p:nvPr/>
+        </p:nvSpPr>
+        <p:spPr>
+          <a:xfrm>
+            <a:off x="5486400" y="1920240"/>
+            <a:ext cx="3017520" cy="457200"/>
           </a:xfrm>
           <a:prstGeom prst="rect">
             <a:avLst/>
@@ -5403,7 +7244,7 @@
               <a:buNone/>
             </a:pPr>
             <a:r>
-              <a:rPr lang="en-US" sz="1400" b="1" dirty="0">
+              <a:rPr lang="en-US" sz="1250" dirty="0">
                 <a:solidFill>
                   <a:srgbClr val="FFFFFF"/>
                 </a:solidFill>
@@ -5411,22 +7252,46 @@
                 <a:ea typeface="Calibri" pitchFamily="34" charset="-122"/>
                 <a:cs typeface="Calibri" pitchFamily="34" charset="-120"/>
               </a:rPr>
-              <a:t>Deployed dashboard</a:t>
-            </a:r>
-            <a:endParaRPr lang="en-US" sz="1400" dirty="0"/>
-          </a:p>
-        </p:txBody>
-      </p:sp>
-      <p:sp>
-        <p:nvSpPr>
-          <p:cNvPr id="22" name="Text 15"/>
-          <p:cNvSpPr/>
-          <p:nvPr/>
-        </p:nvSpPr>
-        <p:spPr>
-          <a:xfrm>
-            <a:off x="1280160" y="4133088"/>
-            <a:ext cx="3566160" cy="274320"/>
+              <a:t>LLM decides which tool to call next</a:t>
+            </a:r>
+            <a:endParaRPr lang="en-US" sz="1250" dirty="0"/>
+          </a:p>
+        </p:txBody>
+      </p:sp>
+      <p:pic>
+        <p:nvPicPr>
+          <p:cNvPr id="17" name="Image 5" descr="preencoded.png">    </p:cNvPr>
+          <p:cNvPicPr>
+            <a:picLocks noChangeAspect="1"/>
+          </p:cNvPicPr>
+          <p:nvPr/>
+        </p:nvPicPr>
+        <p:blipFill>
+          <a:blip r:embed="rId6"/>
+          <a:stretch>
+            <a:fillRect/>
+          </a:stretch>
+        </p:blipFill>
+        <p:spPr>
+          <a:xfrm>
+            <a:off x="5074920" y="2532888"/>
+            <a:ext cx="292608" cy="292608"/>
+          </a:xfrm>
+          <a:prstGeom prst="rect">
+            <a:avLst/>
+          </a:prstGeom>
+        </p:spPr>
+      </p:pic>
+      <p:sp>
+        <p:nvSpPr>
+          <p:cNvPr id="18" name="Text 10"/>
+          <p:cNvSpPr/>
+          <p:nvPr/>
+        </p:nvSpPr>
+        <p:spPr>
+          <a:xfrm>
+            <a:off x="5486400" y="2487168"/>
+            <a:ext cx="3017520" cy="457200"/>
           </a:xfrm>
           <a:prstGeom prst="rect">
             <a:avLst/>
@@ -5442,38 +7307,271 @@
               <a:buNone/>
             </a:pPr>
             <a:r>
-              <a:rPr lang="en-US" sz="1050" dirty="0">
-                <a:solidFill>
-                  <a:srgbClr val="CADCFC"/>
-                </a:solidFill>
-                <a:latin typeface="Calibri" pitchFamily="34" charset="0"/>
-                <a:ea typeface="Calibri" pitchFamily="34" charset="-122"/>
-                <a:cs typeface="Calibri" pitchFamily="34" charset="-120"/>
-              </a:rPr>
-              <a:t>trace view + ops metrics</a:t>
-            </a:r>
-            <a:endParaRPr lang="en-US" sz="1050" dirty="0"/>
-          </a:p>
-        </p:txBody>
-      </p:sp>
-      <p:sp>
-        <p:nvSpPr>
-          <p:cNvPr id="23" name="Shape 16"/>
-          <p:cNvSpPr/>
-          <p:nvPr/>
-        </p:nvSpPr>
-        <p:spPr>
-          <a:xfrm>
-            <a:off x="5120640" y="1371600"/>
-            <a:ext cx="3474720" cy="3108960"/>
+              <a:rPr lang="en-US" sz="1250" dirty="0">
+                <a:solidFill>
+                  <a:srgbClr val="FFFFFF"/>
+                </a:solidFill>
+                <a:latin typeface="Calibri" pitchFamily="34" charset="0"/>
+                <a:ea typeface="Calibri" pitchFamily="34" charset="-122"/>
+                <a:cs typeface="Calibri" pitchFamily="34" charset="-120"/>
+              </a:rPr>
+              <a:t>Classify → retrieve → generate, adaptively</a:t>
+            </a:r>
+            <a:endParaRPr lang="en-US" sz="1250" dirty="0"/>
+          </a:p>
+        </p:txBody>
+      </p:sp>
+      <p:pic>
+        <p:nvPicPr>
+          <p:cNvPr id="19" name="Image 6" descr="preencoded.png">    </p:cNvPr>
+          <p:cNvPicPr>
+            <a:picLocks noChangeAspect="1"/>
+          </p:cNvPicPr>
+          <p:nvPr/>
+        </p:nvPicPr>
+        <p:blipFill>
+          <a:blip r:embed="rId7"/>
+          <a:stretch>
+            <a:fillRect/>
+          </a:stretch>
+        </p:blipFill>
+        <p:spPr>
+          <a:xfrm>
+            <a:off x="5074920" y="3099816"/>
+            <a:ext cx="292608" cy="292608"/>
+          </a:xfrm>
+          <a:prstGeom prst="rect">
+            <a:avLst/>
+          </a:prstGeom>
+        </p:spPr>
+      </p:pic>
+      <p:sp>
+        <p:nvSpPr>
+          <p:cNvPr id="20" name="Text 11"/>
+          <p:cNvSpPr/>
+          <p:nvPr/>
+        </p:nvSpPr>
+        <p:spPr>
+          <a:xfrm>
+            <a:off x="5486400" y="3054096"/>
+            <a:ext cx="3017520" cy="457200"/>
+          </a:xfrm>
+          <a:prstGeom prst="rect">
+            <a:avLst/>
+          </a:prstGeom>
+          <a:noFill/>
+          <a:ln/>
+        </p:spPr>
+        <p:txBody>
+          <a:bodyPr wrap="square" lIns="0" tIns="0" rIns="0" bIns="0" rtlCol="0" anchor="ctr"/>
+          <a:lstStyle/>
+          <a:p>
+            <a:pPr indent="0" marL="0">
+              <a:buNone/>
+            </a:pPr>
+            <a:r>
+              <a:rPr lang="en-US" sz="1250" dirty="0">
+                <a:solidFill>
+                  <a:srgbClr val="FFFFFF"/>
+                </a:solidFill>
+                <a:latin typeface="Calibri" pitchFamily="34" charset="0"/>
+                <a:ea typeface="Calibri" pitchFamily="34" charset="-122"/>
+                <a:cs typeface="Calibri" pitchFamily="34" charset="-120"/>
+              </a:rPr>
+              <a:t>Reasoning trace shown in the UI</a:t>
+            </a:r>
+            <a:endParaRPr lang="en-US" sz="1250" dirty="0"/>
+          </a:p>
+        </p:txBody>
+      </p:sp>
+      <p:pic>
+        <p:nvPicPr>
+          <p:cNvPr id="21" name="Image 7" descr="preencoded.png">    </p:cNvPr>
+          <p:cNvPicPr>
+            <a:picLocks noChangeAspect="1"/>
+          </p:cNvPicPr>
+          <p:nvPr/>
+        </p:nvPicPr>
+        <p:blipFill>
+          <a:blip r:embed="rId8"/>
+          <a:stretch>
+            <a:fillRect/>
+          </a:stretch>
+        </p:blipFill>
+        <p:spPr>
+          <a:xfrm>
+            <a:off x="5074920" y="3666744"/>
+            <a:ext cx="292608" cy="292608"/>
+          </a:xfrm>
+          <a:prstGeom prst="rect">
+            <a:avLst/>
+          </a:prstGeom>
+        </p:spPr>
+      </p:pic>
+      <p:sp>
+        <p:nvSpPr>
+          <p:cNvPr id="22" name="Text 12"/>
+          <p:cNvSpPr/>
+          <p:nvPr/>
+        </p:nvSpPr>
+        <p:spPr>
+          <a:xfrm>
+            <a:off x="5486400" y="3621024"/>
+            <a:ext cx="3017520" cy="457200"/>
+          </a:xfrm>
+          <a:prstGeom prst="rect">
+            <a:avLst/>
+          </a:prstGeom>
+          <a:noFill/>
+          <a:ln/>
+        </p:spPr>
+        <p:txBody>
+          <a:bodyPr wrap="square" lIns="0" tIns="0" rIns="0" bIns="0" rtlCol="0" anchor="ctr"/>
+          <a:lstStyle/>
+          <a:p>
+            <a:pPr indent="0" marL="0">
+              <a:buNone/>
+            </a:pPr>
+            <a:r>
+              <a:rPr lang="en-US" sz="1250" dirty="0">
+                <a:solidFill>
+                  <a:srgbClr val="FFFFFF"/>
+                </a:solidFill>
+                <a:latin typeface="Calibri" pitchFamily="34" charset="0"/>
+                <a:ea typeface="Calibri" pitchFamily="34" charset="-122"/>
+                <a:cs typeface="Calibri" pitchFamily="34" charset="-120"/>
+              </a:rPr>
+              <a:t>Grounded, cited, escalates when unsure</a:t>
+            </a:r>
+            <a:endParaRPr lang="en-US" sz="1250" dirty="0"/>
+          </a:p>
+        </p:txBody>
+      </p:sp>
+      <p:sp>
+        <p:nvSpPr>
+          <p:cNvPr id="23" name="Text 13"/>
+          <p:cNvSpPr/>
+          <p:nvPr/>
+        </p:nvSpPr>
+        <p:spPr>
+          <a:xfrm>
+            <a:off x="8732520" y="4800600"/>
+            <a:ext cx="365760" cy="274320"/>
+          </a:xfrm>
+          <a:prstGeom prst="rect">
+            <a:avLst/>
+          </a:prstGeom>
+          <a:noFill/>
+          <a:ln/>
+        </p:spPr>
+        <p:txBody>
+          <a:bodyPr wrap="square" lIns="0" tIns="0" rIns="0" bIns="0" rtlCol="0" anchor="ctr"/>
+          <a:lstStyle/>
+          <a:p>
+            <a:pPr algn="r" indent="0" marL="0">
+              <a:buNone/>
+            </a:pPr>
+            <a:r>
+              <a:rPr lang="en-US" sz="1000" dirty="0">
+                <a:solidFill>
+                  <a:srgbClr val="5B6478"/>
+                </a:solidFill>
+              </a:rPr>
+              <a:t>8</a:t>
+            </a:r>
+            <a:endParaRPr lang="en-US" sz="1000" dirty="0"/>
+          </a:p>
+        </p:txBody>
+      </p:sp>
+    </p:spTree>
+  </p:cSld>
+  <p:clrMapOvr>
+    <a:masterClrMapping/>
+  </p:clrMapOvr>
+</p:sld>
+</file>
+
+<file path=ppt/slides/slide9.xml><?xml version="1.0" encoding="utf-8"?>
+<p:sld xmlns:a="http://schemas.openxmlformats.org/drawingml/2006/main" xmlns:r="http://schemas.openxmlformats.org/officeDocument/2006/relationships" xmlns:p="http://schemas.openxmlformats.org/presentationml/2006/main">
+  <p:cSld name="Slide 9">
+    <p:bg>
+      <p:bgPr>
+        <a:solidFill>
+          <a:srgbClr val="F7F9FC"/>
+        </a:solidFill>
+      </p:bgPr>
+    </p:bg>
+    <p:spTree>
+      <p:nvGrpSpPr>
+        <p:cNvPr id="1" name=""/>
+        <p:cNvGrpSpPr/>
+        <p:nvPr/>
+      </p:nvGrpSpPr>
+      <p:grpSpPr>
+        <a:xfrm>
+          <a:off x="0" y="0"/>
+          <a:ext cx="0" cy="0"/>
+          <a:chOff x="0" y="0"/>
+          <a:chExt cx="0" cy="0"/>
+        </a:xfrm>
+      </p:grpSpPr>
+      <p:sp>
+        <p:nvSpPr>
+          <p:cNvPr id="2" name="Text 0"/>
+          <p:cNvSpPr/>
+          <p:nvPr/>
+        </p:nvSpPr>
+        <p:spPr>
+          <a:xfrm>
+            <a:off x="548640" y="365760"/>
+            <a:ext cx="8046720" cy="640080"/>
+          </a:xfrm>
+          <a:prstGeom prst="rect">
+            <a:avLst/>
+          </a:prstGeom>
+          <a:noFill/>
+          <a:ln/>
+        </p:spPr>
+        <p:txBody>
+          <a:bodyPr wrap="square" lIns="0" tIns="0" rIns="0" bIns="0" rtlCol="0" anchor="ctr"/>
+          <a:lstStyle/>
+          <a:p>
+            <a:pPr indent="0" marL="0">
+              <a:buNone/>
+            </a:pPr>
+            <a:r>
+              <a:rPr lang="en-US" sz="3000" b="1" dirty="0">
+                <a:solidFill>
+                  <a:srgbClr val="1E2761"/>
+                </a:solidFill>
+                <a:latin typeface="Calibri" pitchFamily="34" charset="0"/>
+                <a:ea typeface="Calibri" pitchFamily="34" charset="-122"/>
+                <a:cs typeface="Calibri" pitchFamily="34" charset="-120"/>
+              </a:rPr>
+              <a:t>This Space Is Real — Good News</a:t>
+            </a:r>
+            <a:endParaRPr lang="en-US" sz="3000" dirty="0"/>
+          </a:p>
+        </p:txBody>
+      </p:sp>
+      <p:sp>
+        <p:nvSpPr>
+          <p:cNvPr id="3" name="Shape 1"/>
+          <p:cNvSpPr/>
+          <p:nvPr/>
+        </p:nvSpPr>
+        <p:spPr>
+          <a:xfrm>
+            <a:off x="548640" y="1188720"/>
+            <a:ext cx="2624328" cy="2148840"/>
           </a:xfrm>
           <a:prstGeom prst="roundRect">
             <a:avLst>
-              <a:gd name="adj" fmla="val 3529"/>
+              <a:gd name="adj" fmla="val 5106"/>
             </a:avLst>
           </a:prstGeom>
           <a:solidFill>
-            <a:srgbClr val="161C4A"/>
+            <a:srgbClr val="FFFFFF"/>
           </a:solidFill>
           <a:ln/>
           <a:effectLst>
@@ -5487,42 +7585,42 @@
       </p:sp>
       <p:sp>
         <p:nvSpPr>
-          <p:cNvPr id="24" name="Shape 17"/>
-          <p:cNvSpPr/>
-          <p:nvPr/>
-        </p:nvSpPr>
-        <p:spPr>
-          <a:xfrm>
-            <a:off x="6355080" y="1691640"/>
-            <a:ext cx="1005840" cy="1005840"/>
+          <p:cNvPr id="4" name="Shape 2"/>
+          <p:cNvSpPr/>
+          <p:nvPr/>
+        </p:nvSpPr>
+        <p:spPr>
+          <a:xfrm>
+            <a:off x="1586484" y="1371600"/>
+            <a:ext cx="548640" cy="548640"/>
           </a:xfrm>
           <a:prstGeom prst="ellipse">
             <a:avLst/>
           </a:prstGeom>
           <a:solidFill>
-            <a:srgbClr val="2A3372"/>
+            <a:srgbClr val="EEF3FD"/>
           </a:solidFill>
           <a:ln/>
         </p:spPr>
       </p:sp>
       <p:pic>
         <p:nvPicPr>
-          <p:cNvPr id="25" name="Image 5" descr="preencoded.png">    </p:cNvPr>
+          <p:cNvPr id="5" name="Image 0" descr="preencoded.png">    </p:cNvPr>
           <p:cNvPicPr>
             <a:picLocks noChangeAspect="1"/>
           </p:cNvPicPr>
           <p:nvPr/>
         </p:nvPicPr>
         <p:blipFill>
-          <a:blip r:embed="rId6"/>
+          <a:blip r:embed="rId1"/>
           <a:stretch>
             <a:fillRect/>
           </a:stretch>
         </p:blipFill>
         <p:spPr>
           <a:xfrm>
-            <a:off x="6616598" y="1953158"/>
-            <a:ext cx="482803" cy="482803"/>
+            <a:off x="1729130" y="1514246"/>
+            <a:ext cx="263347" cy="263347"/>
           </a:xfrm>
           <a:prstGeom prst="rect">
             <a:avLst/>
@@ -5531,14 +7629,14 @@
       </p:pic>
       <p:sp>
         <p:nvSpPr>
-          <p:cNvPr id="26" name="Text 18"/>
-          <p:cNvSpPr/>
-          <p:nvPr/>
-        </p:nvSpPr>
-        <p:spPr>
-          <a:xfrm>
-            <a:off x="5303520" y="2880360"/>
-            <a:ext cx="3108960" cy="548640"/>
+          <p:cNvPr id="6" name="Text 3"/>
+          <p:cNvSpPr/>
+          <p:nvPr/>
+        </p:nvSpPr>
+        <p:spPr>
+          <a:xfrm>
+            <a:off x="685800" y="2029968"/>
+            <a:ext cx="2350008" cy="365760"/>
           </a:xfrm>
           <a:prstGeom prst="rect">
             <a:avLst/>
@@ -5554,69 +7652,142 @@
               <a:buNone/>
             </a:pPr>
             <a:r>
-              <a:rPr lang="en-US" sz="1800" b="1" dirty="0">
-                <a:solidFill>
-                  <a:srgbClr val="F2A93B"/>
-                </a:solidFill>
-                <a:latin typeface="Calibri" pitchFamily="34" charset="0"/>
-                <a:ea typeface="Calibri" pitchFamily="34" charset="-122"/>
-                <a:cs typeface="Calibri" pitchFamily="34" charset="-120"/>
-              </a:rPr>
-              <a:t>Let's diagnose smarter.</a:t>
-            </a:r>
-            <a:endParaRPr lang="en-US" sz="1800" dirty="0"/>
-          </a:p>
-        </p:txBody>
-      </p:sp>
-      <p:sp>
-        <p:nvSpPr>
-          <p:cNvPr id="27" name="Text 19"/>
-          <p:cNvSpPr/>
-          <p:nvPr/>
-        </p:nvSpPr>
-        <p:spPr>
-          <a:xfrm>
-            <a:off x="5303520" y="3429000"/>
-            <a:ext cx="3108960" cy="365760"/>
-          </a:xfrm>
-          <a:prstGeom prst="rect">
-            <a:avLst/>
-          </a:prstGeom>
-          <a:noFill/>
-          <a:ln/>
-        </p:spPr>
-        <p:txBody>
-          <a:bodyPr wrap="square" lIns="0" tIns="0" rIns="0" bIns="0" rtlCol="0" anchor="ctr"/>
+              <a:rPr lang="en-US" sz="1300" b="1" dirty="0">
+                <a:solidFill>
+                  <a:srgbClr val="1E2761"/>
+                </a:solidFill>
+                <a:latin typeface="Calibri" pitchFamily="34" charset="0"/>
+                <a:ea typeface="Calibri" pitchFamily="34" charset="-122"/>
+                <a:cs typeface="Calibri" pitchFamily="34" charset="-120"/>
+              </a:rPr>
+              <a:t>MECH AI</a:t>
+            </a:r>
+            <a:endParaRPr lang="en-US" sz="1300" dirty="0"/>
+          </a:p>
+        </p:txBody>
+      </p:sp>
+      <p:sp>
+        <p:nvSpPr>
+          <p:cNvPr id="7" name="Text 4"/>
+          <p:cNvSpPr/>
+          <p:nvPr/>
+        </p:nvSpPr>
+        <p:spPr>
+          <a:xfrm>
+            <a:off x="713232" y="2423160"/>
+            <a:ext cx="2295144" cy="822960"/>
+          </a:xfrm>
+          <a:prstGeom prst="rect">
+            <a:avLst/>
+          </a:prstGeom>
+          <a:noFill/>
+          <a:ln/>
+        </p:spPr>
+        <p:txBody>
+          <a:bodyPr wrap="square" lIns="0" tIns="0" rIns="0" bIns="0" rtlCol="0" anchor="t"/>
           <a:lstStyle/>
           <a:p>
             <a:pPr algn="ctr" indent="0" marL="0">
               <a:buNone/>
             </a:pPr>
             <a:r>
-              <a:rPr lang="en-US" sz="1200" i="1" dirty="0">
-                <a:solidFill>
-                  <a:srgbClr val="CADCFC"/>
-                </a:solidFill>
-                <a:latin typeface="Calibri" pitchFamily="34" charset="0"/>
-                <a:ea typeface="Calibri" pitchFamily="34" charset="-122"/>
-                <a:cs typeface="Calibri" pitchFamily="34" charset="-120"/>
-              </a:rPr>
-              <a:t>Feedback &amp; questions welcome</a:t>
-            </a:r>
-            <a:endParaRPr lang="en-US" sz="1200" dirty="0"/>
-          </a:p>
-        </p:txBody>
-      </p:sp>
-      <p:sp>
-        <p:nvSpPr>
-          <p:cNvPr id="28" name="Text 20"/>
-          <p:cNvSpPr/>
-          <p:nvPr/>
-        </p:nvSpPr>
-        <p:spPr>
-          <a:xfrm>
-            <a:off x="5303520" y="3886200"/>
-            <a:ext cx="3108960" cy="320040"/>
+              <a:rPr lang="en-US" sz="1000" dirty="0">
+                <a:solidFill>
+                  <a:srgbClr val="5B6478"/>
+                </a:solidFill>
+                <a:latin typeface="Calibri" pitchFamily="34" charset="0"/>
+                <a:ea typeface="Calibri" pitchFamily="34" charset="-122"/>
+                <a:cs typeface="Calibri" pitchFamily="34" charset="-120"/>
+              </a:rPr>
+              <a:t>Consumer app cross-referencing OBD-II codes against NHTSA recall data.</a:t>
+            </a:r>
+            <a:endParaRPr lang="en-US" sz="1000" dirty="0"/>
+          </a:p>
+        </p:txBody>
+      </p:sp>
+      <p:sp>
+        <p:nvSpPr>
+          <p:cNvPr id="8" name="Shape 5"/>
+          <p:cNvSpPr/>
+          <p:nvPr/>
+        </p:nvSpPr>
+        <p:spPr>
+          <a:xfrm>
+            <a:off x="3355848" y="1188720"/>
+            <a:ext cx="2624328" cy="2148840"/>
+          </a:xfrm>
+          <a:prstGeom prst="roundRect">
+            <a:avLst>
+              <a:gd name="adj" fmla="val 5106"/>
+            </a:avLst>
+          </a:prstGeom>
+          <a:solidFill>
+            <a:srgbClr val="FFFFFF"/>
+          </a:solidFill>
+          <a:ln/>
+          <a:effectLst>
+            <a:outerShdw sx="100000" sy="100000" kx="0" ky="0" algn="bl" rotWithShape="0" blurRad="127000" dist="38100" dir="2700000">
+              <a:srgbClr val="0B1030">
+                <a:alpha val="18000"/>
+              </a:srgbClr>
+            </a:outerShdw>
+          </a:effectLst>
+        </p:spPr>
+      </p:sp>
+      <p:sp>
+        <p:nvSpPr>
+          <p:cNvPr id="9" name="Shape 6"/>
+          <p:cNvSpPr/>
+          <p:nvPr/>
+        </p:nvSpPr>
+        <p:spPr>
+          <a:xfrm>
+            <a:off x="4393692" y="1371600"/>
+            <a:ext cx="548640" cy="548640"/>
+          </a:xfrm>
+          <a:prstGeom prst="ellipse">
+            <a:avLst/>
+          </a:prstGeom>
+          <a:solidFill>
+            <a:srgbClr val="EEF3FD"/>
+          </a:solidFill>
+          <a:ln/>
+        </p:spPr>
+      </p:sp>
+      <p:pic>
+        <p:nvPicPr>
+          <p:cNvPr id="10" name="Image 1" descr="preencoded.png">    </p:cNvPr>
+          <p:cNvPicPr>
+            <a:picLocks noChangeAspect="1"/>
+          </p:cNvPicPr>
+          <p:nvPr/>
+        </p:nvPicPr>
+        <p:blipFill>
+          <a:blip r:embed="rId2"/>
+          <a:stretch>
+            <a:fillRect/>
+          </a:stretch>
+        </p:blipFill>
+        <p:spPr>
+          <a:xfrm>
+            <a:off x="4536338" y="1514246"/>
+            <a:ext cx="263347" cy="263347"/>
+          </a:xfrm>
+          <a:prstGeom prst="rect">
+            <a:avLst/>
+          </a:prstGeom>
+        </p:spPr>
+      </p:pic>
+      <p:sp>
+        <p:nvSpPr>
+          <p:cNvPr id="11" name="Text 7"/>
+          <p:cNvSpPr/>
+          <p:nvPr/>
+        </p:nvSpPr>
+        <p:spPr>
+          <a:xfrm>
+            <a:off x="3493008" y="2029968"/>
+            <a:ext cx="2350008" cy="365760"/>
           </a:xfrm>
           <a:prstGeom prst="rect">
             <a:avLst/>
@@ -5632,23 +7803,295 @@
               <a:buNone/>
             </a:pPr>
             <a:r>
-              <a:rPr lang="en-US" sz="1100" dirty="0">
-                <a:solidFill>
-                  <a:srgbClr val="8E97C7"/>
-                </a:solidFill>
-                <a:latin typeface="Calibri" pitchFamily="34" charset="0"/>
-                <a:ea typeface="Calibri" pitchFamily="34" charset="-122"/>
-                <a:cs typeface="Calibri" pitchFamily="34" charset="-120"/>
-              </a:rPr>
-              <a:t>Harsha Vardhan Ratnala</a:t>
-            </a:r>
-            <a:endParaRPr lang="en-US" sz="1100" dirty="0"/>
-          </a:p>
-        </p:txBody>
-      </p:sp>
-      <p:sp>
-        <p:nvSpPr>
-          <p:cNvPr id="29" name="Text 21"/>
+              <a:rPr lang="en-US" sz="1300" b="1" dirty="0">
+                <a:solidFill>
+                  <a:srgbClr val="1E2761"/>
+                </a:solidFill>
+                <a:latin typeface="Calibri" pitchFamily="34" charset="0"/>
+                <a:ea typeface="Calibri" pitchFamily="34" charset="-122"/>
+                <a:cs typeface="Calibri" pitchFamily="34" charset="-120"/>
+              </a:rPr>
+              <a:t>Recall Recon (99P Labs)</a:t>
+            </a:r>
+            <a:endParaRPr lang="en-US" sz="1300" dirty="0"/>
+          </a:p>
+        </p:txBody>
+      </p:sp>
+      <p:sp>
+        <p:nvSpPr>
+          <p:cNvPr id="12" name="Text 8"/>
+          <p:cNvSpPr/>
+          <p:nvPr/>
+        </p:nvSpPr>
+        <p:spPr>
+          <a:xfrm>
+            <a:off x="3520440" y="2423160"/>
+            <a:ext cx="2295144" cy="822960"/>
+          </a:xfrm>
+          <a:prstGeom prst="rect">
+            <a:avLst/>
+          </a:prstGeom>
+          <a:noFill/>
+          <a:ln/>
+        </p:spPr>
+        <p:txBody>
+          <a:bodyPr wrap="square" lIns="0" tIns="0" rIns="0" bIns="0" rtlCol="0" anchor="t"/>
+          <a:lstStyle/>
+          <a:p>
+            <a:pPr algn="ctr" indent="0" marL="0">
+              <a:buNone/>
+            </a:pPr>
+            <a:r>
+              <a:rPr lang="en-US" sz="1000" dirty="0">
+                <a:solidFill>
+                  <a:srgbClr val="5B6478"/>
+                </a:solidFill>
+                <a:latin typeface="Calibri" pitchFamily="34" charset="0"/>
+                <a:ea typeface="Calibri" pitchFamily="34" charset="-122"/>
+                <a:cs typeface="Calibri" pitchFamily="34" charset="-120"/>
+              </a:rPr>
+              <a:t>Published ML + RAG system forecasting safety recalls from NHTSA data.</a:t>
+            </a:r>
+            <a:endParaRPr lang="en-US" sz="1000" dirty="0"/>
+          </a:p>
+        </p:txBody>
+      </p:sp>
+      <p:sp>
+        <p:nvSpPr>
+          <p:cNvPr id="13" name="Shape 9"/>
+          <p:cNvSpPr/>
+          <p:nvPr/>
+        </p:nvSpPr>
+        <p:spPr>
+          <a:xfrm>
+            <a:off x="6163056" y="1188720"/>
+            <a:ext cx="2624328" cy="2148840"/>
+          </a:xfrm>
+          <a:prstGeom prst="roundRect">
+            <a:avLst>
+              <a:gd name="adj" fmla="val 5106"/>
+            </a:avLst>
+          </a:prstGeom>
+          <a:solidFill>
+            <a:srgbClr val="FFFFFF"/>
+          </a:solidFill>
+          <a:ln/>
+          <a:effectLst>
+            <a:outerShdw sx="100000" sy="100000" kx="0" ky="0" algn="bl" rotWithShape="0" blurRad="127000" dist="38100" dir="2700000">
+              <a:srgbClr val="0B1030">
+                <a:alpha val="18000"/>
+              </a:srgbClr>
+            </a:outerShdw>
+          </a:effectLst>
+        </p:spPr>
+      </p:sp>
+      <p:sp>
+        <p:nvSpPr>
+          <p:cNvPr id="14" name="Shape 10"/>
+          <p:cNvSpPr/>
+          <p:nvPr/>
+        </p:nvSpPr>
+        <p:spPr>
+          <a:xfrm>
+            <a:off x="7200900" y="1371600"/>
+            <a:ext cx="548640" cy="548640"/>
+          </a:xfrm>
+          <a:prstGeom prst="ellipse">
+            <a:avLst/>
+          </a:prstGeom>
+          <a:solidFill>
+            <a:srgbClr val="EEF3FD"/>
+          </a:solidFill>
+          <a:ln/>
+        </p:spPr>
+      </p:sp>
+      <p:pic>
+        <p:nvPicPr>
+          <p:cNvPr id="15" name="Image 2" descr="preencoded.png">    </p:cNvPr>
+          <p:cNvPicPr>
+            <a:picLocks noChangeAspect="1"/>
+          </p:cNvPicPr>
+          <p:nvPr/>
+        </p:nvPicPr>
+        <p:blipFill>
+          <a:blip r:embed="rId3"/>
+          <a:stretch>
+            <a:fillRect/>
+          </a:stretch>
+        </p:blipFill>
+        <p:spPr>
+          <a:xfrm>
+            <a:off x="7343546" y="1514246"/>
+            <a:ext cx="263347" cy="263347"/>
+          </a:xfrm>
+          <a:prstGeom prst="rect">
+            <a:avLst/>
+          </a:prstGeom>
+        </p:spPr>
+      </p:pic>
+      <p:sp>
+        <p:nvSpPr>
+          <p:cNvPr id="16" name="Text 11"/>
+          <p:cNvSpPr/>
+          <p:nvPr/>
+        </p:nvSpPr>
+        <p:spPr>
+          <a:xfrm>
+            <a:off x="6300216" y="2029968"/>
+            <a:ext cx="2350008" cy="365760"/>
+          </a:xfrm>
+          <a:prstGeom prst="rect">
+            <a:avLst/>
+          </a:prstGeom>
+          <a:noFill/>
+          <a:ln/>
+        </p:spPr>
+        <p:txBody>
+          <a:bodyPr wrap="square" lIns="0" tIns="0" rIns="0" bIns="0" rtlCol="0" anchor="ctr"/>
+          <a:lstStyle/>
+          <a:p>
+            <a:pPr algn="ctr" indent="0" marL="0">
+              <a:buNone/>
+            </a:pPr>
+            <a:r>
+              <a:rPr lang="en-US" sz="1300" b="1" dirty="0">
+                <a:solidFill>
+                  <a:srgbClr val="1E2761"/>
+                </a:solidFill>
+                <a:latin typeface="Calibri" pitchFamily="34" charset="0"/>
+                <a:ea typeface="Calibri" pitchFamily="34" charset="-122"/>
+                <a:cs typeface="Calibri" pitchFamily="34" charset="-120"/>
+              </a:rPr>
+              <a:t>Academic RAG (Springer, 2025)</a:t>
+            </a:r>
+            <a:endParaRPr lang="en-US" sz="1300" dirty="0"/>
+          </a:p>
+        </p:txBody>
+      </p:sp>
+      <p:sp>
+        <p:nvSpPr>
+          <p:cNvPr id="17" name="Text 12"/>
+          <p:cNvSpPr/>
+          <p:nvPr/>
+        </p:nvSpPr>
+        <p:spPr>
+          <a:xfrm>
+            <a:off x="6327648" y="2423160"/>
+            <a:ext cx="2295144" cy="822960"/>
+          </a:xfrm>
+          <a:prstGeom prst="rect">
+            <a:avLst/>
+          </a:prstGeom>
+          <a:noFill/>
+          <a:ln/>
+        </p:spPr>
+        <p:txBody>
+          <a:bodyPr wrap="square" lIns="0" tIns="0" rIns="0" bIns="0" rtlCol="0" anchor="t"/>
+          <a:lstStyle/>
+          <a:p>
+            <a:pPr algn="ctr" indent="0" marL="0">
+              <a:buNone/>
+            </a:pPr>
+            <a:r>
+              <a:rPr lang="en-US" sz="1000" dirty="0">
+                <a:solidFill>
+                  <a:srgbClr val="5B6478"/>
+                </a:solidFill>
+                <a:latin typeface="Calibri" pitchFamily="34" charset="0"/>
+                <a:ea typeface="Calibri" pitchFamily="34" charset="-122"/>
+                <a:cs typeface="Calibri" pitchFamily="34" charset="-120"/>
+              </a:rPr>
+              <a:t>Hybrid classifier + multi-step RAG for generating diagnostic reports.</a:t>
+            </a:r>
+            <a:endParaRPr lang="en-US" sz="1000" dirty="0"/>
+          </a:p>
+        </p:txBody>
+      </p:sp>
+      <p:sp>
+        <p:nvSpPr>
+          <p:cNvPr id="18" name="Shape 13"/>
+          <p:cNvSpPr/>
+          <p:nvPr/>
+        </p:nvSpPr>
+        <p:spPr>
+          <a:xfrm>
+            <a:off x="548640" y="3611880"/>
+            <a:ext cx="8046720" cy="1051560"/>
+          </a:xfrm>
+          <a:prstGeom prst="roundRect">
+            <a:avLst>
+              <a:gd name="adj" fmla="val 8696"/>
+            </a:avLst>
+          </a:prstGeom>
+          <a:solidFill>
+            <a:srgbClr val="EEF3FD"/>
+          </a:solidFill>
+          <a:ln/>
+          <a:effectLst>
+            <a:outerShdw sx="100000" sy="100000" kx="0" ky="0" algn="bl" rotWithShape="0" blurRad="127000" dist="38100" dir="2700000">
+              <a:srgbClr val="0B1030">
+                <a:alpha val="18000"/>
+              </a:srgbClr>
+            </a:outerShdw>
+          </a:effectLst>
+        </p:spPr>
+      </p:sp>
+      <p:sp>
+        <p:nvSpPr>
+          <p:cNvPr id="19" name="Text 14"/>
+          <p:cNvSpPr/>
+          <p:nvPr/>
+        </p:nvSpPr>
+        <p:spPr>
+          <a:xfrm>
+            <a:off x="822960" y="3611880"/>
+            <a:ext cx="7498080" cy="1051560"/>
+          </a:xfrm>
+          <a:prstGeom prst="rect">
+            <a:avLst/>
+          </a:prstGeom>
+          <a:noFill/>
+          <a:ln/>
+        </p:spPr>
+        <p:txBody>
+          <a:bodyPr wrap="square" lIns="0" tIns="0" rIns="0" bIns="0" rtlCol="0" anchor="ctr"/>
+          <a:lstStyle/>
+          <a:p>
+            <a:pPr indent="0" marL="0">
+              <a:buNone/>
+            </a:pPr>
+            <a:r>
+              <a:rPr lang="en-US" sz="1300" b="1" dirty="0">
+                <a:solidFill>
+                  <a:srgbClr val="1E2761"/>
+                </a:solidFill>
+                <a:latin typeface="Calibri" pitchFamily="34" charset="0"/>
+                <a:ea typeface="Calibri" pitchFamily="34" charset="-122"/>
+                <a:cs typeface="Calibri" pitchFamily="34" charset="-120"/>
+              </a:rPr>
+              <a:t>Our edge: </a:t>
+            </a:r>
+            <a:pPr indent="0" marL="0">
+              <a:buNone/>
+            </a:pPr>
+            <a:r>
+              <a:rPr lang="en-US" sz="1300" dirty="0">
+                <a:solidFill>
+                  <a:srgbClr val="2B3350"/>
+                </a:solidFill>
+                <a:latin typeface="Calibri" pitchFamily="34" charset="0"/>
+                <a:ea typeface="Calibri" pitchFamily="34" charset="-122"/>
+                <a:cs typeface="Calibri" pitchFamily="34" charset="-120"/>
+              </a:rPr>
+              <a:t>agentic orchestration with a visible reasoning trace, plus full-stack ownership end-to-end — not a single vendor API.</a:t>
+            </a:r>
+            <a:endParaRPr lang="en-US" sz="1300" dirty="0"/>
+          </a:p>
+        </p:txBody>
+      </p:sp>
+      <p:sp>
+        <p:nvSpPr>
+          <p:cNvPr id="20" name="Text 15"/>
           <p:cNvSpPr/>
           <p:nvPr/>
         </p:nvSpPr>
@@ -5673,10 +8116,10 @@
             <a:r>
               <a:rPr lang="en-US" sz="1000" dirty="0">
                 <a:solidFill>
-                  <a:srgbClr val="CADCFC"/>
-                </a:solidFill>
-              </a:rPr>
-              <a:t>7</a:t>
+                  <a:srgbClr val="5B6478"/>
+                </a:solidFill>
+              </a:rPr>
+              <a:t>9</a:t>
             </a:r>
             <a:endParaRPr lang="en-US" sz="1000" dirty="0"/>
           </a:p>
